--- a/assets/PRISM_teaser.pptx
+++ b/assets/PRISM_teaser.pptx
@@ -17,9 +17,10 @@
     <p:sldId id="265" r:id="rId11"/>
     <p:sldId id="266" r:id="rId12"/>
     <p:sldId id="267" r:id="rId13"/>
+    <p:sldId id="268" r:id="rId14"/>
   </p:sldIdLst>
   <p:notesMasterIdLst>
-    <p:notesMasterId r:id="rId14"/>
+    <p:notesMasterId r:id="rId15"/>
   </p:notesMasterIdLst>
   <p:sldSz cx="12192000" cy="6858000"/>
   <p:notesSz cx="6858000" cy="12192000"/>
@@ -801,6 +802,94 @@
             <a:fld id="{F7021451-1387-4CA6-816F-3879F97B5CBC}" type="slidenum">
               <a:rPr lang="en-US"/>
               <a:t>12</a:t>
+            </a:fld>
+            <a:endParaRPr lang="en-US"/>
+          </a:p>
+        </p:txBody>
+      </p:sp>
+    </p:spTree>
+    <p:extLst>
+      <p:ext uri="{BB962C8B-B14F-4D97-AF65-F5344CB8AC3E}">
+        <p14:creationId xmlns:p14="http://schemas.microsoft.com/office/powerpoint/2010/main" val="1024086991"/>
+      </p:ext>
+    </p:extLst>
+  </p:cSld>
+  <p:clrMapOvr>
+    <a:masterClrMapping/>
+  </p:clrMapOvr>
+</p:notes>
+</file>
+
+<file path=ppt/notesSlides/notesSlide13.xml><?xml version="1.0" encoding="utf-8"?>
+<p:notes xmlns:a="http://schemas.openxmlformats.org/drawingml/2006/main" xmlns:r="http://schemas.openxmlformats.org/officeDocument/2006/relationships" xmlns:p="http://schemas.openxmlformats.org/presentationml/2006/main">
+  <p:cSld>
+    <p:spTree>
+      <p:nvGrpSpPr>
+        <p:cNvPr id="1" name=""/>
+        <p:cNvGrpSpPr/>
+        <p:nvPr/>
+      </p:nvGrpSpPr>
+      <p:grpSpPr>
+        <a:xfrm>
+          <a:off x="0" y="0"/>
+          <a:ext cx="0" cy="0"/>
+          <a:chOff x="0" y="0"/>
+          <a:chExt cx="0" cy="0"/>
+        </a:xfrm>
+      </p:grpSpPr>
+      <p:sp>
+        <p:nvSpPr>
+          <p:cNvPr id="2" name="Slide Image Placeholder 1"/>
+          <p:cNvSpPr>
+            <a:spLocks noGrp="1" noRot="1" noChangeAspect="1"/>
+          </p:cNvSpPr>
+          <p:nvPr>
+            <p:ph type="sldImg"/>
+          </p:nvPr>
+        </p:nvSpPr>
+        <p:spPr/>
+      </p:sp>
+      <p:sp>
+        <p:nvSpPr>
+          <p:cNvPr id="3" name="Notes Placeholder 2"/>
+          <p:cNvSpPr>
+            <a:spLocks noGrp="1"/>
+          </p:cNvSpPr>
+          <p:nvPr>
+            <p:ph type="body" idx="1"/>
+          </p:nvPr>
+        </p:nvSpPr>
+        <p:spPr/>
+        <p:txBody>
+          <a:bodyPr/>
+          <a:lstStyle/>
+          <a:p>
+            <a:r>
+              <a:rPr lang="en-US" dirty="0"/>
+              <a:t/>
+            </a:r>
+            <a:endParaRPr lang="en-US" dirty="0"/>
+          </a:p>
+        </p:txBody>
+      </p:sp>
+      <p:sp>
+        <p:nvSpPr>
+          <p:cNvPr id="4" name="Slide Number Placeholder 3"/>
+          <p:cNvSpPr>
+            <a:spLocks noGrp="1"/>
+          </p:cNvSpPr>
+          <p:nvPr>
+            <p:ph type="sldNum" sz="quarter" idx="10"/>
+          </p:nvPr>
+        </p:nvSpPr>
+        <p:spPr/>
+        <p:txBody>
+          <a:bodyPr/>
+          <a:lstStyle/>
+          <a:p>
+            <a:fld id="{F7021451-1387-4CA6-816F-3879F97B5CBC}" type="slidenum">
+              <a:rPr lang="en-US"/>
+              <a:t>13</a:t>
             </a:fld>
             <a:endParaRPr lang="en-US"/>
           </a:p>
@@ -2083,6 +2172,436 @@
     <p:bg>
       <p:bgPr>
         <a:solidFill>
+          <a:srgbClr val="F8F9FB"/>
+        </a:solidFill>
+      </p:bgPr>
+    </p:bg>
+    <p:spTree>
+      <p:nvGrpSpPr>
+        <p:cNvPr id="1" name=""/>
+        <p:cNvGrpSpPr/>
+        <p:nvPr/>
+      </p:nvGrpSpPr>
+      <p:grpSpPr>
+        <a:xfrm>
+          <a:off x="0" y="0"/>
+          <a:ext cx="0" cy="0"/>
+          <a:chOff x="0" y="0"/>
+          <a:chExt cx="0" cy="0"/>
+        </a:xfrm>
+      </p:grpSpPr>
+      <p:sp>
+        <p:nvSpPr>
+          <p:cNvPr id="2" name="Text 0"/>
+          <p:cNvSpPr/>
+          <p:nvPr/>
+        </p:nvSpPr>
+        <p:spPr>
+          <a:xfrm>
+            <a:off x="731520" y="502920"/>
+            <a:ext cx="7315200" cy="320040"/>
+          </a:xfrm>
+          <a:prstGeom prst="rect">
+            <a:avLst/>
+          </a:prstGeom>
+          <a:noFill/>
+          <a:ln/>
+        </p:spPr>
+        <p:txBody>
+          <a:bodyPr wrap="square" lIns="0" tIns="0" rIns="0" bIns="0" rtlCol="0" anchor="ctr"/>
+          <a:lstStyle/>
+          <a:p>
+            <a:pPr indent="0" marL="0">
+              <a:buNone/>
+            </a:pPr>
+            <a:r>
+              <a:rPr lang="en-US" sz="1200" b="1" spc="500" kern="0" dirty="0">
+                <a:solidFill>
+                  <a:srgbClr val="E6B22E"/>
+                </a:solidFill>
+                <a:latin typeface="Calibri" pitchFamily="34" charset="0"/>
+                <a:ea typeface="Calibri" pitchFamily="34" charset="-122"/>
+                <a:cs typeface="Calibri" pitchFamily="34" charset="-120"/>
+              </a:rPr>
+              <a:t>MASTER  +  WHAT’S NEXT</a:t>
+            </a:r>
+            <a:endParaRPr lang="en-US" sz="1200" dirty="0"/>
+          </a:p>
+        </p:txBody>
+      </p:sp>
+      <p:sp>
+        <p:nvSpPr>
+          <p:cNvPr id="3" name="Text 1"/>
+          <p:cNvSpPr/>
+          <p:nvPr/>
+        </p:nvSpPr>
+        <p:spPr>
+          <a:xfrm>
+            <a:off x="731520" y="868680"/>
+            <a:ext cx="10698480" cy="640080"/>
+          </a:xfrm>
+          <a:prstGeom prst="rect">
+            <a:avLst/>
+          </a:prstGeom>
+          <a:noFill/>
+          <a:ln/>
+        </p:spPr>
+        <p:txBody>
+          <a:bodyPr wrap="square" lIns="0" tIns="0" rIns="0" bIns="0" rtlCol="0" anchor="ctr"/>
+          <a:lstStyle/>
+          <a:p>
+            <a:pPr indent="0" marL="0">
+              <a:buNone/>
+            </a:pPr>
+            <a:r>
+              <a:rPr lang="en-US" sz="2600" b="1" dirty="0">
+                <a:solidFill>
+                  <a:srgbClr val="1E293B"/>
+                </a:solidFill>
+                <a:latin typeface="Georgia" pitchFamily="34" charset="0"/>
+                <a:ea typeface="Georgia" pitchFamily="34" charset="-122"/>
+                <a:cs typeface="Georgia" pitchFamily="34" charset="-120"/>
+              </a:rPr>
+              <a:t>Continuous state. One question to resume.</a:t>
+            </a:r>
+            <a:endParaRPr lang="en-US" sz="2600" dirty="0"/>
+          </a:p>
+        </p:txBody>
+      </p:sp>
+      <p:sp>
+        <p:nvSpPr>
+          <p:cNvPr id="4" name="Text 2"/>
+          <p:cNvSpPr/>
+          <p:nvPr/>
+        </p:nvSpPr>
+        <p:spPr>
+          <a:xfrm>
+            <a:off x="731520" y="1600200"/>
+            <a:ext cx="10698480" cy="777240"/>
+          </a:xfrm>
+          <a:prstGeom prst="rect">
+            <a:avLst/>
+          </a:prstGeom>
+          <a:noFill/>
+          <a:ln/>
+        </p:spPr>
+        <p:txBody>
+          <a:bodyPr wrap="square" lIns="0" tIns="0" rIns="0" bIns="0" rtlCol="0" anchor="ctr"/>
+          <a:lstStyle/>
+          <a:p>
+            <a:pPr indent="0" marL="0">
+              <a:buNone/>
+            </a:pPr>
+            <a:r>
+              <a:rPr lang="en-US" sz="1350" dirty="0">
+                <a:solidFill>
+                  <a:srgbClr val="64748B"/>
+                </a:solidFill>
+                <a:latin typeface="Calibri" pitchFamily="34" charset="0"/>
+                <a:ea typeface="Calibri" pitchFamily="34" charset="-122"/>
+                <a:cs typeface="Calibri" pitchFamily="34" charset="-120"/>
+              </a:rPr>
+              <a:t>Master: a single living markdown file holding every artifact — Decision brief, Stakeholder register, Claim inventory, Jurisdiction map, Prompt Strategy, Findings, Rerun Register, Learnings, Changelog.</a:t>
+            </a:r>
+            <a:endParaRPr lang="en-US" sz="1350" dirty="0"/>
+          </a:p>
+        </p:txBody>
+      </p:sp>
+      <p:sp>
+        <p:nvSpPr>
+          <p:cNvPr id="5" name="Shape 3"/>
+          <p:cNvSpPr/>
+          <p:nvPr/>
+        </p:nvSpPr>
+        <p:spPr>
+          <a:xfrm>
+            <a:off x="1463040" y="2834640"/>
+            <a:ext cx="9235440" cy="2194560"/>
+          </a:xfrm>
+          <a:prstGeom prst="rect">
+            <a:avLst/>
+          </a:prstGeom>
+          <a:solidFill>
+            <a:srgbClr val="1E2761"/>
+          </a:solidFill>
+          <a:ln/>
+          <a:effectLst>
+            <a:outerShdw sx="100000" sy="100000" kx="0" ky="0" algn="bl" rotWithShape="0" blurRad="101600" dist="25400" dir="5400000">
+              <a:srgbClr val="000000">
+                <a:alpha val="6000"/>
+              </a:srgbClr>
+            </a:outerShdw>
+          </a:effectLst>
+        </p:spPr>
+      </p:sp>
+      <p:sp>
+        <p:nvSpPr>
+          <p:cNvPr id="6" name="Shape 4"/>
+          <p:cNvSpPr/>
+          <p:nvPr/>
+        </p:nvSpPr>
+        <p:spPr>
+          <a:xfrm>
+            <a:off x="1463040" y="2834640"/>
+            <a:ext cx="109728" cy="2194560"/>
+          </a:xfrm>
+          <a:prstGeom prst="rect">
+            <a:avLst/>
+          </a:prstGeom>
+          <a:solidFill>
+            <a:srgbClr val="E6B22E"/>
+          </a:solidFill>
+          <a:ln/>
+        </p:spPr>
+      </p:sp>
+      <p:sp>
+        <p:nvSpPr>
+          <p:cNvPr id="7" name="Text 5"/>
+          <p:cNvSpPr/>
+          <p:nvPr/>
+        </p:nvSpPr>
+        <p:spPr>
+          <a:xfrm>
+            <a:off x="1828800" y="3063240"/>
+            <a:ext cx="8686800" cy="365760"/>
+          </a:xfrm>
+          <a:prstGeom prst="rect">
+            <a:avLst/>
+          </a:prstGeom>
+          <a:noFill/>
+          <a:ln/>
+        </p:spPr>
+        <p:txBody>
+          <a:bodyPr wrap="square" lIns="0" tIns="0" rIns="0" bIns="0" rtlCol="0" anchor="ctr"/>
+          <a:lstStyle/>
+          <a:p>
+            <a:pPr indent="0" marL="0">
+              <a:buNone/>
+            </a:pPr>
+            <a:r>
+              <a:rPr lang="en-US" sz="1200" b="1" spc="400" kern="0" dirty="0">
+                <a:solidFill>
+                  <a:srgbClr val="E6B22E"/>
+                </a:solidFill>
+                <a:latin typeface="Calibri" pitchFamily="34" charset="0"/>
+                <a:ea typeface="Calibri" pitchFamily="34" charset="-122"/>
+                <a:cs typeface="Calibri" pitchFamily="34" charset="-120"/>
+              </a:rPr>
+              <a:t>ATTACH THE FILE.  ASK ONE QUESTION.</a:t>
+            </a:r>
+            <a:endParaRPr lang="en-US" sz="1200" dirty="0"/>
+          </a:p>
+        </p:txBody>
+      </p:sp>
+      <p:sp>
+        <p:nvSpPr>
+          <p:cNvPr id="8" name="Text 6"/>
+          <p:cNvSpPr/>
+          <p:nvPr/>
+        </p:nvSpPr>
+        <p:spPr>
+          <a:xfrm>
+            <a:off x="1828800" y="3520440"/>
+            <a:ext cx="8686800" cy="1051560"/>
+          </a:xfrm>
+          <a:prstGeom prst="rect">
+            <a:avLst/>
+          </a:prstGeom>
+          <a:noFill/>
+          <a:ln/>
+        </p:spPr>
+        <p:txBody>
+          <a:bodyPr wrap="square" lIns="0" tIns="0" rIns="0" bIns="0" rtlCol="0" anchor="ctr"/>
+          <a:lstStyle/>
+          <a:p>
+            <a:pPr indent="0" marL="0">
+              <a:buNone/>
+            </a:pPr>
+            <a:r>
+              <a:rPr lang="en-US" sz="6400" b="1" i="1" dirty="0">
+                <a:solidFill>
+                  <a:srgbClr val="FFFFFF"/>
+                </a:solidFill>
+                <a:latin typeface="Georgia" pitchFamily="34" charset="0"/>
+                <a:ea typeface="Georgia" pitchFamily="34" charset="-122"/>
+                <a:cs typeface="Georgia" pitchFamily="34" charset="-120"/>
+              </a:rPr>
+              <a:t>“What’s next?”</a:t>
+            </a:r>
+            <a:endParaRPr lang="en-US" sz="6400" dirty="0"/>
+          </a:p>
+        </p:txBody>
+      </p:sp>
+      <p:sp>
+        <p:nvSpPr>
+          <p:cNvPr id="9" name="Text 7"/>
+          <p:cNvSpPr/>
+          <p:nvPr/>
+        </p:nvSpPr>
+        <p:spPr>
+          <a:xfrm>
+            <a:off x="1828800" y="4572000"/>
+            <a:ext cx="8686800" cy="365760"/>
+          </a:xfrm>
+          <a:prstGeom prst="rect">
+            <a:avLst/>
+          </a:prstGeom>
+          <a:noFill/>
+          <a:ln/>
+        </p:spPr>
+        <p:txBody>
+          <a:bodyPr wrap="square" lIns="0" tIns="0" rIns="0" bIns="0" rtlCol="0" anchor="ctr"/>
+          <a:lstStyle/>
+          <a:p>
+            <a:pPr indent="0" marL="0">
+              <a:buNone/>
+            </a:pPr>
+            <a:r>
+              <a:rPr lang="en-US" sz="1300" i="1" dirty="0">
+                <a:solidFill>
+                  <a:srgbClr val="CADCFC"/>
+                </a:solidFill>
+                <a:latin typeface="Calibri" pitchFamily="34" charset="0"/>
+                <a:ea typeface="Calibri" pitchFamily="34" charset="-122"/>
+                <a:cs typeface="Calibri" pitchFamily="34" charset="-120"/>
+              </a:rPr>
+              <a:t>Universal entry point. Works for start, resume, or “where was I?” after a long pause.</a:t>
+            </a:r>
+            <a:endParaRPr lang="en-US" sz="1300" dirty="0"/>
+          </a:p>
+        </p:txBody>
+      </p:sp>
+      <p:sp>
+        <p:nvSpPr>
+          <p:cNvPr id="10" name="Text 8"/>
+          <p:cNvSpPr/>
+          <p:nvPr/>
+        </p:nvSpPr>
+        <p:spPr>
+          <a:xfrm>
+            <a:off x="731520" y="5577840"/>
+            <a:ext cx="10698480" cy="365760"/>
+          </a:xfrm>
+          <a:prstGeom prst="rect">
+            <a:avLst/>
+          </a:prstGeom>
+          <a:noFill/>
+          <a:ln/>
+        </p:spPr>
+        <p:txBody>
+          <a:bodyPr wrap="square" lIns="0" tIns="0" rIns="0" bIns="0" rtlCol="0" anchor="ctr"/>
+          <a:lstStyle/>
+          <a:p>
+            <a:pPr algn="ctr" indent="0" marL="0">
+              <a:buNone/>
+            </a:pPr>
+            <a:r>
+              <a:rPr lang="en-US" sz="1300" i="1" dirty="0">
+                <a:solidFill>
+                  <a:srgbClr val="1E2761"/>
+                </a:solidFill>
+                <a:latin typeface="Georgia" pitchFamily="34" charset="0"/>
+                <a:ea typeface="Georgia" pitchFamily="34" charset="-122"/>
+                <a:cs typeface="Georgia" pitchFamily="34" charset="-120"/>
+              </a:rPr>
+              <a:t>You never reconstruct from memory. The Master is the source of truth.  (SP-1)</a:t>
+            </a:r>
+            <a:endParaRPr lang="en-US" sz="1300" dirty="0"/>
+          </a:p>
+        </p:txBody>
+      </p:sp>
+      <p:sp>
+        <p:nvSpPr>
+          <p:cNvPr id="11" name="Text 9"/>
+          <p:cNvSpPr/>
+          <p:nvPr/>
+        </p:nvSpPr>
+        <p:spPr>
+          <a:xfrm>
+            <a:off x="731520" y="6492240"/>
+            <a:ext cx="7315200" cy="274320"/>
+          </a:xfrm>
+          <a:prstGeom prst="rect">
+            <a:avLst/>
+          </a:prstGeom>
+          <a:noFill/>
+          <a:ln/>
+        </p:spPr>
+        <p:txBody>
+          <a:bodyPr wrap="square" lIns="0" tIns="0" rIns="0" bIns="0" rtlCol="0" anchor="ctr"/>
+          <a:lstStyle/>
+          <a:p>
+            <a:pPr indent="0" marL="0">
+              <a:buNone/>
+            </a:pPr>
+            <a:r>
+              <a:rPr lang="en-US" sz="1000" dirty="0">
+                <a:solidFill>
+                  <a:srgbClr val="64748B"/>
+                </a:solidFill>
+                <a:latin typeface="Calibri" pitchFamily="34" charset="0"/>
+                <a:ea typeface="Calibri" pitchFamily="34" charset="-122"/>
+                <a:cs typeface="Calibri" pitchFamily="34" charset="-120"/>
+              </a:rPr>
+              <a:t>PRISM v2.0  ·  Ron Kuper + Claude  ·  2026</a:t>
+            </a:r>
+            <a:endParaRPr lang="en-US" sz="1000" dirty="0"/>
+          </a:p>
+        </p:txBody>
+      </p:sp>
+      <p:sp>
+        <p:nvSpPr>
+          <p:cNvPr id="12" name="Text 10"/>
+          <p:cNvSpPr/>
+          <p:nvPr/>
+        </p:nvSpPr>
+        <p:spPr>
+          <a:xfrm>
+            <a:off x="10972800" y="6492240"/>
+            <a:ext cx="914400" cy="274320"/>
+          </a:xfrm>
+          <a:prstGeom prst="rect">
+            <a:avLst/>
+          </a:prstGeom>
+          <a:noFill/>
+          <a:ln/>
+        </p:spPr>
+        <p:txBody>
+          <a:bodyPr wrap="square" lIns="0" tIns="0" rIns="0" bIns="0" rtlCol="0" anchor="ctr"/>
+          <a:lstStyle/>
+          <a:p>
+            <a:pPr algn="r" indent="0" marL="0">
+              <a:buNone/>
+            </a:pPr>
+            <a:r>
+              <a:rPr lang="en-US" sz="1000" dirty="0">
+                <a:solidFill>
+                  <a:srgbClr val="64748B"/>
+                </a:solidFill>
+                <a:latin typeface="Calibri" pitchFamily="34" charset="0"/>
+                <a:ea typeface="Calibri" pitchFamily="34" charset="-122"/>
+                <a:cs typeface="Calibri" pitchFamily="34" charset="-120"/>
+              </a:rPr>
+              <a:t>10 / 13</a:t>
+            </a:r>
+            <a:endParaRPr lang="en-US" sz="1000" dirty="0"/>
+          </a:p>
+        </p:txBody>
+      </p:sp>
+    </p:spTree>
+  </p:cSld>
+  <p:clrMapOvr>
+    <a:masterClrMapping/>
+  </p:clrMapOvr>
+</p:sld>
+</file>
+
+<file path=ppt/slides/slide11.xml><?xml version="1.0" encoding="utf-8"?>
+<p:sld xmlns:a="http://schemas.openxmlformats.org/drawingml/2006/main" xmlns:r="http://schemas.openxmlformats.org/officeDocument/2006/relationships" xmlns:p="http://schemas.openxmlformats.org/presentationml/2006/main">
+  <p:cSld name="Slide 11">
+    <p:bg>
+      <p:bgPr>
+        <a:solidFill>
           <a:srgbClr val="151B45"/>
         </a:solidFill>
       </p:bgPr>
@@ -2977,7 +3496,7 @@
                 <a:ea typeface="Calibri" pitchFamily="34" charset="-122"/>
                 <a:cs typeface="Calibri" pitchFamily="34" charset="-120"/>
               </a:rPr>
-              <a:t>10 / 12</a:t>
+              <a:t>11 / 13</a:t>
             </a:r>
             <a:endParaRPr lang="en-US" sz="1000" dirty="0"/>
           </a:p>
@@ -2991,9 +3510,9 @@
 </p:sld>
 </file>
 
-<file path=ppt/slides/slide11.xml><?xml version="1.0" encoding="utf-8"?>
+<file path=ppt/slides/slide12.xml><?xml version="1.0" encoding="utf-8"?>
 <p:sld xmlns:a="http://schemas.openxmlformats.org/drawingml/2006/main" xmlns:r="http://schemas.openxmlformats.org/officeDocument/2006/relationships" xmlns:p="http://schemas.openxmlformats.org/presentationml/2006/main">
-  <p:cSld name="Slide 11">
+  <p:cSld name="Slide 12">
     <p:bg>
       <p:bgPr>
         <a:solidFill>
@@ -4008,7 +4527,7 @@
                 <a:ea typeface="Calibri" pitchFamily="34" charset="-122"/>
                 <a:cs typeface="Calibri" pitchFamily="34" charset="-120"/>
               </a:rPr>
-              <a:t>11 / 12</a:t>
+              <a:t>12 / 13</a:t>
             </a:r>
             <a:endParaRPr lang="en-US" sz="1000" dirty="0"/>
           </a:p>
@@ -4022,9 +4541,9 @@
 </p:sld>
 </file>
 
-<file path=ppt/slides/slide12.xml><?xml version="1.0" encoding="utf-8"?>
+<file path=ppt/slides/slide13.xml><?xml version="1.0" encoding="utf-8"?>
 <p:sld xmlns:a="http://schemas.openxmlformats.org/drawingml/2006/main" xmlns:r="http://schemas.openxmlformats.org/officeDocument/2006/relationships" xmlns:p="http://schemas.openxmlformats.org/presentationml/2006/main">
-  <p:cSld name="Slide 12">
+  <p:cSld name="Slide 13">
     <p:bg>
       <p:bgPr>
         <a:solidFill>
@@ -5485,7 +6004,7 @@
                 <a:ea typeface="Calibri" pitchFamily="34" charset="-122"/>
                 <a:cs typeface="Calibri" pitchFamily="34" charset="-120"/>
               </a:rPr>
-              <a:t>2 / 12</a:t>
+              <a:t>2 / 13</a:t>
             </a:r>
             <a:endParaRPr lang="en-US" sz="1000" dirty="0"/>
           </a:p>
@@ -5766,7 +6285,7 @@
                 <a:ea typeface="Calibri" pitchFamily="34" charset="-122"/>
                 <a:cs typeface="Calibri" pitchFamily="34" charset="-120"/>
               </a:rPr>
-              <a:t>3 / 12</a:t>
+              <a:t>3 / 13</a:t>
             </a:r>
             <a:endParaRPr lang="en-US" sz="1000" dirty="0"/>
           </a:p>
@@ -6470,7 +6989,7 @@
                 <a:ea typeface="Calibri" pitchFamily="34" charset="-122"/>
                 <a:cs typeface="Calibri" pitchFamily="34" charset="-120"/>
               </a:rPr>
-              <a:t>4 / 12</a:t>
+              <a:t>4 / 13</a:t>
             </a:r>
             <a:endParaRPr lang="en-US" sz="1000" dirty="0"/>
           </a:p>
@@ -6490,7 +7009,7 @@
     <p:bg>
       <p:bgPr>
         <a:solidFill>
-          <a:srgbClr val="F8F9FB"/>
+          <a:srgbClr val="151B45"/>
         </a:solidFill>
       </p:bgPr>
     </p:bg>
@@ -6516,8 +7035,8 @@
         </p:nvSpPr>
         <p:spPr>
           <a:xfrm>
-            <a:off x="731520" y="502920"/>
-            <a:ext cx="5486400" cy="320040"/>
+            <a:off x="731520" y="640080"/>
+            <a:ext cx="7315200" cy="365760"/>
           </a:xfrm>
           <a:prstGeom prst="rect">
             <a:avLst/>
@@ -6541,7 +7060,7 @@
                 <a:ea typeface="Calibri" pitchFamily="34" charset="-122"/>
                 <a:cs typeface="Calibri" pitchFamily="34" charset="-120"/>
               </a:rPr>
-              <a:t>TWO SESSION TYPES</a:t>
+              <a:t>MOBILE-FIRST BY CONSTRAINT</a:t>
             </a:r>
             <a:endParaRPr lang="en-US" sz="1200" dirty="0"/>
           </a:p>
@@ -6555,8 +7074,8 @@
         </p:nvSpPr>
         <p:spPr>
           <a:xfrm>
-            <a:off x="731520" y="868680"/>
-            <a:ext cx="10698480" cy="640080"/>
+            <a:off x="731520" y="1051560"/>
+            <a:ext cx="10698480" cy="731520"/>
           </a:xfrm>
           <a:prstGeom prst="rect">
             <a:avLst/>
@@ -6572,62 +7091,192 @@
               <a:buNone/>
             </a:pPr>
             <a:r>
-              <a:rPr lang="en-US" sz="2600" b="1" dirty="0">
-                <a:solidFill>
-                  <a:srgbClr val="1E293B"/>
+              <a:rPr lang="en-US" sz="3200" b="1" dirty="0">
+                <a:solidFill>
+                  <a:srgbClr val="FFFFFF"/>
                 </a:solidFill>
                 <a:latin typeface="Georgia" pitchFamily="34" charset="0"/>
                 <a:ea typeface="Georgia" pitchFamily="34" charset="-122"/>
                 <a:cs typeface="Georgia" pitchFamily="34" charset="-120"/>
               </a:rPr>
-              <a:t>v2 names the split that v1.x ran inconsistently.</a:t>
-            </a:r>
-            <a:endParaRPr lang="en-US" sz="2600" dirty="0"/>
-          </a:p>
-        </p:txBody>
-      </p:sp>
-      <p:sp>
-        <p:nvSpPr>
-          <p:cNvPr id="4" name="Shape 2"/>
-          <p:cNvSpPr/>
-          <p:nvPr/>
-        </p:nvSpPr>
-        <p:spPr>
-          <a:xfrm>
-            <a:off x="731520" y="2011680"/>
-            <a:ext cx="5120640" cy="4023360"/>
+              <a:t>The substrate dictates the architecture.</a:t>
+            </a:r>
+            <a:endParaRPr lang="en-US" sz="3200" dirty="0"/>
+          </a:p>
+        </p:txBody>
+      </p:sp>
+      <p:sp>
+        <p:nvSpPr>
+          <p:cNvPr id="4" name="Text 2"/>
+          <p:cNvSpPr/>
+          <p:nvPr/>
+        </p:nvSpPr>
+        <p:spPr>
+          <a:xfrm>
+            <a:off x="731520" y="1783080"/>
+            <a:ext cx="10698480" cy="777240"/>
+          </a:xfrm>
+          <a:prstGeom prst="rect">
+            <a:avLst/>
+          </a:prstGeom>
+          <a:noFill/>
+          <a:ln/>
+        </p:spPr>
+        <p:txBody>
+          <a:bodyPr wrap="square" lIns="0" tIns="0" rIns="0" bIns="0" rtlCol="0" anchor="ctr"/>
+          <a:lstStyle/>
+          <a:p>
+            <a:pPr indent="0" marL="0">
+              <a:buNone/>
+            </a:pPr>
+            <a:r>
+              <a:rPr lang="en-US" sz="1400" i="1" dirty="0">
+                <a:solidFill>
+                  <a:srgbClr val="CADCFC"/>
+                </a:solidFill>
+                <a:latin typeface="Georgia" pitchFamily="34" charset="0"/>
+                <a:ea typeface="Georgia" pitchFamily="34" charset="-122"/>
+                <a:cs typeface="Georgia" pitchFamily="34" charset="-120"/>
+              </a:rPr>
+              <a:t>PRISM is shaped around how the operator actually works: a phone, a chat box, a markdown file. No plugins, no automation, no special tooling required.</a:t>
+            </a:r>
+            <a:endParaRPr lang="en-US" sz="1400" dirty="0"/>
+          </a:p>
+        </p:txBody>
+      </p:sp>
+      <p:sp>
+        <p:nvSpPr>
+          <p:cNvPr id="5" name="Shape 3"/>
+          <p:cNvSpPr/>
+          <p:nvPr/>
+        </p:nvSpPr>
+        <p:spPr>
+          <a:xfrm>
+            <a:off x="365760" y="2788920"/>
+            <a:ext cx="3657600" cy="2834640"/>
           </a:xfrm>
           <a:prstGeom prst="rect">
             <a:avLst/>
           </a:prstGeom>
           <a:solidFill>
-            <a:srgbClr val="FFFFFF"/>
+            <a:srgbClr val="1E2761"/>
           </a:solidFill>
           <a:ln w="12700">
             <a:solidFill>
-              <a:srgbClr val="E2E8F0"/>
+              <a:srgbClr val="E6B22E"/>
             </a:solidFill>
             <a:prstDash val="solid"/>
           </a:ln>
-          <a:effectLst>
-            <a:outerShdw sx="100000" sy="100000" kx="0" ky="0" algn="bl" rotWithShape="0" blurRad="101600" dist="25400" dir="5400000">
-              <a:srgbClr val="000000">
-                <a:alpha val="6000"/>
-              </a:srgbClr>
-            </a:outerShdw>
-          </a:effectLst>
-        </p:spPr>
-      </p:sp>
-      <p:sp>
-        <p:nvSpPr>
-          <p:cNvPr id="5" name="Shape 3"/>
-          <p:cNvSpPr/>
-          <p:nvPr/>
-        </p:nvSpPr>
-        <p:spPr>
-          <a:xfrm>
-            <a:off x="731520" y="2011680"/>
-            <a:ext cx="5120640" cy="73152"/>
+        </p:spPr>
+      </p:sp>
+      <p:sp>
+        <p:nvSpPr>
+          <p:cNvPr id="6" name="Shape 4"/>
+          <p:cNvSpPr/>
+          <p:nvPr/>
+        </p:nvSpPr>
+        <p:spPr>
+          <a:xfrm>
+            <a:off x="365760" y="2788920"/>
+            <a:ext cx="3657600" cy="73152"/>
+          </a:xfrm>
+          <a:prstGeom prst="rect">
+            <a:avLst/>
+          </a:prstGeom>
+          <a:solidFill>
+            <a:srgbClr val="E6B22E"/>
+          </a:solidFill>
+          <a:ln/>
+        </p:spPr>
+      </p:sp>
+      <p:sp>
+        <p:nvSpPr>
+          <p:cNvPr id="7" name="Text 5"/>
+          <p:cNvSpPr/>
+          <p:nvPr/>
+        </p:nvSpPr>
+        <p:spPr>
+          <a:xfrm>
+            <a:off x="685800" y="3154680"/>
+            <a:ext cx="3154680" cy="777240"/>
+          </a:xfrm>
+          <a:prstGeom prst="rect">
+            <a:avLst/>
+          </a:prstGeom>
+          <a:noFill/>
+          <a:ln/>
+        </p:spPr>
+        <p:txBody>
+          <a:bodyPr wrap="square" lIns="0" tIns="0" rIns="0" bIns="0" rtlCol="0" anchor="ctr"/>
+          <a:lstStyle/>
+          <a:p>
+            <a:pPr indent="0" marL="0">
+              <a:buNone/>
+            </a:pPr>
+            <a:r>
+              <a:rPr lang="en-US" sz="1900" b="1" dirty="0">
+                <a:solidFill>
+                  <a:srgbClr val="FFFFFF"/>
+                </a:solidFill>
+                <a:latin typeface="Calibri" pitchFamily="34" charset="0"/>
+                <a:ea typeface="Calibri" pitchFamily="34" charset="-122"/>
+                <a:cs typeface="Calibri" pitchFamily="34" charset="-120"/>
+              </a:rPr>
+              <a:t>Plain markdown, plain chat</a:t>
+            </a:r>
+            <a:endParaRPr lang="en-US" sz="1900" dirty="0"/>
+          </a:p>
+        </p:txBody>
+      </p:sp>
+      <p:sp>
+        <p:nvSpPr>
+          <p:cNvPr id="8" name="Text 6"/>
+          <p:cNvSpPr/>
+          <p:nvPr/>
+        </p:nvSpPr>
+        <p:spPr>
+          <a:xfrm>
+            <a:off x="685800" y="4069080"/>
+            <a:ext cx="3154680" cy="1417320"/>
+          </a:xfrm>
+          <a:prstGeom prst="rect">
+            <a:avLst/>
+          </a:prstGeom>
+          <a:noFill/>
+          <a:ln/>
+        </p:spPr>
+        <p:txBody>
+          <a:bodyPr wrap="square" lIns="0" tIns="0" rIns="0" bIns="0" rtlCol="0" anchor="ctr"/>
+          <a:lstStyle/>
+          <a:p>
+            <a:pPr indent="0" marL="0">
+              <a:buNone/>
+            </a:pPr>
+            <a:r>
+              <a:rPr lang="en-US" sz="1300" dirty="0">
+                <a:solidFill>
+                  <a:srgbClr val="CADCFC"/>
+                </a:solidFill>
+                <a:latin typeface="Calibri" pitchFamily="34" charset="0"/>
+                <a:ea typeface="Calibri" pitchFamily="34" charset="-122"/>
+                <a:cs typeface="Calibri" pitchFamily="34" charset="-120"/>
+              </a:rPr>
+              <a:t>One attached file, any vendor, any device. The framework runs in the same chat surface you already use. Manual paste-in is the default execution mode — not a fallback.</a:t>
+            </a:r>
+            <a:endParaRPr lang="en-US" sz="1300" dirty="0"/>
+          </a:p>
+        </p:txBody>
+      </p:sp>
+      <p:sp>
+        <p:nvSpPr>
+          <p:cNvPr id="9" name="Shape 7"/>
+          <p:cNvSpPr/>
+          <p:nvPr/>
+        </p:nvSpPr>
+        <p:spPr>
+          <a:xfrm>
+            <a:off x="4251960" y="2788920"/>
+            <a:ext cx="3657600" cy="2834640"/>
           </a:xfrm>
           <a:prstGeom prst="rect">
             <a:avLst/>
@@ -6635,19 +7284,44 @@
           <a:solidFill>
             <a:srgbClr val="1E2761"/>
           </a:solidFill>
-          <a:ln/>
-        </p:spPr>
-      </p:sp>
-      <p:sp>
-        <p:nvSpPr>
-          <p:cNvPr id="6" name="Text 4"/>
-          <p:cNvSpPr/>
-          <p:nvPr/>
-        </p:nvSpPr>
-        <p:spPr>
-          <a:xfrm>
-            <a:off x="1097280" y="2286000"/>
-            <a:ext cx="4572000" cy="365760"/>
+          <a:ln w="12700">
+            <a:solidFill>
+              <a:srgbClr val="E6B22E"/>
+            </a:solidFill>
+            <a:prstDash val="solid"/>
+          </a:ln>
+        </p:spPr>
+      </p:sp>
+      <p:sp>
+        <p:nvSpPr>
+          <p:cNvPr id="10" name="Shape 8"/>
+          <p:cNvSpPr/>
+          <p:nvPr/>
+        </p:nvSpPr>
+        <p:spPr>
+          <a:xfrm>
+            <a:off x="4251960" y="2788920"/>
+            <a:ext cx="3657600" cy="73152"/>
+          </a:xfrm>
+          <a:prstGeom prst="rect">
+            <a:avLst/>
+          </a:prstGeom>
+          <a:solidFill>
+            <a:srgbClr val="E6B22E"/>
+          </a:solidFill>
+          <a:ln/>
+        </p:spPr>
+      </p:sp>
+      <p:sp>
+        <p:nvSpPr>
+          <p:cNvPr id="11" name="Text 9"/>
+          <p:cNvSpPr/>
+          <p:nvPr/>
+        </p:nvSpPr>
+        <p:spPr>
+          <a:xfrm>
+            <a:off x="4572000" y="3154680"/>
+            <a:ext cx="3154680" cy="777240"/>
           </a:xfrm>
           <a:prstGeom prst="rect">
             <a:avLst/>
@@ -6663,30 +7337,30 @@
               <a:buNone/>
             </a:pPr>
             <a:r>
-              <a:rPr lang="en-US" sz="1200" b="1" spc="400" kern="0" dirty="0">
-                <a:solidFill>
-                  <a:srgbClr val="1E2761"/>
-                </a:solidFill>
-                <a:latin typeface="Calibri" pitchFamily="34" charset="0"/>
-                <a:ea typeface="Calibri" pitchFamily="34" charset="-122"/>
-                <a:cs typeface="Calibri" pitchFamily="34" charset="-120"/>
-              </a:rPr>
-              <a:t>ORCHESTRATION</a:t>
-            </a:r>
-            <a:endParaRPr lang="en-US" sz="1200" dirty="0"/>
-          </a:p>
-        </p:txBody>
-      </p:sp>
-      <p:sp>
-        <p:nvSpPr>
-          <p:cNvPr id="7" name="Text 5"/>
-          <p:cNvSpPr/>
-          <p:nvPr/>
-        </p:nvSpPr>
-        <p:spPr>
-          <a:xfrm>
-            <a:off x="1097280" y="2651760"/>
-            <a:ext cx="4572000" cy="457200"/>
+              <a:rPr lang="en-US" sz="1900" b="1" dirty="0">
+                <a:solidFill>
+                  <a:srgbClr val="FFFFFF"/>
+                </a:solidFill>
+                <a:latin typeface="Calibri" pitchFamily="34" charset="0"/>
+                <a:ea typeface="Calibri" pitchFamily="34" charset="-122"/>
+                <a:cs typeface="Calibri" pitchFamily="34" charset="-120"/>
+              </a:rPr>
+              <a:t>One file, infinite resume</a:t>
+            </a:r>
+            <a:endParaRPr lang="en-US" sz="1900" dirty="0"/>
+          </a:p>
+        </p:txBody>
+      </p:sp>
+      <p:sp>
+        <p:nvSpPr>
+          <p:cNvPr id="12" name="Text 10"/>
+          <p:cNvSpPr/>
+          <p:nvPr/>
+        </p:nvSpPr>
+        <p:spPr>
+          <a:xfrm>
+            <a:off x="4572000" y="4069080"/>
+            <a:ext cx="3154680" cy="1417320"/>
           </a:xfrm>
           <a:prstGeom prst="rect">
             <a:avLst/>
@@ -6702,362 +7376,185 @@
               <a:buNone/>
             </a:pPr>
             <a:r>
-              <a:rPr lang="en-US" sz="1800" b="1" dirty="0">
-                <a:solidFill>
-                  <a:srgbClr val="1E293B"/>
+              <a:rPr lang="en-US" sz="1300" dirty="0">
+                <a:solidFill>
+                  <a:srgbClr val="CADCFC"/>
+                </a:solidFill>
+                <a:latin typeface="Calibri" pitchFamily="34" charset="0"/>
+                <a:ea typeface="Calibri" pitchFamily="34" charset="-122"/>
+                <a:cs typeface="Calibri" pitchFamily="34" charset="-120"/>
+              </a:rPr>
+              <a:t>The Master is a single .md you can email to yourself, save to a phone, share with a collaborator. State doesn’t live in a service — it lives in the file.</a:t>
+            </a:r>
+            <a:endParaRPr lang="en-US" sz="1300" dirty="0"/>
+          </a:p>
+        </p:txBody>
+      </p:sp>
+      <p:sp>
+        <p:nvSpPr>
+          <p:cNvPr id="13" name="Shape 11"/>
+          <p:cNvSpPr/>
+          <p:nvPr/>
+        </p:nvSpPr>
+        <p:spPr>
+          <a:xfrm>
+            <a:off x="8138160" y="2788920"/>
+            <a:ext cx="3657600" cy="2834640"/>
+          </a:xfrm>
+          <a:prstGeom prst="rect">
+            <a:avLst/>
+          </a:prstGeom>
+          <a:solidFill>
+            <a:srgbClr val="1E2761"/>
+          </a:solidFill>
+          <a:ln w="12700">
+            <a:solidFill>
+              <a:srgbClr val="E6B22E"/>
+            </a:solidFill>
+            <a:prstDash val="solid"/>
+          </a:ln>
+        </p:spPr>
+      </p:sp>
+      <p:sp>
+        <p:nvSpPr>
+          <p:cNvPr id="14" name="Shape 12"/>
+          <p:cNvSpPr/>
+          <p:nvPr/>
+        </p:nvSpPr>
+        <p:spPr>
+          <a:xfrm>
+            <a:off x="8138160" y="2788920"/>
+            <a:ext cx="3657600" cy="73152"/>
+          </a:xfrm>
+          <a:prstGeom prst="rect">
+            <a:avLst/>
+          </a:prstGeom>
+          <a:solidFill>
+            <a:srgbClr val="E6B22E"/>
+          </a:solidFill>
+          <a:ln/>
+        </p:spPr>
+      </p:sp>
+      <p:sp>
+        <p:nvSpPr>
+          <p:cNvPr id="15" name="Text 13"/>
+          <p:cNvSpPr/>
+          <p:nvPr/>
+        </p:nvSpPr>
+        <p:spPr>
+          <a:xfrm>
+            <a:off x="8458200" y="3154680"/>
+            <a:ext cx="3154680" cy="777240"/>
+          </a:xfrm>
+          <a:prstGeom prst="rect">
+            <a:avLst/>
+          </a:prstGeom>
+          <a:noFill/>
+          <a:ln/>
+        </p:spPr>
+        <p:txBody>
+          <a:bodyPr wrap="square" lIns="0" tIns="0" rIns="0" bIns="0" rtlCol="0" anchor="ctr"/>
+          <a:lstStyle/>
+          <a:p>
+            <a:pPr indent="0" marL="0">
+              <a:buNone/>
+            </a:pPr>
+            <a:r>
+              <a:rPr lang="en-US" sz="1900" b="1" dirty="0">
+                <a:solidFill>
+                  <a:srgbClr val="FFFFFF"/>
+                </a:solidFill>
+                <a:latin typeface="Calibri" pitchFamily="34" charset="0"/>
+                <a:ea typeface="Calibri" pitchFamily="34" charset="-122"/>
+                <a:cs typeface="Calibri" pitchFamily="34" charset="-120"/>
+              </a:rPr>
+              <a:t>Mobile-readable rendering</a:t>
+            </a:r>
+            <a:endParaRPr lang="en-US" sz="1900" dirty="0"/>
+          </a:p>
+        </p:txBody>
+      </p:sp>
+      <p:sp>
+        <p:nvSpPr>
+          <p:cNvPr id="16" name="Text 14"/>
+          <p:cNvSpPr/>
+          <p:nvPr/>
+        </p:nvSpPr>
+        <p:spPr>
+          <a:xfrm>
+            <a:off x="8458200" y="4069080"/>
+            <a:ext cx="3154680" cy="1417320"/>
+          </a:xfrm>
+          <a:prstGeom prst="rect">
+            <a:avLst/>
+          </a:prstGeom>
+          <a:noFill/>
+          <a:ln/>
+        </p:spPr>
+        <p:txBody>
+          <a:bodyPr wrap="square" lIns="0" tIns="0" rIns="0" bIns="0" rtlCol="0" anchor="ctr"/>
+          <a:lstStyle/>
+          <a:p>
+            <a:pPr indent="0" marL="0">
+              <a:buNone/>
+            </a:pPr>
+            <a:r>
+              <a:rPr lang="en-US" sz="1300" dirty="0">
+                <a:solidFill>
+                  <a:srgbClr val="CADCFC"/>
+                </a:solidFill>
+                <a:latin typeface="Calibri" pitchFamily="34" charset="0"/>
+                <a:ea typeface="Calibri" pitchFamily="34" charset="-122"/>
+                <a:cs typeface="Calibri" pitchFamily="34" charset="-120"/>
+              </a:rPr>
+              <a:t>Release-notes use heading format, not tables. No unescaped pipes in code spans inside cells. Markdown that renders cleanly on a 6-inch screen — the framework dogfoods its own rules.</a:t>
+            </a:r>
+            <a:endParaRPr lang="en-US" sz="1300" dirty="0"/>
+          </a:p>
+        </p:txBody>
+      </p:sp>
+      <p:sp>
+        <p:nvSpPr>
+          <p:cNvPr id="17" name="Text 15"/>
+          <p:cNvSpPr/>
+          <p:nvPr/>
+        </p:nvSpPr>
+        <p:spPr>
+          <a:xfrm>
+            <a:off x="731520" y="5852160"/>
+            <a:ext cx="10698480" cy="365760"/>
+          </a:xfrm>
+          <a:prstGeom prst="rect">
+            <a:avLst/>
+          </a:prstGeom>
+          <a:noFill/>
+          <a:ln/>
+        </p:spPr>
+        <p:txBody>
+          <a:bodyPr wrap="square" lIns="0" tIns="0" rIns="0" bIns="0" rtlCol="0" anchor="ctr"/>
+          <a:lstStyle/>
+          <a:p>
+            <a:pPr algn="ctr" indent="0" marL="0">
+              <a:buNone/>
+            </a:pPr>
+            <a:r>
+              <a:rPr lang="en-US" sz="1300" i="1" dirty="0">
+                <a:solidFill>
+                  <a:srgbClr val="F4D77A"/>
                 </a:solidFill>
                 <a:latin typeface="Georgia" pitchFamily="34" charset="0"/>
                 <a:ea typeface="Georgia" pitchFamily="34" charset="-122"/>
                 <a:cs typeface="Georgia" pitchFamily="34" charset="-120"/>
               </a:rPr>
-              <a:t>Claude with the framework attached</a:t>
-            </a:r>
-            <a:endParaRPr lang="en-US" sz="1800" dirty="0"/>
-          </a:p>
-        </p:txBody>
-      </p:sp>
-      <p:sp>
-        <p:nvSpPr>
-          <p:cNvPr id="8" name="Text 6"/>
-          <p:cNvSpPr/>
-          <p:nvPr/>
-        </p:nvSpPr>
-        <p:spPr>
-          <a:xfrm>
-            <a:off x="1097280" y="3291840"/>
-            <a:ext cx="4572000" cy="2377440"/>
-          </a:xfrm>
-          <a:prstGeom prst="rect">
-            <a:avLst/>
-          </a:prstGeom>
-          <a:noFill/>
-          <a:ln/>
-        </p:spPr>
-        <p:txBody>
-          <a:bodyPr wrap="square" lIns="0" tIns="0" rIns="0" bIns="0" rtlCol="0" anchor="ctr"/>
-          <a:lstStyle/>
-          <a:p>
-            <a:pPr marL="342900" indent="-342900">
-              <a:spcAft>
-                <a:spcPts val="800"/>
-              </a:spcAft>
-              <a:buSzPct val="100000"/>
-              <a:buChar char="●"/>
-            </a:pPr>
-            <a:r>
-              <a:rPr lang="en-US" sz="1300" dirty="0">
-                <a:solidFill>
-                  <a:srgbClr val="1E293B"/>
-                </a:solidFill>
-                <a:latin typeface="Calibri" pitchFamily="34" charset="0"/>
-                <a:ea typeface="Calibri" pitchFamily="34" charset="-122"/>
-                <a:cs typeface="Calibri" pitchFamily="34" charset="-120"/>
-              </a:rPr>
-              <a:t>Master state, Setup probes, Monitor fires, convergence reasoning.</a:t>
+              <a:t>Three-leg constraint (§1.3): Operator  ·  Substrate  ·  Methodology  —  mechanics that violate any leg don’t earn their place.</a:t>
             </a:r>
             <a:endParaRPr lang="en-US" sz="1300" dirty="0"/>
           </a:p>
-          <a:p>
-            <a:pPr marL="342900" indent="-342900">
-              <a:spcAft>
-                <a:spcPts val="800"/>
-              </a:spcAft>
-              <a:buSzPct val="100000"/>
-              <a:buChar char="●"/>
-            </a:pPr>
-            <a:r>
-              <a:rPr lang="en-US" sz="1300" dirty="0">
-                <a:solidFill>
-                  <a:srgbClr val="1E293B"/>
-                </a:solidFill>
-                <a:latin typeface="Calibri" pitchFamily="34" charset="0"/>
-                <a:ea typeface="Calibri" pitchFamily="34" charset="-122"/>
-                <a:cs typeface="Calibri" pitchFamily="34" charset="-120"/>
-              </a:rPr>
-              <a:t>Substrate self-check at session open (SP-13).</a:t>
-            </a:r>
-            <a:endParaRPr lang="en-US" sz="1300" dirty="0"/>
-          </a:p>
-          <a:p>
-            <a:pPr marL="342900" indent="-342900">
-              <a:spcAft>
-                <a:spcPts val="800"/>
-              </a:spcAft>
-              <a:buSzPct val="100000"/>
-              <a:buChar char="●"/>
-            </a:pPr>
-            <a:r>
-              <a:rPr lang="en-US" sz="1300" dirty="0">
-                <a:solidFill>
-                  <a:srgbClr val="1E293B"/>
-                </a:solidFill>
-                <a:latin typeface="Calibri" pitchFamily="34" charset="0"/>
-                <a:ea typeface="Calibri" pitchFamily="34" charset="-122"/>
-                <a:cs typeface="Calibri" pitchFamily="34" charset="-120"/>
-              </a:rPr>
-              <a:t>Closes by writing What’s next to the Master.</a:t>
-            </a:r>
-            <a:endParaRPr lang="en-US" sz="1300" dirty="0"/>
-          </a:p>
-        </p:txBody>
-      </p:sp>
-      <p:sp>
-        <p:nvSpPr>
-          <p:cNvPr id="9" name="Shape 7"/>
-          <p:cNvSpPr/>
-          <p:nvPr/>
-        </p:nvSpPr>
-        <p:spPr>
-          <a:xfrm>
-            <a:off x="6309360" y="2011680"/>
-            <a:ext cx="5120640" cy="4023360"/>
-          </a:xfrm>
-          <a:prstGeom prst="rect">
-            <a:avLst/>
-          </a:prstGeom>
-          <a:solidFill>
-            <a:srgbClr val="FFFFFF"/>
-          </a:solidFill>
-          <a:ln w="12700">
-            <a:solidFill>
-              <a:srgbClr val="E2E8F0"/>
-            </a:solidFill>
-            <a:prstDash val="solid"/>
-          </a:ln>
-          <a:effectLst>
-            <a:outerShdw sx="100000" sy="100000" kx="0" ky="0" algn="bl" rotWithShape="0" blurRad="101600" dist="25400" dir="5400000">
-              <a:srgbClr val="000000">
-                <a:alpha val="6000"/>
-              </a:srgbClr>
-            </a:outerShdw>
-          </a:effectLst>
-        </p:spPr>
-      </p:sp>
-      <p:sp>
-        <p:nvSpPr>
-          <p:cNvPr id="10" name="Shape 8"/>
-          <p:cNvSpPr/>
-          <p:nvPr/>
-        </p:nvSpPr>
-        <p:spPr>
-          <a:xfrm>
-            <a:off x="6309360" y="2011680"/>
-            <a:ext cx="5120640" cy="73152"/>
-          </a:xfrm>
-          <a:prstGeom prst="rect">
-            <a:avLst/>
-          </a:prstGeom>
-          <a:solidFill>
-            <a:srgbClr val="E6B22E"/>
-          </a:solidFill>
-          <a:ln/>
-        </p:spPr>
-      </p:sp>
-      <p:sp>
-        <p:nvSpPr>
-          <p:cNvPr id="11" name="Text 9"/>
-          <p:cNvSpPr/>
-          <p:nvPr/>
-        </p:nvSpPr>
-        <p:spPr>
-          <a:xfrm>
-            <a:off x="6675120" y="2286000"/>
-            <a:ext cx="4572000" cy="365760"/>
-          </a:xfrm>
-          <a:prstGeom prst="rect">
-            <a:avLst/>
-          </a:prstGeom>
-          <a:noFill/>
-          <a:ln/>
-        </p:spPr>
-        <p:txBody>
-          <a:bodyPr wrap="square" lIns="0" tIns="0" rIns="0" bIns="0" rtlCol="0" anchor="ctr"/>
-          <a:lstStyle/>
-          <a:p>
-            <a:pPr indent="0" marL="0">
-              <a:buNone/>
-            </a:pPr>
-            <a:r>
-              <a:rPr lang="en-US" sz="1200" b="1" spc="400" kern="0" dirty="0">
-                <a:solidFill>
-                  <a:srgbClr val="E6B22E"/>
-                </a:solidFill>
-                <a:latin typeface="Calibri" pitchFamily="34" charset="0"/>
-                <a:ea typeface="Calibri" pitchFamily="34" charset="-122"/>
-                <a:cs typeface="Calibri" pitchFamily="34" charset="-120"/>
-              </a:rPr>
-              <a:t>EXECUTION</a:t>
-            </a:r>
-            <a:endParaRPr lang="en-US" sz="1200" dirty="0"/>
-          </a:p>
-        </p:txBody>
-      </p:sp>
-      <p:sp>
-        <p:nvSpPr>
-          <p:cNvPr id="12" name="Text 10"/>
-          <p:cNvSpPr/>
-          <p:nvPr/>
-        </p:nvSpPr>
-        <p:spPr>
-          <a:xfrm>
-            <a:off x="6675120" y="2651760"/>
-            <a:ext cx="4572000" cy="457200"/>
-          </a:xfrm>
-          <a:prstGeom prst="rect">
-            <a:avLst/>
-          </a:prstGeom>
-          <a:noFill/>
-          <a:ln/>
-        </p:spPr>
-        <p:txBody>
-          <a:bodyPr wrap="square" lIns="0" tIns="0" rIns="0" bIns="0" rtlCol="0" anchor="ctr"/>
-          <a:lstStyle/>
-          <a:p>
-            <a:pPr indent="0" marL="0">
-              <a:buNone/>
-            </a:pPr>
-            <a:r>
-              <a:rPr lang="en-US" sz="1800" b="1" dirty="0">
-                <a:solidFill>
-                  <a:srgbClr val="1E293B"/>
-                </a:solidFill>
-                <a:latin typeface="Georgia" pitchFamily="34" charset="0"/>
-                <a:ea typeface="Georgia" pitchFamily="34" charset="-122"/>
-                <a:cs typeface="Georgia" pitchFamily="34" charset="-120"/>
-              </a:rPr>
-              <a:t>Any vendor, single dispatched prompt</a:t>
-            </a:r>
-            <a:endParaRPr lang="en-US" sz="1800" dirty="0"/>
-          </a:p>
-        </p:txBody>
-      </p:sp>
-      <p:sp>
-        <p:nvSpPr>
-          <p:cNvPr id="13" name="Text 11"/>
-          <p:cNvSpPr/>
-          <p:nvPr/>
-        </p:nvSpPr>
-        <p:spPr>
-          <a:xfrm>
-            <a:off x="6675120" y="3291840"/>
-            <a:ext cx="4572000" cy="2377440"/>
-          </a:xfrm>
-          <a:prstGeom prst="rect">
-            <a:avLst/>
-          </a:prstGeom>
-          <a:noFill/>
-          <a:ln/>
-        </p:spPr>
-        <p:txBody>
-          <a:bodyPr wrap="square" lIns="0" tIns="0" rIns="0" bIns="0" rtlCol="0" anchor="ctr"/>
-          <a:lstStyle/>
-          <a:p>
-            <a:pPr marL="342900" indent="-342900">
-              <a:spcAft>
-                <a:spcPts val="800"/>
-              </a:spcAft>
-              <a:buSzPct val="100000"/>
-              <a:buChar char="●"/>
-            </a:pPr>
-            <a:r>
-              <a:rPr lang="en-US" sz="1300" dirty="0">
-                <a:solidFill>
-                  <a:srgbClr val="1E293B"/>
-                </a:solidFill>
-                <a:latin typeface="Calibri" pitchFamily="34" charset="0"/>
-                <a:ea typeface="Calibri" pitchFamily="34" charset="-122"/>
-                <a:cs typeface="Calibri" pitchFamily="34" charset="-120"/>
-              </a:rPr>
-              <a:t>One prompt, one file out, no framework overhead.</a:t>
-            </a:r>
-            <a:endParaRPr lang="en-US" sz="1300" dirty="0"/>
-          </a:p>
-          <a:p>
-            <a:pPr marL="342900" indent="-342900">
-              <a:spcAft>
-                <a:spcPts val="800"/>
-              </a:spcAft>
-              <a:buSzPct val="100000"/>
-              <a:buChar char="●"/>
-            </a:pPr>
-            <a:r>
-              <a:rPr lang="en-US" sz="1300" dirty="0">
-                <a:solidFill>
-                  <a:srgbClr val="1E293B"/>
-                </a:solidFill>
-                <a:latin typeface="Calibri" pitchFamily="34" charset="0"/>
-                <a:ea typeface="Calibri" pitchFamily="34" charset="-122"/>
-                <a:cs typeface="Calibri" pitchFamily="34" charset="-120"/>
-              </a:rPr>
-              <a:t>Loads only what the Envelope’s Attachments field names.</a:t>
-            </a:r>
-            <a:endParaRPr lang="en-US" sz="1300" dirty="0"/>
-          </a:p>
-          <a:p>
-            <a:pPr marL="342900" indent="-342900">
-              <a:spcAft>
-                <a:spcPts val="800"/>
-              </a:spcAft>
-              <a:buSzPct val="100000"/>
-              <a:buChar char="●"/>
-            </a:pPr>
-            <a:r>
-              <a:rPr lang="en-US" sz="1300" dirty="0">
-                <a:solidFill>
-                  <a:srgbClr val="1E293B"/>
-                </a:solidFill>
-                <a:latin typeface="Calibri" pitchFamily="34" charset="0"/>
-                <a:ea typeface="Calibri" pitchFamily="34" charset="-122"/>
-                <a:cs typeface="Calibri" pitchFamily="34" charset="-120"/>
-              </a:rPr>
-              <a:t>Vendor per the Envelope: Claude, Gemini, Perplexity, ChatGPT.</a:t>
-            </a:r>
-            <a:endParaRPr lang="en-US" sz="1300" dirty="0"/>
-          </a:p>
-        </p:txBody>
-      </p:sp>
-      <p:sp>
-        <p:nvSpPr>
-          <p:cNvPr id="14" name="Text 12"/>
-          <p:cNvSpPr/>
-          <p:nvPr/>
-        </p:nvSpPr>
-        <p:spPr>
-          <a:xfrm>
-            <a:off x="731520" y="6172200"/>
-            <a:ext cx="10515600" cy="320040"/>
-          </a:xfrm>
-          <a:prstGeom prst="rect">
-            <a:avLst/>
-          </a:prstGeom>
-          <a:noFill/>
-          <a:ln/>
-        </p:spPr>
-        <p:txBody>
-          <a:bodyPr wrap="square" lIns="0" tIns="0" rIns="0" bIns="0" rtlCol="0" anchor="ctr"/>
-          <a:lstStyle/>
-          <a:p>
-            <a:pPr algn="ctr" indent="0" marL="0">
-              <a:buNone/>
-            </a:pPr>
-            <a:r>
-              <a:rPr lang="en-US" sz="1400" i="1" dirty="0">
-                <a:solidFill>
-                  <a:srgbClr val="1E2761"/>
-                </a:solidFill>
-                <a:latin typeface="Georgia" pitchFamily="34" charset="0"/>
-                <a:ea typeface="Georgia" pitchFamily="34" charset="-122"/>
-                <a:cs typeface="Georgia" pitchFamily="34" charset="-120"/>
-              </a:rPr>
-              <a:t>Crossing the boundary is the triple contract →</a:t>
-            </a:r>
-            <a:endParaRPr lang="en-US" sz="1400" dirty="0"/>
-          </a:p>
-        </p:txBody>
-      </p:sp>
-      <p:sp>
-        <p:nvSpPr>
-          <p:cNvPr id="15" name="Text 13"/>
+        </p:txBody>
+      </p:sp>
+      <p:sp>
+        <p:nvSpPr>
+          <p:cNvPr id="18" name="Text 16"/>
           <p:cNvSpPr/>
           <p:nvPr/>
         </p:nvSpPr>
@@ -7082,7 +7579,7 @@
             <a:r>
               <a:rPr lang="en-US" sz="1000" dirty="0">
                 <a:solidFill>
-                  <a:srgbClr val="64748B"/>
+                  <a:srgbClr val="CADCFC"/>
                 </a:solidFill>
                 <a:latin typeface="Calibri" pitchFamily="34" charset="0"/>
                 <a:ea typeface="Calibri" pitchFamily="34" charset="-122"/>
@@ -7096,7 +7593,7 @@
       </p:sp>
       <p:sp>
         <p:nvSpPr>
-          <p:cNvPr id="16" name="Text 14"/>
+          <p:cNvPr id="19" name="Text 17"/>
           <p:cNvSpPr/>
           <p:nvPr/>
         </p:nvSpPr>
@@ -7121,13 +7618,13 @@
             <a:r>
               <a:rPr lang="en-US" sz="1000" dirty="0">
                 <a:solidFill>
-                  <a:srgbClr val="64748B"/>
-                </a:solidFill>
-                <a:latin typeface="Calibri" pitchFamily="34" charset="0"/>
-                <a:ea typeface="Calibri" pitchFamily="34" charset="-122"/>
-                <a:cs typeface="Calibri" pitchFamily="34" charset="-120"/>
-              </a:rPr>
-              <a:t>5 / 12</a:t>
+                  <a:srgbClr val="F4D77A"/>
+                </a:solidFill>
+                <a:latin typeface="Calibri" pitchFamily="34" charset="0"/>
+                <a:ea typeface="Calibri" pitchFamily="34" charset="-122"/>
+                <a:cs typeface="Calibri" pitchFamily="34" charset="-120"/>
+              </a:rPr>
+              <a:t>5 / 13</a:t>
             </a:r>
             <a:endParaRPr lang="en-US" sz="1000" dirty="0"/>
           </a:p>
@@ -7198,7 +7695,7 @@
                 <a:ea typeface="Calibri" pitchFamily="34" charset="-122"/>
                 <a:cs typeface="Calibri" pitchFamily="34" charset="-120"/>
               </a:rPr>
-              <a:t>THE TRIPLE CONTRACT</a:t>
+              <a:t>TWO SESSION TYPES</a:t>
             </a:r>
             <a:endParaRPr lang="en-US" sz="1200" dirty="0"/>
           </a:p>
@@ -7237,7 +7734,7 @@
                 <a:ea typeface="Georgia" pitchFamily="34" charset="-122"/>
                 <a:cs typeface="Georgia" pitchFamily="34" charset="-120"/>
               </a:rPr>
-              <a:t>The load-bearing interface between sessions.</a:t>
+              <a:t>v2 names the split that v1.x ran inconsistently.</a:t>
             </a:r>
             <a:endParaRPr lang="en-US" sz="2600" dirty="0"/>
           </a:p>
@@ -7245,112 +7742,14 @@
       </p:sp>
       <p:sp>
         <p:nvSpPr>
-          <p:cNvPr id="4" name="Text 2"/>
-          <p:cNvSpPr/>
-          <p:nvPr/>
-        </p:nvSpPr>
-        <p:spPr>
-          <a:xfrm>
-            <a:off x="731520" y="1554480"/>
-            <a:ext cx="10698480" cy="640080"/>
-          </a:xfrm>
-          <a:prstGeom prst="rect">
-            <a:avLst/>
-          </a:prstGeom>
-          <a:noFill/>
-          <a:ln/>
-        </p:spPr>
-        <p:txBody>
-          <a:bodyPr wrap="square" lIns="0" tIns="0" rIns="0" bIns="0" rtlCol="0" anchor="ctr"/>
-          <a:lstStyle/>
-          <a:p>
-            <a:pPr indent="0" marL="0">
-              <a:buNone/>
-            </a:pPr>
-            <a:r>
-              <a:rPr lang="en-US" sz="1400" dirty="0">
-                <a:solidFill>
-                  <a:srgbClr val="64748B"/>
-                </a:solidFill>
-                <a:latin typeface="Calibri" pitchFamily="34" charset="0"/>
-                <a:ea typeface="Calibri" pitchFamily="34" charset="-122"/>
-                <a:cs typeface="Calibri" pitchFamily="34" charset="-120"/>
-              </a:rPr>
-              <a:t>Three blocks. Visually distinctive. Self-contained. Survives mode changes (paste-chat today, automated dispatch later) unchanged.</a:t>
-            </a:r>
-            <a:endParaRPr lang="en-US" sz="1400" dirty="0"/>
-          </a:p>
-        </p:txBody>
-      </p:sp>
-      <p:sp>
-        <p:nvSpPr>
-          <p:cNvPr id="5" name="Shape 3"/>
-          <p:cNvSpPr/>
-          <p:nvPr/>
-        </p:nvSpPr>
-        <p:spPr>
-          <a:xfrm>
-            <a:off x="731520" y="2578608"/>
-            <a:ext cx="1005840" cy="1005840"/>
-          </a:xfrm>
-          <a:prstGeom prst="ellipse">
-            <a:avLst/>
-          </a:prstGeom>
-          <a:solidFill>
-            <a:srgbClr val="1E2761"/>
-          </a:solidFill>
-          <a:ln/>
-        </p:spPr>
-      </p:sp>
-      <p:sp>
-        <p:nvSpPr>
-          <p:cNvPr id="6" name="Text 4"/>
-          <p:cNvSpPr/>
-          <p:nvPr/>
-        </p:nvSpPr>
-        <p:spPr>
-          <a:xfrm>
-            <a:off x="731520" y="2578608"/>
-            <a:ext cx="1005840" cy="1005840"/>
-          </a:xfrm>
-          <a:prstGeom prst="rect">
-            <a:avLst/>
-          </a:prstGeom>
-          <a:noFill/>
-          <a:ln/>
-        </p:spPr>
-        <p:txBody>
-          <a:bodyPr wrap="square" lIns="0" tIns="0" rIns="0" bIns="0" rtlCol="0" anchor="ctr"/>
-          <a:lstStyle/>
-          <a:p>
-            <a:pPr algn="ctr" indent="0" marL="0">
-              <a:buNone/>
-            </a:pPr>
-            <a:r>
-              <a:rPr lang="en-US" sz="4400" b="1" dirty="0">
-                <a:solidFill>
-                  <a:srgbClr val="FFFFFF"/>
-                </a:solidFill>
-                <a:latin typeface="Georgia" pitchFamily="34" charset="0"/>
-                <a:ea typeface="Georgia" pitchFamily="34" charset="-122"/>
-                <a:cs typeface="Georgia" pitchFamily="34" charset="-120"/>
-              </a:rPr>
-              <a:t>1</a:t>
-            </a:r>
-            <a:endParaRPr lang="en-US" sz="4400" dirty="0"/>
-          </a:p>
-        </p:txBody>
-      </p:sp>
-      <p:sp>
-        <p:nvSpPr>
-          <p:cNvPr id="7" name="Shape 5"/>
-          <p:cNvSpPr/>
-          <p:nvPr/>
-        </p:nvSpPr>
-        <p:spPr>
-          <a:xfrm>
-            <a:off x="2011680" y="2468880"/>
-            <a:ext cx="9418320" cy="1143000"/>
+          <p:cNvPr id="4" name="Shape 2"/>
+          <p:cNvSpPr/>
+          <p:nvPr/>
+        </p:nvSpPr>
+        <p:spPr>
+          <a:xfrm>
+            <a:off x="731520" y="2011680"/>
+            <a:ext cx="5120640" cy="4023360"/>
           </a:xfrm>
           <a:prstGeom prst="rect">
             <a:avLst/>
@@ -7375,14 +7774,34 @@
       </p:sp>
       <p:sp>
         <p:nvSpPr>
-          <p:cNvPr id="8" name="Text 6"/>
-          <p:cNvSpPr/>
-          <p:nvPr/>
-        </p:nvSpPr>
-        <p:spPr>
-          <a:xfrm>
-            <a:off x="2286000" y="2651760"/>
-            <a:ext cx="8869680" cy="411480"/>
+          <p:cNvPr id="5" name="Shape 3"/>
+          <p:cNvSpPr/>
+          <p:nvPr/>
+        </p:nvSpPr>
+        <p:spPr>
+          <a:xfrm>
+            <a:off x="731520" y="2011680"/>
+            <a:ext cx="5120640" cy="73152"/>
+          </a:xfrm>
+          <a:prstGeom prst="rect">
+            <a:avLst/>
+          </a:prstGeom>
+          <a:solidFill>
+            <a:srgbClr val="1E2761"/>
+          </a:solidFill>
+          <a:ln/>
+        </p:spPr>
+      </p:sp>
+      <p:sp>
+        <p:nvSpPr>
+          <p:cNvPr id="6" name="Text 4"/>
+          <p:cNvSpPr/>
+          <p:nvPr/>
+        </p:nvSpPr>
+        <p:spPr>
+          <a:xfrm>
+            <a:off x="1097280" y="2286000"/>
+            <a:ext cx="4572000" cy="365760"/>
           </a:xfrm>
           <a:prstGeom prst="rect">
             <a:avLst/>
@@ -7398,156 +7817,154 @@
               <a:buNone/>
             </a:pPr>
             <a:r>
-              <a:rPr lang="en-US" sz="1700" b="1" spc="300" kern="0" dirty="0">
+              <a:rPr lang="en-US" sz="1200" b="1" spc="400" kern="0" dirty="0">
+                <a:solidFill>
+                  <a:srgbClr val="1E2761"/>
+                </a:solidFill>
+                <a:latin typeface="Calibri" pitchFamily="34" charset="0"/>
+                <a:ea typeface="Calibri" pitchFamily="34" charset="-122"/>
+                <a:cs typeface="Calibri" pitchFamily="34" charset="-120"/>
+              </a:rPr>
+              <a:t>ORCHESTRATION</a:t>
+            </a:r>
+            <a:endParaRPr lang="en-US" sz="1200" dirty="0"/>
+          </a:p>
+        </p:txBody>
+      </p:sp>
+      <p:sp>
+        <p:nvSpPr>
+          <p:cNvPr id="7" name="Text 5"/>
+          <p:cNvSpPr/>
+          <p:nvPr/>
+        </p:nvSpPr>
+        <p:spPr>
+          <a:xfrm>
+            <a:off x="1097280" y="2651760"/>
+            <a:ext cx="4572000" cy="457200"/>
+          </a:xfrm>
+          <a:prstGeom prst="rect">
+            <a:avLst/>
+          </a:prstGeom>
+          <a:noFill/>
+          <a:ln/>
+        </p:spPr>
+        <p:txBody>
+          <a:bodyPr wrap="square" lIns="0" tIns="0" rIns="0" bIns="0" rtlCol="0" anchor="ctr"/>
+          <a:lstStyle/>
+          <a:p>
+            <a:pPr indent="0" marL="0">
+              <a:buNone/>
+            </a:pPr>
+            <a:r>
+              <a:rPr lang="en-US" sz="1800" b="1" dirty="0">
                 <a:solidFill>
                   <a:srgbClr val="1E293B"/>
-                </a:solidFill>
-                <a:latin typeface="Calibri" pitchFamily="34" charset="0"/>
-                <a:ea typeface="Calibri" pitchFamily="34" charset="-122"/>
-                <a:cs typeface="Calibri" pitchFamily="34" charset="-120"/>
-              </a:rPr>
-              <a:t>ENVELOPE</a:t>
-            </a:r>
-            <a:pPr indent="0" marL="0">
-              <a:buNone/>
-            </a:pPr>
-            <a:r>
-              <a:rPr lang="en-US" sz="1400" dirty="0">
-                <a:solidFill>
-                  <a:srgbClr val="64748B"/>
-                </a:solidFill>
-                <a:latin typeface="Calibri" pitchFamily="34" charset="0"/>
-                <a:ea typeface="Calibri" pitchFamily="34" charset="-122"/>
-                <a:cs typeface="Calibri" pitchFamily="34" charset="-120"/>
-              </a:rPr>
-              <a:t>    ·  </a:t>
-            </a:r>
-            <a:pPr indent="0" marL="0">
-              <a:buNone/>
-            </a:pPr>
-            <a:r>
-              <a:rPr lang="en-US" sz="1400" i="1" dirty="0">
-                <a:solidFill>
-                  <a:srgbClr val="64748B"/>
-                </a:solidFill>
-                <a:latin typeface="Calibri" pitchFamily="34" charset="0"/>
-                <a:ea typeface="Calibri" pitchFamily="34" charset="-122"/>
-                <a:cs typeface="Calibri" pitchFamily="34" charset="-120"/>
-              </a:rPr>
-              <a:t>Inbound</a:t>
-            </a:r>
-            <a:endParaRPr lang="en-US" sz="1700" dirty="0"/>
-          </a:p>
-        </p:txBody>
-      </p:sp>
-      <p:sp>
-        <p:nvSpPr>
-          <p:cNvPr id="9" name="Text 7"/>
-          <p:cNvSpPr/>
-          <p:nvPr/>
-        </p:nvSpPr>
-        <p:spPr>
-          <a:xfrm>
-            <a:off x="2286000" y="3063240"/>
-            <a:ext cx="8869680" cy="502920"/>
-          </a:xfrm>
-          <a:prstGeom prst="rect">
-            <a:avLst/>
-          </a:prstGeom>
-          <a:noFill/>
-          <a:ln/>
-        </p:spPr>
-        <p:txBody>
-          <a:bodyPr wrap="square" lIns="0" tIns="0" rIns="0" bIns="0" rtlCol="0" anchor="ctr"/>
-          <a:lstStyle/>
-          <a:p>
-            <a:pPr indent="0" marL="0">
-              <a:buNone/>
-            </a:pPr>
-            <a:r>
-              <a:rPr lang="en-US" sz="1300" dirty="0">
-                <a:solidFill>
-                  <a:srgbClr val="64748B"/>
-                </a:solidFill>
-                <a:latin typeface="Calibri" pitchFamily="34" charset="0"/>
-                <a:ea typeface="Calibri" pitchFamily="34" charset="-122"/>
-                <a:cs typeface="Calibri" pitchFamily="34" charset="-120"/>
-              </a:rPr>
-              <a:t>Prompt ID, Master version, Vendor + config, Dispatch shape, Attachments, Expected output, Operator hints.</a:t>
-            </a:r>
-            <a:endParaRPr lang="en-US" sz="1300" dirty="0"/>
-          </a:p>
-        </p:txBody>
-      </p:sp>
-      <p:sp>
-        <p:nvSpPr>
-          <p:cNvPr id="10" name="Shape 8"/>
-          <p:cNvSpPr/>
-          <p:nvPr/>
-        </p:nvSpPr>
-        <p:spPr>
-          <a:xfrm>
-            <a:off x="731520" y="3858768"/>
-            <a:ext cx="1005840" cy="1005840"/>
-          </a:xfrm>
-          <a:prstGeom prst="ellipse">
-            <a:avLst/>
-          </a:prstGeom>
-          <a:solidFill>
-            <a:srgbClr val="E6B22E"/>
-          </a:solidFill>
-          <a:ln/>
-        </p:spPr>
-      </p:sp>
-      <p:sp>
-        <p:nvSpPr>
-          <p:cNvPr id="11" name="Text 9"/>
-          <p:cNvSpPr/>
-          <p:nvPr/>
-        </p:nvSpPr>
-        <p:spPr>
-          <a:xfrm>
-            <a:off x="731520" y="3858768"/>
-            <a:ext cx="1005840" cy="1005840"/>
-          </a:xfrm>
-          <a:prstGeom prst="rect">
-            <a:avLst/>
-          </a:prstGeom>
-          <a:noFill/>
-          <a:ln/>
-        </p:spPr>
-        <p:txBody>
-          <a:bodyPr wrap="square" lIns="0" tIns="0" rIns="0" bIns="0" rtlCol="0" anchor="ctr"/>
-          <a:lstStyle/>
-          <a:p>
-            <a:pPr algn="ctr" indent="0" marL="0">
-              <a:buNone/>
-            </a:pPr>
-            <a:r>
-              <a:rPr lang="en-US" sz="4400" b="1" dirty="0">
-                <a:solidFill>
-                  <a:srgbClr val="FFFFFF"/>
                 </a:solidFill>
                 <a:latin typeface="Georgia" pitchFamily="34" charset="0"/>
                 <a:ea typeface="Georgia" pitchFamily="34" charset="-122"/>
                 <a:cs typeface="Georgia" pitchFamily="34" charset="-120"/>
               </a:rPr>
-              <a:t>2</a:t>
-            </a:r>
-            <a:endParaRPr lang="en-US" sz="4400" dirty="0"/>
-          </a:p>
-        </p:txBody>
-      </p:sp>
-      <p:sp>
-        <p:nvSpPr>
-          <p:cNvPr id="12" name="Shape 10"/>
-          <p:cNvSpPr/>
-          <p:nvPr/>
-        </p:nvSpPr>
-        <p:spPr>
-          <a:xfrm>
-            <a:off x="2011680" y="3749040"/>
-            <a:ext cx="9418320" cy="1143000"/>
+              <a:t>Claude with the framework attached</a:t>
+            </a:r>
+            <a:endParaRPr lang="en-US" sz="1800" dirty="0"/>
+          </a:p>
+        </p:txBody>
+      </p:sp>
+      <p:sp>
+        <p:nvSpPr>
+          <p:cNvPr id="8" name="Text 6"/>
+          <p:cNvSpPr/>
+          <p:nvPr/>
+        </p:nvSpPr>
+        <p:spPr>
+          <a:xfrm>
+            <a:off x="1097280" y="3291840"/>
+            <a:ext cx="4572000" cy="2377440"/>
+          </a:xfrm>
+          <a:prstGeom prst="rect">
+            <a:avLst/>
+          </a:prstGeom>
+          <a:noFill/>
+          <a:ln/>
+        </p:spPr>
+        <p:txBody>
+          <a:bodyPr wrap="square" lIns="0" tIns="0" rIns="0" bIns="0" rtlCol="0" anchor="ctr"/>
+          <a:lstStyle/>
+          <a:p>
+            <a:pPr marL="342900" indent="-342900">
+              <a:spcAft>
+                <a:spcPts val="800"/>
+              </a:spcAft>
+              <a:buSzPct val="100000"/>
+              <a:buChar char="●"/>
+            </a:pPr>
+            <a:r>
+              <a:rPr lang="en-US" sz="1300" dirty="0">
+                <a:solidFill>
+                  <a:srgbClr val="1E293B"/>
+                </a:solidFill>
+                <a:latin typeface="Calibri" pitchFamily="34" charset="0"/>
+                <a:ea typeface="Calibri" pitchFamily="34" charset="-122"/>
+                <a:cs typeface="Calibri" pitchFamily="34" charset="-120"/>
+              </a:rPr>
+              <a:t>Master state, Setup probes, Monitor fires, convergence reasoning.</a:t>
+            </a:r>
+            <a:endParaRPr lang="en-US" sz="1300" dirty="0"/>
+          </a:p>
+          <a:p>
+            <a:pPr marL="342900" indent="-342900">
+              <a:spcAft>
+                <a:spcPts val="800"/>
+              </a:spcAft>
+              <a:buSzPct val="100000"/>
+              <a:buChar char="●"/>
+            </a:pPr>
+            <a:r>
+              <a:rPr lang="en-US" sz="1300" dirty="0">
+                <a:solidFill>
+                  <a:srgbClr val="1E293B"/>
+                </a:solidFill>
+                <a:latin typeface="Calibri" pitchFamily="34" charset="0"/>
+                <a:ea typeface="Calibri" pitchFamily="34" charset="-122"/>
+                <a:cs typeface="Calibri" pitchFamily="34" charset="-120"/>
+              </a:rPr>
+              <a:t>Substrate self-check at session open (SP-13).</a:t>
+            </a:r>
+            <a:endParaRPr lang="en-US" sz="1300" dirty="0"/>
+          </a:p>
+          <a:p>
+            <a:pPr marL="342900" indent="-342900">
+              <a:spcAft>
+                <a:spcPts val="800"/>
+              </a:spcAft>
+              <a:buSzPct val="100000"/>
+              <a:buChar char="●"/>
+            </a:pPr>
+            <a:r>
+              <a:rPr lang="en-US" sz="1300" dirty="0">
+                <a:solidFill>
+                  <a:srgbClr val="1E293B"/>
+                </a:solidFill>
+                <a:latin typeface="Calibri" pitchFamily="34" charset="0"/>
+                <a:ea typeface="Calibri" pitchFamily="34" charset="-122"/>
+                <a:cs typeface="Calibri" pitchFamily="34" charset="-120"/>
+              </a:rPr>
+              <a:t>Closes by writing What’s next to the Master.</a:t>
+            </a:r>
+            <a:endParaRPr lang="en-US" sz="1300" dirty="0"/>
+          </a:p>
+        </p:txBody>
+      </p:sp>
+      <p:sp>
+        <p:nvSpPr>
+          <p:cNvPr id="9" name="Shape 7"/>
+          <p:cNvSpPr/>
+          <p:nvPr/>
+        </p:nvSpPr>
+        <p:spPr>
+          <a:xfrm>
+            <a:off x="6309360" y="2011680"/>
+            <a:ext cx="5120640" cy="4023360"/>
           </a:xfrm>
           <a:prstGeom prst="rect">
             <a:avLst/>
@@ -7572,14 +7989,236 @@
       </p:sp>
       <p:sp>
         <p:nvSpPr>
+          <p:cNvPr id="10" name="Shape 8"/>
+          <p:cNvSpPr/>
+          <p:nvPr/>
+        </p:nvSpPr>
+        <p:spPr>
+          <a:xfrm>
+            <a:off x="6309360" y="2011680"/>
+            <a:ext cx="5120640" cy="73152"/>
+          </a:xfrm>
+          <a:prstGeom prst="rect">
+            <a:avLst/>
+          </a:prstGeom>
+          <a:solidFill>
+            <a:srgbClr val="E6B22E"/>
+          </a:solidFill>
+          <a:ln/>
+        </p:spPr>
+      </p:sp>
+      <p:sp>
+        <p:nvSpPr>
+          <p:cNvPr id="11" name="Text 9"/>
+          <p:cNvSpPr/>
+          <p:nvPr/>
+        </p:nvSpPr>
+        <p:spPr>
+          <a:xfrm>
+            <a:off x="6675120" y="2286000"/>
+            <a:ext cx="4572000" cy="365760"/>
+          </a:xfrm>
+          <a:prstGeom prst="rect">
+            <a:avLst/>
+          </a:prstGeom>
+          <a:noFill/>
+          <a:ln/>
+        </p:spPr>
+        <p:txBody>
+          <a:bodyPr wrap="square" lIns="0" tIns="0" rIns="0" bIns="0" rtlCol="0" anchor="ctr"/>
+          <a:lstStyle/>
+          <a:p>
+            <a:pPr indent="0" marL="0">
+              <a:buNone/>
+            </a:pPr>
+            <a:r>
+              <a:rPr lang="en-US" sz="1200" b="1" spc="400" kern="0" dirty="0">
+                <a:solidFill>
+                  <a:srgbClr val="E6B22E"/>
+                </a:solidFill>
+                <a:latin typeface="Calibri" pitchFamily="34" charset="0"/>
+                <a:ea typeface="Calibri" pitchFamily="34" charset="-122"/>
+                <a:cs typeface="Calibri" pitchFamily="34" charset="-120"/>
+              </a:rPr>
+              <a:t>EXECUTION</a:t>
+            </a:r>
+            <a:endParaRPr lang="en-US" sz="1200" dirty="0"/>
+          </a:p>
+        </p:txBody>
+      </p:sp>
+      <p:sp>
+        <p:nvSpPr>
+          <p:cNvPr id="12" name="Text 10"/>
+          <p:cNvSpPr/>
+          <p:nvPr/>
+        </p:nvSpPr>
+        <p:spPr>
+          <a:xfrm>
+            <a:off x="6675120" y="2651760"/>
+            <a:ext cx="4572000" cy="457200"/>
+          </a:xfrm>
+          <a:prstGeom prst="rect">
+            <a:avLst/>
+          </a:prstGeom>
+          <a:noFill/>
+          <a:ln/>
+        </p:spPr>
+        <p:txBody>
+          <a:bodyPr wrap="square" lIns="0" tIns="0" rIns="0" bIns="0" rtlCol="0" anchor="ctr"/>
+          <a:lstStyle/>
+          <a:p>
+            <a:pPr indent="0" marL="0">
+              <a:buNone/>
+            </a:pPr>
+            <a:r>
+              <a:rPr lang="en-US" sz="1800" b="1" dirty="0">
+                <a:solidFill>
+                  <a:srgbClr val="1E293B"/>
+                </a:solidFill>
+                <a:latin typeface="Georgia" pitchFamily="34" charset="0"/>
+                <a:ea typeface="Georgia" pitchFamily="34" charset="-122"/>
+                <a:cs typeface="Georgia" pitchFamily="34" charset="-120"/>
+              </a:rPr>
+              <a:t>Any vendor, single dispatched prompt</a:t>
+            </a:r>
+            <a:endParaRPr lang="en-US" sz="1800" dirty="0"/>
+          </a:p>
+        </p:txBody>
+      </p:sp>
+      <p:sp>
+        <p:nvSpPr>
           <p:cNvPr id="13" name="Text 11"/>
           <p:cNvSpPr/>
           <p:nvPr/>
         </p:nvSpPr>
         <p:spPr>
           <a:xfrm>
-            <a:off x="2286000" y="3931920"/>
-            <a:ext cx="8869680" cy="411480"/>
+            <a:off x="6675120" y="3291840"/>
+            <a:ext cx="4572000" cy="2377440"/>
+          </a:xfrm>
+          <a:prstGeom prst="rect">
+            <a:avLst/>
+          </a:prstGeom>
+          <a:noFill/>
+          <a:ln/>
+        </p:spPr>
+        <p:txBody>
+          <a:bodyPr wrap="square" lIns="0" tIns="0" rIns="0" bIns="0" rtlCol="0" anchor="ctr"/>
+          <a:lstStyle/>
+          <a:p>
+            <a:pPr marL="342900" indent="-342900">
+              <a:spcAft>
+                <a:spcPts val="800"/>
+              </a:spcAft>
+              <a:buSzPct val="100000"/>
+              <a:buChar char="●"/>
+            </a:pPr>
+            <a:r>
+              <a:rPr lang="en-US" sz="1300" dirty="0">
+                <a:solidFill>
+                  <a:srgbClr val="1E293B"/>
+                </a:solidFill>
+                <a:latin typeface="Calibri" pitchFamily="34" charset="0"/>
+                <a:ea typeface="Calibri" pitchFamily="34" charset="-122"/>
+                <a:cs typeface="Calibri" pitchFamily="34" charset="-120"/>
+              </a:rPr>
+              <a:t>One prompt, one file out, no framework overhead.</a:t>
+            </a:r>
+            <a:endParaRPr lang="en-US" sz="1300" dirty="0"/>
+          </a:p>
+          <a:p>
+            <a:pPr marL="342900" indent="-342900">
+              <a:spcAft>
+                <a:spcPts val="800"/>
+              </a:spcAft>
+              <a:buSzPct val="100000"/>
+              <a:buChar char="●"/>
+            </a:pPr>
+            <a:r>
+              <a:rPr lang="en-US" sz="1300" dirty="0">
+                <a:solidFill>
+                  <a:srgbClr val="1E293B"/>
+                </a:solidFill>
+                <a:latin typeface="Calibri" pitchFamily="34" charset="0"/>
+                <a:ea typeface="Calibri" pitchFamily="34" charset="-122"/>
+                <a:cs typeface="Calibri" pitchFamily="34" charset="-120"/>
+              </a:rPr>
+              <a:t>Loads only what the Envelope’s Attachments field names.</a:t>
+            </a:r>
+            <a:endParaRPr lang="en-US" sz="1300" dirty="0"/>
+          </a:p>
+          <a:p>
+            <a:pPr marL="342900" indent="-342900">
+              <a:spcAft>
+                <a:spcPts val="800"/>
+              </a:spcAft>
+              <a:buSzPct val="100000"/>
+              <a:buChar char="●"/>
+            </a:pPr>
+            <a:r>
+              <a:rPr lang="en-US" sz="1300" dirty="0">
+                <a:solidFill>
+                  <a:srgbClr val="1E293B"/>
+                </a:solidFill>
+                <a:latin typeface="Calibri" pitchFamily="34" charset="0"/>
+                <a:ea typeface="Calibri" pitchFamily="34" charset="-122"/>
+                <a:cs typeface="Calibri" pitchFamily="34" charset="-120"/>
+              </a:rPr>
+              <a:t>Vendor per the Envelope: Claude, Gemini, Perplexity, ChatGPT.</a:t>
+            </a:r>
+            <a:endParaRPr lang="en-US" sz="1300" dirty="0"/>
+          </a:p>
+        </p:txBody>
+      </p:sp>
+      <p:sp>
+        <p:nvSpPr>
+          <p:cNvPr id="14" name="Text 12"/>
+          <p:cNvSpPr/>
+          <p:nvPr/>
+        </p:nvSpPr>
+        <p:spPr>
+          <a:xfrm>
+            <a:off x="731520" y="6172200"/>
+            <a:ext cx="10515600" cy="320040"/>
+          </a:xfrm>
+          <a:prstGeom prst="rect">
+            <a:avLst/>
+          </a:prstGeom>
+          <a:noFill/>
+          <a:ln/>
+        </p:spPr>
+        <p:txBody>
+          <a:bodyPr wrap="square" lIns="0" tIns="0" rIns="0" bIns="0" rtlCol="0" anchor="ctr"/>
+          <a:lstStyle/>
+          <a:p>
+            <a:pPr algn="ctr" indent="0" marL="0">
+              <a:buNone/>
+            </a:pPr>
+            <a:r>
+              <a:rPr lang="en-US" sz="1400" i="1" dirty="0">
+                <a:solidFill>
+                  <a:srgbClr val="1E2761"/>
+                </a:solidFill>
+                <a:latin typeface="Georgia" pitchFamily="34" charset="0"/>
+                <a:ea typeface="Georgia" pitchFamily="34" charset="-122"/>
+                <a:cs typeface="Georgia" pitchFamily="34" charset="-120"/>
+              </a:rPr>
+              <a:t>Crossing the boundary is the triple contract →</a:t>
+            </a:r>
+            <a:endParaRPr lang="en-US" sz="1400" dirty="0"/>
+          </a:p>
+        </p:txBody>
+      </p:sp>
+      <p:sp>
+        <p:nvSpPr>
+          <p:cNvPr id="15" name="Text 13"/>
+          <p:cNvSpPr/>
+          <p:nvPr/>
+        </p:nvSpPr>
+        <p:spPr>
+          <a:xfrm>
+            <a:off x="731520" y="6492240"/>
+            <a:ext cx="7315200" cy="274320"/>
           </a:xfrm>
           <a:prstGeom prst="rect">
             <a:avLst/>
@@ -7595,16 +8234,190 @@
               <a:buNone/>
             </a:pPr>
             <a:r>
-              <a:rPr lang="en-US" sz="1700" b="1" spc="300" kern="0" dirty="0">
+              <a:rPr lang="en-US" sz="1000" dirty="0">
+                <a:solidFill>
+                  <a:srgbClr val="64748B"/>
+                </a:solidFill>
+                <a:latin typeface="Calibri" pitchFamily="34" charset="0"/>
+                <a:ea typeface="Calibri" pitchFamily="34" charset="-122"/>
+                <a:cs typeface="Calibri" pitchFamily="34" charset="-120"/>
+              </a:rPr>
+              <a:t>PRISM v2.0  ·  Ron Kuper + Claude  ·  2026</a:t>
+            </a:r>
+            <a:endParaRPr lang="en-US" sz="1000" dirty="0"/>
+          </a:p>
+        </p:txBody>
+      </p:sp>
+      <p:sp>
+        <p:nvSpPr>
+          <p:cNvPr id="16" name="Text 14"/>
+          <p:cNvSpPr/>
+          <p:nvPr/>
+        </p:nvSpPr>
+        <p:spPr>
+          <a:xfrm>
+            <a:off x="10972800" y="6492240"/>
+            <a:ext cx="914400" cy="274320"/>
+          </a:xfrm>
+          <a:prstGeom prst="rect">
+            <a:avLst/>
+          </a:prstGeom>
+          <a:noFill/>
+          <a:ln/>
+        </p:spPr>
+        <p:txBody>
+          <a:bodyPr wrap="square" lIns="0" tIns="0" rIns="0" bIns="0" rtlCol="0" anchor="ctr"/>
+          <a:lstStyle/>
+          <a:p>
+            <a:pPr algn="r" indent="0" marL="0">
+              <a:buNone/>
+            </a:pPr>
+            <a:r>
+              <a:rPr lang="en-US" sz="1000" dirty="0">
+                <a:solidFill>
+                  <a:srgbClr val="64748B"/>
+                </a:solidFill>
+                <a:latin typeface="Calibri" pitchFamily="34" charset="0"/>
+                <a:ea typeface="Calibri" pitchFamily="34" charset="-122"/>
+                <a:cs typeface="Calibri" pitchFamily="34" charset="-120"/>
+              </a:rPr>
+              <a:t>6 / 13</a:t>
+            </a:r>
+            <a:endParaRPr lang="en-US" sz="1000" dirty="0"/>
+          </a:p>
+        </p:txBody>
+      </p:sp>
+    </p:spTree>
+  </p:cSld>
+  <p:clrMapOvr>
+    <a:masterClrMapping/>
+  </p:clrMapOvr>
+</p:sld>
+</file>
+
+<file path=ppt/slides/slide7.xml><?xml version="1.0" encoding="utf-8"?>
+<p:sld xmlns:a="http://schemas.openxmlformats.org/drawingml/2006/main" xmlns:r="http://schemas.openxmlformats.org/officeDocument/2006/relationships" xmlns:p="http://schemas.openxmlformats.org/presentationml/2006/main">
+  <p:cSld name="Slide 7">
+    <p:bg>
+      <p:bgPr>
+        <a:solidFill>
+          <a:srgbClr val="F8F9FB"/>
+        </a:solidFill>
+      </p:bgPr>
+    </p:bg>
+    <p:spTree>
+      <p:nvGrpSpPr>
+        <p:cNvPr id="1" name=""/>
+        <p:cNvGrpSpPr/>
+        <p:nvPr/>
+      </p:nvGrpSpPr>
+      <p:grpSpPr>
+        <a:xfrm>
+          <a:off x="0" y="0"/>
+          <a:ext cx="0" cy="0"/>
+          <a:chOff x="0" y="0"/>
+          <a:chExt cx="0" cy="0"/>
+        </a:xfrm>
+      </p:grpSpPr>
+      <p:sp>
+        <p:nvSpPr>
+          <p:cNvPr id="2" name="Text 0"/>
+          <p:cNvSpPr/>
+          <p:nvPr/>
+        </p:nvSpPr>
+        <p:spPr>
+          <a:xfrm>
+            <a:off x="731520" y="502920"/>
+            <a:ext cx="5486400" cy="320040"/>
+          </a:xfrm>
+          <a:prstGeom prst="rect">
+            <a:avLst/>
+          </a:prstGeom>
+          <a:noFill/>
+          <a:ln/>
+        </p:spPr>
+        <p:txBody>
+          <a:bodyPr wrap="square" lIns="0" tIns="0" rIns="0" bIns="0" rtlCol="0" anchor="ctr"/>
+          <a:lstStyle/>
+          <a:p>
+            <a:pPr indent="0" marL="0">
+              <a:buNone/>
+            </a:pPr>
+            <a:r>
+              <a:rPr lang="en-US" sz="1200" b="1" spc="500" kern="0" dirty="0">
+                <a:solidFill>
+                  <a:srgbClr val="E6B22E"/>
+                </a:solidFill>
+                <a:latin typeface="Calibri" pitchFamily="34" charset="0"/>
+                <a:ea typeface="Calibri" pitchFamily="34" charset="-122"/>
+                <a:cs typeface="Calibri" pitchFamily="34" charset="-120"/>
+              </a:rPr>
+              <a:t>THE TRIPLE CONTRACT</a:t>
+            </a:r>
+            <a:endParaRPr lang="en-US" sz="1200" dirty="0"/>
+          </a:p>
+        </p:txBody>
+      </p:sp>
+      <p:sp>
+        <p:nvSpPr>
+          <p:cNvPr id="3" name="Text 1"/>
+          <p:cNvSpPr/>
+          <p:nvPr/>
+        </p:nvSpPr>
+        <p:spPr>
+          <a:xfrm>
+            <a:off x="731520" y="868680"/>
+            <a:ext cx="10698480" cy="640080"/>
+          </a:xfrm>
+          <a:prstGeom prst="rect">
+            <a:avLst/>
+          </a:prstGeom>
+          <a:noFill/>
+          <a:ln/>
+        </p:spPr>
+        <p:txBody>
+          <a:bodyPr wrap="square" lIns="0" tIns="0" rIns="0" bIns="0" rtlCol="0" anchor="ctr"/>
+          <a:lstStyle/>
+          <a:p>
+            <a:pPr indent="0" marL="0">
+              <a:buNone/>
+            </a:pPr>
+            <a:r>
+              <a:rPr lang="en-US" sz="2600" b="1" dirty="0">
                 <a:solidFill>
                   <a:srgbClr val="1E293B"/>
                 </a:solidFill>
-                <a:latin typeface="Calibri" pitchFamily="34" charset="0"/>
-                <a:ea typeface="Calibri" pitchFamily="34" charset="-122"/>
-                <a:cs typeface="Calibri" pitchFamily="34" charset="-120"/>
-              </a:rPr>
-              <a:t>SELF-CHECK</a:t>
-            </a:r>
+                <a:latin typeface="Georgia" pitchFamily="34" charset="0"/>
+                <a:ea typeface="Georgia" pitchFamily="34" charset="-122"/>
+                <a:cs typeface="Georgia" pitchFamily="34" charset="-120"/>
+              </a:rPr>
+              <a:t>The load-bearing interface between sessions.</a:t>
+            </a:r>
+            <a:endParaRPr lang="en-US" sz="2600" dirty="0"/>
+          </a:p>
+        </p:txBody>
+      </p:sp>
+      <p:sp>
+        <p:nvSpPr>
+          <p:cNvPr id="4" name="Text 2"/>
+          <p:cNvSpPr/>
+          <p:nvPr/>
+        </p:nvSpPr>
+        <p:spPr>
+          <a:xfrm>
+            <a:off x="731520" y="1554480"/>
+            <a:ext cx="10698480" cy="640080"/>
+          </a:xfrm>
+          <a:prstGeom prst="rect">
+            <a:avLst/>
+          </a:prstGeom>
+          <a:noFill/>
+          <a:ln/>
+        </p:spPr>
+        <p:txBody>
+          <a:bodyPr wrap="square" lIns="0" tIns="0" rIns="0" bIns="0" rtlCol="0" anchor="ctr"/>
+          <a:lstStyle/>
+          <a:p>
             <a:pPr indent="0" marL="0">
               <a:buNone/>
             </a:pPr>
@@ -7617,74 +8430,21 @@
                 <a:ea typeface="Calibri" pitchFamily="34" charset="-122"/>
                 <a:cs typeface="Calibri" pitchFamily="34" charset="-120"/>
               </a:rPr>
-              <a:t>    ·  </a:t>
-            </a:r>
-            <a:pPr indent="0" marL="0">
-              <a:buNone/>
-            </a:pPr>
-            <a:r>
-              <a:rPr lang="en-US" sz="1400" i="1" dirty="0">
-                <a:solidFill>
-                  <a:srgbClr val="64748B"/>
-                </a:solidFill>
-                <a:latin typeface="Calibri" pitchFamily="34" charset="0"/>
-                <a:ea typeface="Calibri" pitchFamily="34" charset="-122"/>
-                <a:cs typeface="Calibri" pitchFamily="34" charset="-120"/>
-              </a:rPr>
-              <a:t>Substrate verification</a:t>
-            </a:r>
-            <a:endParaRPr lang="en-US" sz="1700" dirty="0"/>
-          </a:p>
-        </p:txBody>
-      </p:sp>
-      <p:sp>
-        <p:nvSpPr>
-          <p:cNvPr id="14" name="Text 12"/>
-          <p:cNvSpPr/>
-          <p:nvPr/>
-        </p:nvSpPr>
-        <p:spPr>
-          <a:xfrm>
-            <a:off x="2286000" y="4343400"/>
-            <a:ext cx="8869680" cy="502920"/>
-          </a:xfrm>
-          <a:prstGeom prst="rect">
-            <a:avLst/>
-          </a:prstGeom>
-          <a:noFill/>
-          <a:ln/>
-        </p:spPr>
-        <p:txBody>
-          <a:bodyPr wrap="square" lIns="0" tIns="0" rIns="0" bIns="0" rtlCol="0" anchor="ctr"/>
-          <a:lstStyle/>
-          <a:p>
-            <a:pPr indent="0" marL="0">
-              <a:buNone/>
-            </a:pPr>
-            <a:r>
-              <a:rPr lang="en-US" sz="1300" dirty="0">
-                <a:solidFill>
-                  <a:srgbClr val="64748B"/>
-                </a:solidFill>
-                <a:latin typeface="Calibri" pitchFamily="34" charset="0"/>
-                <a:ea typeface="Calibri" pitchFamily="34" charset="-122"/>
-                <a:cs typeface="Calibri" pitchFamily="34" charset="-120"/>
-              </a:rPr>
-              <a:t>Vendor declares model identity, confirms match against Envelope’s Vendor and Vendor config fields. Halts on mismatch.</a:t>
-            </a:r>
-            <a:endParaRPr lang="en-US" sz="1300" dirty="0"/>
-          </a:p>
-        </p:txBody>
-      </p:sp>
-      <p:sp>
-        <p:nvSpPr>
-          <p:cNvPr id="15" name="Shape 13"/>
-          <p:cNvSpPr/>
-          <p:nvPr/>
-        </p:nvSpPr>
-        <p:spPr>
-          <a:xfrm>
-            <a:off x="731520" y="5138928"/>
+              <a:t>Three blocks. Visually distinctive. Self-contained. Survives mode changes (paste-chat today, automated dispatch later) unchanged.</a:t>
+            </a:r>
+            <a:endParaRPr lang="en-US" sz="1400" dirty="0"/>
+          </a:p>
+        </p:txBody>
+      </p:sp>
+      <p:sp>
+        <p:nvSpPr>
+          <p:cNvPr id="5" name="Shape 3"/>
+          <p:cNvSpPr/>
+          <p:nvPr/>
+        </p:nvSpPr>
+        <p:spPr>
+          <a:xfrm>
+            <a:off x="731520" y="2578608"/>
             <a:ext cx="1005840" cy="1005840"/>
           </a:xfrm>
           <a:prstGeom prst="ellipse">
@@ -7698,13 +8458,13 @@
       </p:sp>
       <p:sp>
         <p:nvSpPr>
-          <p:cNvPr id="16" name="Text 14"/>
-          <p:cNvSpPr/>
-          <p:nvPr/>
-        </p:nvSpPr>
-        <p:spPr>
-          <a:xfrm>
-            <a:off x="731520" y="5138928"/>
+          <p:cNvPr id="6" name="Text 4"/>
+          <p:cNvSpPr/>
+          <p:nvPr/>
+        </p:nvSpPr>
+        <p:spPr>
+          <a:xfrm>
+            <a:off x="731520" y="2578608"/>
             <a:ext cx="1005840" cy="1005840"/>
           </a:xfrm>
           <a:prstGeom prst="rect">
@@ -7729,7 +8489,7 @@
                 <a:ea typeface="Georgia" pitchFamily="34" charset="-122"/>
                 <a:cs typeface="Georgia" pitchFamily="34" charset="-120"/>
               </a:rPr>
-              <a:t>3</a:t>
+              <a:t>1</a:t>
             </a:r>
             <a:endParaRPr lang="en-US" sz="4400" dirty="0"/>
           </a:p>
@@ -7737,13 +8497,13 @@
       </p:sp>
       <p:sp>
         <p:nvSpPr>
-          <p:cNvPr id="17" name="Shape 15"/>
-          <p:cNvSpPr/>
-          <p:nvPr/>
-        </p:nvSpPr>
-        <p:spPr>
-          <a:xfrm>
-            <a:off x="2011680" y="5029200"/>
+          <p:cNvPr id="7" name="Shape 5"/>
+          <p:cNvSpPr/>
+          <p:nvPr/>
+        </p:nvSpPr>
+        <p:spPr>
+          <a:xfrm>
+            <a:off x="2011680" y="2468880"/>
             <a:ext cx="9418320" cy="1143000"/>
           </a:xfrm>
           <a:prstGeom prst="rect">
@@ -7769,6 +8529,400 @@
       </p:sp>
       <p:sp>
         <p:nvSpPr>
+          <p:cNvPr id="8" name="Text 6"/>
+          <p:cNvSpPr/>
+          <p:nvPr/>
+        </p:nvSpPr>
+        <p:spPr>
+          <a:xfrm>
+            <a:off x="2286000" y="2651760"/>
+            <a:ext cx="8869680" cy="411480"/>
+          </a:xfrm>
+          <a:prstGeom prst="rect">
+            <a:avLst/>
+          </a:prstGeom>
+          <a:noFill/>
+          <a:ln/>
+        </p:spPr>
+        <p:txBody>
+          <a:bodyPr wrap="square" lIns="0" tIns="0" rIns="0" bIns="0" rtlCol="0" anchor="ctr"/>
+          <a:lstStyle/>
+          <a:p>
+            <a:pPr indent="0" marL="0">
+              <a:buNone/>
+            </a:pPr>
+            <a:r>
+              <a:rPr lang="en-US" sz="1700" b="1" spc="300" kern="0" dirty="0">
+                <a:solidFill>
+                  <a:srgbClr val="1E293B"/>
+                </a:solidFill>
+                <a:latin typeface="Calibri" pitchFamily="34" charset="0"/>
+                <a:ea typeface="Calibri" pitchFamily="34" charset="-122"/>
+                <a:cs typeface="Calibri" pitchFamily="34" charset="-120"/>
+              </a:rPr>
+              <a:t>ENVELOPE</a:t>
+            </a:r>
+            <a:pPr indent="0" marL="0">
+              <a:buNone/>
+            </a:pPr>
+            <a:r>
+              <a:rPr lang="en-US" sz="1400" dirty="0">
+                <a:solidFill>
+                  <a:srgbClr val="64748B"/>
+                </a:solidFill>
+                <a:latin typeface="Calibri" pitchFamily="34" charset="0"/>
+                <a:ea typeface="Calibri" pitchFamily="34" charset="-122"/>
+                <a:cs typeface="Calibri" pitchFamily="34" charset="-120"/>
+              </a:rPr>
+              <a:t>    ·  </a:t>
+            </a:r>
+            <a:pPr indent="0" marL="0">
+              <a:buNone/>
+            </a:pPr>
+            <a:r>
+              <a:rPr lang="en-US" sz="1400" i="1" dirty="0">
+                <a:solidFill>
+                  <a:srgbClr val="64748B"/>
+                </a:solidFill>
+                <a:latin typeface="Calibri" pitchFamily="34" charset="0"/>
+                <a:ea typeface="Calibri" pitchFamily="34" charset="-122"/>
+                <a:cs typeface="Calibri" pitchFamily="34" charset="-120"/>
+              </a:rPr>
+              <a:t>Inbound</a:t>
+            </a:r>
+            <a:endParaRPr lang="en-US" sz="1700" dirty="0"/>
+          </a:p>
+        </p:txBody>
+      </p:sp>
+      <p:sp>
+        <p:nvSpPr>
+          <p:cNvPr id="9" name="Text 7"/>
+          <p:cNvSpPr/>
+          <p:nvPr/>
+        </p:nvSpPr>
+        <p:spPr>
+          <a:xfrm>
+            <a:off x="2286000" y="3063240"/>
+            <a:ext cx="8869680" cy="502920"/>
+          </a:xfrm>
+          <a:prstGeom prst="rect">
+            <a:avLst/>
+          </a:prstGeom>
+          <a:noFill/>
+          <a:ln/>
+        </p:spPr>
+        <p:txBody>
+          <a:bodyPr wrap="square" lIns="0" tIns="0" rIns="0" bIns="0" rtlCol="0" anchor="ctr"/>
+          <a:lstStyle/>
+          <a:p>
+            <a:pPr indent="0" marL="0">
+              <a:buNone/>
+            </a:pPr>
+            <a:r>
+              <a:rPr lang="en-US" sz="1300" dirty="0">
+                <a:solidFill>
+                  <a:srgbClr val="64748B"/>
+                </a:solidFill>
+                <a:latin typeface="Calibri" pitchFamily="34" charset="0"/>
+                <a:ea typeface="Calibri" pitchFamily="34" charset="-122"/>
+                <a:cs typeface="Calibri" pitchFamily="34" charset="-120"/>
+              </a:rPr>
+              <a:t>Prompt ID, Master version, Vendor + config, Dispatch shape, Attachments, Expected output, Operator hints.</a:t>
+            </a:r>
+            <a:endParaRPr lang="en-US" sz="1300" dirty="0"/>
+          </a:p>
+        </p:txBody>
+      </p:sp>
+      <p:sp>
+        <p:nvSpPr>
+          <p:cNvPr id="10" name="Shape 8"/>
+          <p:cNvSpPr/>
+          <p:nvPr/>
+        </p:nvSpPr>
+        <p:spPr>
+          <a:xfrm>
+            <a:off x="731520" y="3858768"/>
+            <a:ext cx="1005840" cy="1005840"/>
+          </a:xfrm>
+          <a:prstGeom prst="ellipse">
+            <a:avLst/>
+          </a:prstGeom>
+          <a:solidFill>
+            <a:srgbClr val="E6B22E"/>
+          </a:solidFill>
+          <a:ln/>
+        </p:spPr>
+      </p:sp>
+      <p:sp>
+        <p:nvSpPr>
+          <p:cNvPr id="11" name="Text 9"/>
+          <p:cNvSpPr/>
+          <p:nvPr/>
+        </p:nvSpPr>
+        <p:spPr>
+          <a:xfrm>
+            <a:off x="731520" y="3858768"/>
+            <a:ext cx="1005840" cy="1005840"/>
+          </a:xfrm>
+          <a:prstGeom prst="rect">
+            <a:avLst/>
+          </a:prstGeom>
+          <a:noFill/>
+          <a:ln/>
+        </p:spPr>
+        <p:txBody>
+          <a:bodyPr wrap="square" lIns="0" tIns="0" rIns="0" bIns="0" rtlCol="0" anchor="ctr"/>
+          <a:lstStyle/>
+          <a:p>
+            <a:pPr algn="ctr" indent="0" marL="0">
+              <a:buNone/>
+            </a:pPr>
+            <a:r>
+              <a:rPr lang="en-US" sz="4400" b="1" dirty="0">
+                <a:solidFill>
+                  <a:srgbClr val="FFFFFF"/>
+                </a:solidFill>
+                <a:latin typeface="Georgia" pitchFamily="34" charset="0"/>
+                <a:ea typeface="Georgia" pitchFamily="34" charset="-122"/>
+                <a:cs typeface="Georgia" pitchFamily="34" charset="-120"/>
+              </a:rPr>
+              <a:t>2</a:t>
+            </a:r>
+            <a:endParaRPr lang="en-US" sz="4400" dirty="0"/>
+          </a:p>
+        </p:txBody>
+      </p:sp>
+      <p:sp>
+        <p:nvSpPr>
+          <p:cNvPr id="12" name="Shape 10"/>
+          <p:cNvSpPr/>
+          <p:nvPr/>
+        </p:nvSpPr>
+        <p:spPr>
+          <a:xfrm>
+            <a:off x="2011680" y="3749040"/>
+            <a:ext cx="9418320" cy="1143000"/>
+          </a:xfrm>
+          <a:prstGeom prst="rect">
+            <a:avLst/>
+          </a:prstGeom>
+          <a:solidFill>
+            <a:srgbClr val="FFFFFF"/>
+          </a:solidFill>
+          <a:ln w="12700">
+            <a:solidFill>
+              <a:srgbClr val="E2E8F0"/>
+            </a:solidFill>
+            <a:prstDash val="solid"/>
+          </a:ln>
+          <a:effectLst>
+            <a:outerShdw sx="100000" sy="100000" kx="0" ky="0" algn="bl" rotWithShape="0" blurRad="101600" dist="25400" dir="5400000">
+              <a:srgbClr val="000000">
+                <a:alpha val="6000"/>
+              </a:srgbClr>
+            </a:outerShdw>
+          </a:effectLst>
+        </p:spPr>
+      </p:sp>
+      <p:sp>
+        <p:nvSpPr>
+          <p:cNvPr id="13" name="Text 11"/>
+          <p:cNvSpPr/>
+          <p:nvPr/>
+        </p:nvSpPr>
+        <p:spPr>
+          <a:xfrm>
+            <a:off x="2286000" y="3931920"/>
+            <a:ext cx="8869680" cy="411480"/>
+          </a:xfrm>
+          <a:prstGeom prst="rect">
+            <a:avLst/>
+          </a:prstGeom>
+          <a:noFill/>
+          <a:ln/>
+        </p:spPr>
+        <p:txBody>
+          <a:bodyPr wrap="square" lIns="0" tIns="0" rIns="0" bIns="0" rtlCol="0" anchor="ctr"/>
+          <a:lstStyle/>
+          <a:p>
+            <a:pPr indent="0" marL="0">
+              <a:buNone/>
+            </a:pPr>
+            <a:r>
+              <a:rPr lang="en-US" sz="1700" b="1" spc="300" kern="0" dirty="0">
+                <a:solidFill>
+                  <a:srgbClr val="1E293B"/>
+                </a:solidFill>
+                <a:latin typeface="Calibri" pitchFamily="34" charset="0"/>
+                <a:ea typeface="Calibri" pitchFamily="34" charset="-122"/>
+                <a:cs typeface="Calibri" pitchFamily="34" charset="-120"/>
+              </a:rPr>
+              <a:t>SELF-CHECK</a:t>
+            </a:r>
+            <a:pPr indent="0" marL="0">
+              <a:buNone/>
+            </a:pPr>
+            <a:r>
+              <a:rPr lang="en-US" sz="1400" dirty="0">
+                <a:solidFill>
+                  <a:srgbClr val="64748B"/>
+                </a:solidFill>
+                <a:latin typeface="Calibri" pitchFamily="34" charset="0"/>
+                <a:ea typeface="Calibri" pitchFamily="34" charset="-122"/>
+                <a:cs typeface="Calibri" pitchFamily="34" charset="-120"/>
+              </a:rPr>
+              <a:t>    ·  </a:t>
+            </a:r>
+            <a:pPr indent="0" marL="0">
+              <a:buNone/>
+            </a:pPr>
+            <a:r>
+              <a:rPr lang="en-US" sz="1400" i="1" dirty="0">
+                <a:solidFill>
+                  <a:srgbClr val="64748B"/>
+                </a:solidFill>
+                <a:latin typeface="Calibri" pitchFamily="34" charset="0"/>
+                <a:ea typeface="Calibri" pitchFamily="34" charset="-122"/>
+                <a:cs typeface="Calibri" pitchFamily="34" charset="-120"/>
+              </a:rPr>
+              <a:t>Substrate verification</a:t>
+            </a:r>
+            <a:endParaRPr lang="en-US" sz="1700" dirty="0"/>
+          </a:p>
+        </p:txBody>
+      </p:sp>
+      <p:sp>
+        <p:nvSpPr>
+          <p:cNvPr id="14" name="Text 12"/>
+          <p:cNvSpPr/>
+          <p:nvPr/>
+        </p:nvSpPr>
+        <p:spPr>
+          <a:xfrm>
+            <a:off x="2286000" y="4343400"/>
+            <a:ext cx="8869680" cy="502920"/>
+          </a:xfrm>
+          <a:prstGeom prst="rect">
+            <a:avLst/>
+          </a:prstGeom>
+          <a:noFill/>
+          <a:ln/>
+        </p:spPr>
+        <p:txBody>
+          <a:bodyPr wrap="square" lIns="0" tIns="0" rIns="0" bIns="0" rtlCol="0" anchor="ctr"/>
+          <a:lstStyle/>
+          <a:p>
+            <a:pPr indent="0" marL="0">
+              <a:buNone/>
+            </a:pPr>
+            <a:r>
+              <a:rPr lang="en-US" sz="1300" dirty="0">
+                <a:solidFill>
+                  <a:srgbClr val="64748B"/>
+                </a:solidFill>
+                <a:latin typeface="Calibri" pitchFamily="34" charset="0"/>
+                <a:ea typeface="Calibri" pitchFamily="34" charset="-122"/>
+                <a:cs typeface="Calibri" pitchFamily="34" charset="-120"/>
+              </a:rPr>
+              <a:t>Vendor declares model identity, confirms match against Envelope’s Vendor and Vendor config fields. Halts on mismatch.</a:t>
+            </a:r>
+            <a:endParaRPr lang="en-US" sz="1300" dirty="0"/>
+          </a:p>
+        </p:txBody>
+      </p:sp>
+      <p:sp>
+        <p:nvSpPr>
+          <p:cNvPr id="15" name="Shape 13"/>
+          <p:cNvSpPr/>
+          <p:nvPr/>
+        </p:nvSpPr>
+        <p:spPr>
+          <a:xfrm>
+            <a:off x="731520" y="5138928"/>
+            <a:ext cx="1005840" cy="1005840"/>
+          </a:xfrm>
+          <a:prstGeom prst="ellipse">
+            <a:avLst/>
+          </a:prstGeom>
+          <a:solidFill>
+            <a:srgbClr val="1E2761"/>
+          </a:solidFill>
+          <a:ln/>
+        </p:spPr>
+      </p:sp>
+      <p:sp>
+        <p:nvSpPr>
+          <p:cNvPr id="16" name="Text 14"/>
+          <p:cNvSpPr/>
+          <p:nvPr/>
+        </p:nvSpPr>
+        <p:spPr>
+          <a:xfrm>
+            <a:off x="731520" y="5138928"/>
+            <a:ext cx="1005840" cy="1005840"/>
+          </a:xfrm>
+          <a:prstGeom prst="rect">
+            <a:avLst/>
+          </a:prstGeom>
+          <a:noFill/>
+          <a:ln/>
+        </p:spPr>
+        <p:txBody>
+          <a:bodyPr wrap="square" lIns="0" tIns="0" rIns="0" bIns="0" rtlCol="0" anchor="ctr"/>
+          <a:lstStyle/>
+          <a:p>
+            <a:pPr algn="ctr" indent="0" marL="0">
+              <a:buNone/>
+            </a:pPr>
+            <a:r>
+              <a:rPr lang="en-US" sz="4400" b="1" dirty="0">
+                <a:solidFill>
+                  <a:srgbClr val="FFFFFF"/>
+                </a:solidFill>
+                <a:latin typeface="Georgia" pitchFamily="34" charset="0"/>
+                <a:ea typeface="Georgia" pitchFamily="34" charset="-122"/>
+                <a:cs typeface="Georgia" pitchFamily="34" charset="-120"/>
+              </a:rPr>
+              <a:t>3</a:t>
+            </a:r>
+            <a:endParaRPr lang="en-US" sz="4400" dirty="0"/>
+          </a:p>
+        </p:txBody>
+      </p:sp>
+      <p:sp>
+        <p:nvSpPr>
+          <p:cNvPr id="17" name="Shape 15"/>
+          <p:cNvSpPr/>
+          <p:nvPr/>
+        </p:nvSpPr>
+        <p:spPr>
+          <a:xfrm>
+            <a:off x="2011680" y="5029200"/>
+            <a:ext cx="9418320" cy="1143000"/>
+          </a:xfrm>
+          <a:prstGeom prst="rect">
+            <a:avLst/>
+          </a:prstGeom>
+          <a:solidFill>
+            <a:srgbClr val="FFFFFF"/>
+          </a:solidFill>
+          <a:ln w="12700">
+            <a:solidFill>
+              <a:srgbClr val="E2E8F0"/>
+            </a:solidFill>
+            <a:prstDash val="solid"/>
+          </a:ln>
+          <a:effectLst>
+            <a:outerShdw sx="100000" sy="100000" kx="0" ky="0" algn="bl" rotWithShape="0" blurRad="101600" dist="25400" dir="5400000">
+              <a:srgbClr val="000000">
+                <a:alpha val="6000"/>
+              </a:srgbClr>
+            </a:outerShdw>
+          </a:effectLst>
+        </p:spPr>
+      </p:sp>
+      <p:sp>
+        <p:nvSpPr>
           <p:cNvPr id="18" name="Text 16"/>
           <p:cNvSpPr/>
           <p:nvPr/>
@@ -7945,7 +9099,7 @@
                 <a:ea typeface="Calibri" pitchFamily="34" charset="-122"/>
                 <a:cs typeface="Calibri" pitchFamily="34" charset="-120"/>
               </a:rPr>
-              <a:t>6 / 12</a:t>
+              <a:t>7 / 13</a:t>
             </a:r>
             <a:endParaRPr lang="en-US" sz="1000" dirty="0"/>
           </a:p>
@@ -7959,9 +9113,9 @@
 </p:sld>
 </file>
 
-<file path=ppt/slides/slide7.xml><?xml version="1.0" encoding="utf-8"?>
+<file path=ppt/slides/slide8.xml><?xml version="1.0" encoding="utf-8"?>
 <p:sld xmlns:a="http://schemas.openxmlformats.org/drawingml/2006/main" xmlns:r="http://schemas.openxmlformats.org/officeDocument/2006/relationships" xmlns:p="http://schemas.openxmlformats.org/presentationml/2006/main">
-  <p:cSld name="Slide 7">
+  <p:cSld name="Slide 8">
     <p:bg>
       <p:bgPr>
         <a:solidFill>
@@ -8779,1466 +9933,7 @@
                 <a:ea typeface="Calibri" pitchFamily="34" charset="-122"/>
                 <a:cs typeface="Calibri" pitchFamily="34" charset="-120"/>
               </a:rPr>
-              <a:t>7 / 12</a:t>
-            </a:r>
-            <a:endParaRPr lang="en-US" sz="1000" dirty="0"/>
-          </a:p>
-        </p:txBody>
-      </p:sp>
-    </p:spTree>
-  </p:cSld>
-  <p:clrMapOvr>
-    <a:masterClrMapping/>
-  </p:clrMapOvr>
-</p:sld>
-</file>
-
-<file path=ppt/slides/slide8.xml><?xml version="1.0" encoding="utf-8"?>
-<p:sld xmlns:a="http://schemas.openxmlformats.org/drawingml/2006/main" xmlns:r="http://schemas.openxmlformats.org/officeDocument/2006/relationships" xmlns:p="http://schemas.openxmlformats.org/presentationml/2006/main">
-  <p:cSld name="Slide 8">
-    <p:bg>
-      <p:bgPr>
-        <a:solidFill>
-          <a:srgbClr val="F8F9FB"/>
-        </a:solidFill>
-      </p:bgPr>
-    </p:bg>
-    <p:spTree>
-      <p:nvGrpSpPr>
-        <p:cNvPr id="1" name=""/>
-        <p:cNvGrpSpPr/>
-        <p:nvPr/>
-      </p:nvGrpSpPr>
-      <p:grpSpPr>
-        <a:xfrm>
-          <a:off x="0" y="0"/>
-          <a:ext cx="0" cy="0"/>
-          <a:chOff x="0" y="0"/>
-          <a:chExt cx="0" cy="0"/>
-        </a:xfrm>
-      </p:grpSpPr>
-      <p:sp>
-        <p:nvSpPr>
-          <p:cNvPr id="2" name="Text 0"/>
-          <p:cNvSpPr/>
-          <p:nvPr/>
-        </p:nvSpPr>
-        <p:spPr>
-          <a:xfrm>
-            <a:off x="731520" y="502920"/>
-            <a:ext cx="7315200" cy="320040"/>
-          </a:xfrm>
-          <a:prstGeom prst="rect">
-            <a:avLst/>
-          </a:prstGeom>
-          <a:noFill/>
-          <a:ln/>
-        </p:spPr>
-        <p:txBody>
-          <a:bodyPr wrap="square" lIns="0" tIns="0" rIns="0" bIns="0" rtlCol="0" anchor="ctr"/>
-          <a:lstStyle/>
-          <a:p>
-            <a:pPr indent="0" marL="0">
-              <a:buNone/>
-            </a:pPr>
-            <a:r>
-              <a:rPr lang="en-US" sz="1200" b="1" spc="500" kern="0" dirty="0">
-                <a:solidFill>
-                  <a:srgbClr val="E6B22E"/>
-                </a:solidFill>
-                <a:latin typeface="Calibri" pitchFamily="34" charset="0"/>
-                <a:ea typeface="Calibri" pitchFamily="34" charset="-122"/>
-                <a:cs typeface="Calibri" pitchFamily="34" charset="-120"/>
-              </a:rPr>
-              <a:t>SETUP AS ITERATIVE REFINEMENT</a:t>
-            </a:r>
-            <a:endParaRPr lang="en-US" sz="1200" dirty="0"/>
-          </a:p>
-        </p:txBody>
-      </p:sp>
-      <p:sp>
-        <p:nvSpPr>
-          <p:cNvPr id="3" name="Text 1"/>
-          <p:cNvSpPr/>
-          <p:nvPr/>
-        </p:nvSpPr>
-        <p:spPr>
-          <a:xfrm>
-            <a:off x="731520" y="868680"/>
-            <a:ext cx="10698480" cy="640080"/>
-          </a:xfrm>
-          <a:prstGeom prst="rect">
-            <a:avLst/>
-          </a:prstGeom>
-          <a:noFill/>
-          <a:ln/>
-        </p:spPr>
-        <p:txBody>
-          <a:bodyPr wrap="square" lIns="0" tIns="0" rIns="0" bIns="0" rtlCol="0" anchor="ctr"/>
-          <a:lstStyle/>
-          <a:p>
-            <a:pPr indent="0" marL="0">
-              <a:buNone/>
-            </a:pPr>
-            <a:r>
-              <a:rPr lang="en-US" sz="2600" b="1" dirty="0">
-                <a:solidFill>
-                  <a:srgbClr val="1E293B"/>
-                </a:solidFill>
-                <a:latin typeface="Georgia" pitchFamily="34" charset="0"/>
-                <a:ea typeface="Georgia" pitchFamily="34" charset="-122"/>
-                <a:cs typeface="Georgia" pitchFamily="34" charset="-120"/>
-              </a:rPr>
-              <a:t>P0.1 → P0.2 → … until coverage saturates.</a:t>
-            </a:r>
-            <a:endParaRPr lang="en-US" sz="2600" dirty="0"/>
-          </a:p>
-        </p:txBody>
-      </p:sp>
-      <p:sp>
-        <p:nvSpPr>
-          <p:cNvPr id="4" name="Text 2"/>
-          <p:cNvSpPr/>
-          <p:nvPr/>
-        </p:nvSpPr>
-        <p:spPr>
-          <a:xfrm>
-            <a:off x="731520" y="1554480"/>
-            <a:ext cx="10698480" cy="640080"/>
-          </a:xfrm>
-          <a:prstGeom prst="rect">
-            <a:avLst/>
-          </a:prstGeom>
-          <a:noFill/>
-          <a:ln/>
-        </p:spPr>
-        <p:txBody>
-          <a:bodyPr wrap="square" lIns="0" tIns="0" rIns="0" bIns="0" rtlCol="0" anchor="ctr"/>
-          <a:lstStyle/>
-          <a:p>
-            <a:pPr indent="0" marL="0">
-              <a:buNone/>
-            </a:pPr>
-            <a:r>
-              <a:rPr lang="en-US" sz="1350" dirty="0">
-                <a:solidFill>
-                  <a:srgbClr val="64748B"/>
-                </a:solidFill>
-                <a:latin typeface="Calibri" pitchFamily="34" charset="0"/>
-                <a:ea typeface="Calibri" pitchFamily="34" charset="-122"/>
-                <a:cs typeface="Calibri" pitchFamily="34" charset="-120"/>
-              </a:rPr>
-              <a:t>Probe 1 grades the draft strategy against the Library each iteration. Probes 6 &amp; 7 iterate early. Probes 2 &amp; 4 iterate per turn. Probes 3 &amp; 5 run once.</a:t>
-            </a:r>
-            <a:endParaRPr lang="en-US" sz="1350" dirty="0"/>
-          </a:p>
-        </p:txBody>
-      </p:sp>
-      <p:sp>
-        <p:nvSpPr>
-          <p:cNvPr id="5" name="Shape 3"/>
-          <p:cNvSpPr/>
-          <p:nvPr/>
-        </p:nvSpPr>
-        <p:spPr>
-          <a:xfrm>
-            <a:off x="521208" y="2468880"/>
-            <a:ext cx="1463040" cy="868680"/>
-          </a:xfrm>
-          <a:prstGeom prst="rect">
-            <a:avLst/>
-          </a:prstGeom>
-          <a:solidFill>
-            <a:srgbClr val="1E2761"/>
-          </a:solidFill>
-          <a:ln/>
-        </p:spPr>
-      </p:sp>
-      <p:sp>
-        <p:nvSpPr>
-          <p:cNvPr id="6" name="Text 4"/>
-          <p:cNvSpPr/>
-          <p:nvPr/>
-        </p:nvSpPr>
-        <p:spPr>
-          <a:xfrm>
-            <a:off x="521208" y="2514600"/>
-            <a:ext cx="1463040" cy="365760"/>
-          </a:xfrm>
-          <a:prstGeom prst="rect">
-            <a:avLst/>
-          </a:prstGeom>
-          <a:noFill/>
-          <a:ln/>
-        </p:spPr>
-        <p:txBody>
-          <a:bodyPr wrap="square" lIns="0" tIns="0" rIns="0" bIns="0" rtlCol="0" anchor="ctr"/>
-          <a:lstStyle/>
-          <a:p>
-            <a:pPr algn="ctr" indent="0" marL="0">
-              <a:buNone/>
-            </a:pPr>
-            <a:r>
-              <a:rPr lang="en-US" sz="1800" b="1" dirty="0">
-                <a:solidFill>
-                  <a:srgbClr val="E6B22E"/>
-                </a:solidFill>
-                <a:latin typeface="Georgia" pitchFamily="34" charset="0"/>
-                <a:ea typeface="Georgia" pitchFamily="34" charset="-122"/>
-                <a:cs typeface="Georgia" pitchFamily="34" charset="-120"/>
-              </a:rPr>
-              <a:t>P1</a:t>
-            </a:r>
-            <a:endParaRPr lang="en-US" sz="1800" dirty="0"/>
-          </a:p>
-        </p:txBody>
-      </p:sp>
-      <p:sp>
-        <p:nvSpPr>
-          <p:cNvPr id="7" name="Text 5"/>
-          <p:cNvSpPr/>
-          <p:nvPr/>
-        </p:nvSpPr>
-        <p:spPr>
-          <a:xfrm>
-            <a:off x="566928" y="2926080"/>
-            <a:ext cx="1371600" cy="365760"/>
-          </a:xfrm>
-          <a:prstGeom prst="rect">
-            <a:avLst/>
-          </a:prstGeom>
-          <a:noFill/>
-          <a:ln/>
-        </p:spPr>
-        <p:txBody>
-          <a:bodyPr wrap="square" lIns="0" tIns="0" rIns="0" bIns="0" rtlCol="0" anchor="ctr"/>
-          <a:lstStyle/>
-          <a:p>
-            <a:pPr algn="ctr" indent="0" marL="0">
-              <a:buNone/>
-            </a:pPr>
-            <a:r>
-              <a:rPr lang="en-US" sz="1050" dirty="0">
-                <a:solidFill>
-                  <a:srgbClr val="FFFFFF"/>
-                </a:solidFill>
-                <a:latin typeface="Calibri" pitchFamily="34" charset="0"/>
-                <a:ea typeface="Calibri" pitchFamily="34" charset="-122"/>
-                <a:cs typeface="Calibri" pitchFamily="34" charset="-120"/>
-              </a:rPr>
-              <a:t>Coverage grading</a:t>
-            </a:r>
-            <a:endParaRPr lang="en-US" sz="1050" dirty="0"/>
-          </a:p>
-        </p:txBody>
-      </p:sp>
-      <p:sp>
-        <p:nvSpPr>
-          <p:cNvPr id="8" name="Shape 6"/>
-          <p:cNvSpPr/>
-          <p:nvPr/>
-        </p:nvSpPr>
-        <p:spPr>
-          <a:xfrm>
-            <a:off x="2130552" y="2468880"/>
-            <a:ext cx="1463040" cy="868680"/>
-          </a:xfrm>
-          <a:prstGeom prst="rect">
-            <a:avLst/>
-          </a:prstGeom>
-          <a:solidFill>
-            <a:srgbClr val="1E2761"/>
-          </a:solidFill>
-          <a:ln/>
-        </p:spPr>
-      </p:sp>
-      <p:sp>
-        <p:nvSpPr>
-          <p:cNvPr id="9" name="Text 7"/>
-          <p:cNvSpPr/>
-          <p:nvPr/>
-        </p:nvSpPr>
-        <p:spPr>
-          <a:xfrm>
-            <a:off x="2130552" y="2514600"/>
-            <a:ext cx="1463040" cy="365760"/>
-          </a:xfrm>
-          <a:prstGeom prst="rect">
-            <a:avLst/>
-          </a:prstGeom>
-          <a:noFill/>
-          <a:ln/>
-        </p:spPr>
-        <p:txBody>
-          <a:bodyPr wrap="square" lIns="0" tIns="0" rIns="0" bIns="0" rtlCol="0" anchor="ctr"/>
-          <a:lstStyle/>
-          <a:p>
-            <a:pPr algn="ctr" indent="0" marL="0">
-              <a:buNone/>
-            </a:pPr>
-            <a:r>
-              <a:rPr lang="en-US" sz="1800" b="1" dirty="0">
-                <a:solidFill>
-                  <a:srgbClr val="E6B22E"/>
-                </a:solidFill>
-                <a:latin typeface="Georgia" pitchFamily="34" charset="0"/>
-                <a:ea typeface="Georgia" pitchFamily="34" charset="-122"/>
-                <a:cs typeface="Georgia" pitchFamily="34" charset="-120"/>
-              </a:rPr>
-              <a:t>P2</a:t>
-            </a:r>
-            <a:endParaRPr lang="en-US" sz="1800" dirty="0"/>
-          </a:p>
-        </p:txBody>
-      </p:sp>
-      <p:sp>
-        <p:nvSpPr>
-          <p:cNvPr id="10" name="Text 8"/>
-          <p:cNvSpPr/>
-          <p:nvPr/>
-        </p:nvSpPr>
-        <p:spPr>
-          <a:xfrm>
-            <a:off x="2176272" y="2926080"/>
-            <a:ext cx="1371600" cy="365760"/>
-          </a:xfrm>
-          <a:prstGeom prst="rect">
-            <a:avLst/>
-          </a:prstGeom>
-          <a:noFill/>
-          <a:ln/>
-        </p:spPr>
-        <p:txBody>
-          <a:bodyPr wrap="square" lIns="0" tIns="0" rIns="0" bIns="0" rtlCol="0" anchor="ctr"/>
-          <a:lstStyle/>
-          <a:p>
-            <a:pPr algn="ctr" indent="0" marL="0">
-              <a:buNone/>
-            </a:pPr>
-            <a:r>
-              <a:rPr lang="en-US" sz="1050" dirty="0">
-                <a:solidFill>
-                  <a:srgbClr val="FFFFFF"/>
-                </a:solidFill>
-                <a:latin typeface="Calibri" pitchFamily="34" charset="0"/>
-                <a:ea typeface="Calibri" pitchFamily="34" charset="-122"/>
-                <a:cs typeface="Calibri" pitchFamily="34" charset="-120"/>
-              </a:rPr>
-              <a:t>Adversarial Scope</a:t>
-            </a:r>
-            <a:endParaRPr lang="en-US" sz="1050" dirty="0"/>
-          </a:p>
-        </p:txBody>
-      </p:sp>
-      <p:sp>
-        <p:nvSpPr>
-          <p:cNvPr id="11" name="Shape 9"/>
-          <p:cNvSpPr/>
-          <p:nvPr/>
-        </p:nvSpPr>
-        <p:spPr>
-          <a:xfrm>
-            <a:off x="3739896" y="2468880"/>
-            <a:ext cx="1463040" cy="868680"/>
-          </a:xfrm>
-          <a:prstGeom prst="rect">
-            <a:avLst/>
-          </a:prstGeom>
-          <a:solidFill>
-            <a:srgbClr val="1E2761"/>
-          </a:solidFill>
-          <a:ln/>
-        </p:spPr>
-      </p:sp>
-      <p:sp>
-        <p:nvSpPr>
-          <p:cNvPr id="12" name="Text 10"/>
-          <p:cNvSpPr/>
-          <p:nvPr/>
-        </p:nvSpPr>
-        <p:spPr>
-          <a:xfrm>
-            <a:off x="3739896" y="2514600"/>
-            <a:ext cx="1463040" cy="365760"/>
-          </a:xfrm>
-          <a:prstGeom prst="rect">
-            <a:avLst/>
-          </a:prstGeom>
-          <a:noFill/>
-          <a:ln/>
-        </p:spPr>
-        <p:txBody>
-          <a:bodyPr wrap="square" lIns="0" tIns="0" rIns="0" bIns="0" rtlCol="0" anchor="ctr"/>
-          <a:lstStyle/>
-          <a:p>
-            <a:pPr algn="ctr" indent="0" marL="0">
-              <a:buNone/>
-            </a:pPr>
-            <a:r>
-              <a:rPr lang="en-US" sz="1800" b="1" dirty="0">
-                <a:solidFill>
-                  <a:srgbClr val="E6B22E"/>
-                </a:solidFill>
-                <a:latin typeface="Georgia" pitchFamily="34" charset="0"/>
-                <a:ea typeface="Georgia" pitchFamily="34" charset="-122"/>
-                <a:cs typeface="Georgia" pitchFamily="34" charset="-120"/>
-              </a:rPr>
-              <a:t>P3</a:t>
-            </a:r>
-            <a:endParaRPr lang="en-US" sz="1800" dirty="0"/>
-          </a:p>
-        </p:txBody>
-      </p:sp>
-      <p:sp>
-        <p:nvSpPr>
-          <p:cNvPr id="13" name="Text 11"/>
-          <p:cNvSpPr/>
-          <p:nvPr/>
-        </p:nvSpPr>
-        <p:spPr>
-          <a:xfrm>
-            <a:off x="3785616" y="2926080"/>
-            <a:ext cx="1371600" cy="365760"/>
-          </a:xfrm>
-          <a:prstGeom prst="rect">
-            <a:avLst/>
-          </a:prstGeom>
-          <a:noFill/>
-          <a:ln/>
-        </p:spPr>
-        <p:txBody>
-          <a:bodyPr wrap="square" lIns="0" tIns="0" rIns="0" bIns="0" rtlCol="0" anchor="ctr"/>
-          <a:lstStyle/>
-          <a:p>
-            <a:pPr algn="ctr" indent="0" marL="0">
-              <a:buNone/>
-            </a:pPr>
-            <a:r>
-              <a:rPr lang="en-US" sz="1050" dirty="0">
-                <a:solidFill>
-                  <a:srgbClr val="FFFFFF"/>
-                </a:solidFill>
-                <a:latin typeface="Calibri" pitchFamily="34" charset="0"/>
-                <a:ea typeface="Calibri" pitchFamily="34" charset="-122"/>
-                <a:cs typeface="Calibri" pitchFamily="34" charset="-120"/>
-              </a:rPr>
-              <a:t>Decision Framing</a:t>
-            </a:r>
-            <a:endParaRPr lang="en-US" sz="1050" dirty="0"/>
-          </a:p>
-        </p:txBody>
-      </p:sp>
-      <p:sp>
-        <p:nvSpPr>
-          <p:cNvPr id="14" name="Shape 12"/>
-          <p:cNvSpPr/>
-          <p:nvPr/>
-        </p:nvSpPr>
-        <p:spPr>
-          <a:xfrm>
-            <a:off x="5349240" y="2468880"/>
-            <a:ext cx="1463040" cy="868680"/>
-          </a:xfrm>
-          <a:prstGeom prst="rect">
-            <a:avLst/>
-          </a:prstGeom>
-          <a:solidFill>
-            <a:srgbClr val="1E2761"/>
-          </a:solidFill>
-          <a:ln/>
-        </p:spPr>
-      </p:sp>
-      <p:sp>
-        <p:nvSpPr>
-          <p:cNvPr id="15" name="Text 13"/>
-          <p:cNvSpPr/>
-          <p:nvPr/>
-        </p:nvSpPr>
-        <p:spPr>
-          <a:xfrm>
-            <a:off x="5349240" y="2514600"/>
-            <a:ext cx="1463040" cy="365760"/>
-          </a:xfrm>
-          <a:prstGeom prst="rect">
-            <a:avLst/>
-          </a:prstGeom>
-          <a:noFill/>
-          <a:ln/>
-        </p:spPr>
-        <p:txBody>
-          <a:bodyPr wrap="square" lIns="0" tIns="0" rIns="0" bIns="0" rtlCol="0" anchor="ctr"/>
-          <a:lstStyle/>
-          <a:p>
-            <a:pPr algn="ctr" indent="0" marL="0">
-              <a:buNone/>
-            </a:pPr>
-            <a:r>
-              <a:rPr lang="en-US" sz="1800" b="1" dirty="0">
-                <a:solidFill>
-                  <a:srgbClr val="E6B22E"/>
-                </a:solidFill>
-                <a:latin typeface="Georgia" pitchFamily="34" charset="0"/>
-                <a:ea typeface="Georgia" pitchFamily="34" charset="-122"/>
-                <a:cs typeface="Georgia" pitchFamily="34" charset="-120"/>
-              </a:rPr>
-              <a:t>P4</a:t>
-            </a:r>
-            <a:endParaRPr lang="en-US" sz="1800" dirty="0"/>
-          </a:p>
-        </p:txBody>
-      </p:sp>
-      <p:sp>
-        <p:nvSpPr>
-          <p:cNvPr id="16" name="Text 14"/>
-          <p:cNvSpPr/>
-          <p:nvPr/>
-        </p:nvSpPr>
-        <p:spPr>
-          <a:xfrm>
-            <a:off x="5394960" y="2926080"/>
-            <a:ext cx="1371600" cy="365760"/>
-          </a:xfrm>
-          <a:prstGeom prst="rect">
-            <a:avLst/>
-          </a:prstGeom>
-          <a:noFill/>
-          <a:ln/>
-        </p:spPr>
-        <p:txBody>
-          <a:bodyPr wrap="square" lIns="0" tIns="0" rIns="0" bIns="0" rtlCol="0" anchor="ctr"/>
-          <a:lstStyle/>
-          <a:p>
-            <a:pPr algn="ctr" indent="0" marL="0">
-              <a:buNone/>
-            </a:pPr>
-            <a:r>
-              <a:rPr lang="en-US" sz="1050" dirty="0">
-                <a:solidFill>
-                  <a:srgbClr val="FFFFFF"/>
-                </a:solidFill>
-                <a:latin typeface="Calibri" pitchFamily="34" charset="0"/>
-                <a:ea typeface="Calibri" pitchFamily="34" charset="-122"/>
-                <a:cs typeface="Calibri" pitchFamily="34" charset="-120"/>
-              </a:rPr>
-              <a:t>Pre-mortem</a:t>
-            </a:r>
-            <a:endParaRPr lang="en-US" sz="1050" dirty="0"/>
-          </a:p>
-        </p:txBody>
-      </p:sp>
-      <p:sp>
-        <p:nvSpPr>
-          <p:cNvPr id="17" name="Shape 15"/>
-          <p:cNvSpPr/>
-          <p:nvPr/>
-        </p:nvSpPr>
-        <p:spPr>
-          <a:xfrm>
-            <a:off x="6958584" y="2468880"/>
-            <a:ext cx="1463040" cy="868680"/>
-          </a:xfrm>
-          <a:prstGeom prst="rect">
-            <a:avLst/>
-          </a:prstGeom>
-          <a:solidFill>
-            <a:srgbClr val="1E2761"/>
-          </a:solidFill>
-          <a:ln/>
-        </p:spPr>
-      </p:sp>
-      <p:sp>
-        <p:nvSpPr>
-          <p:cNvPr id="18" name="Text 16"/>
-          <p:cNvSpPr/>
-          <p:nvPr/>
-        </p:nvSpPr>
-        <p:spPr>
-          <a:xfrm>
-            <a:off x="6958584" y="2514600"/>
-            <a:ext cx="1463040" cy="365760"/>
-          </a:xfrm>
-          <a:prstGeom prst="rect">
-            <a:avLst/>
-          </a:prstGeom>
-          <a:noFill/>
-          <a:ln/>
-        </p:spPr>
-        <p:txBody>
-          <a:bodyPr wrap="square" lIns="0" tIns="0" rIns="0" bIns="0" rtlCol="0" anchor="ctr"/>
-          <a:lstStyle/>
-          <a:p>
-            <a:pPr algn="ctr" indent="0" marL="0">
-              <a:buNone/>
-            </a:pPr>
-            <a:r>
-              <a:rPr lang="en-US" sz="1800" b="1" dirty="0">
-                <a:solidFill>
-                  <a:srgbClr val="E6B22E"/>
-                </a:solidFill>
-                <a:latin typeface="Georgia" pitchFamily="34" charset="0"/>
-                <a:ea typeface="Georgia" pitchFamily="34" charset="-122"/>
-                <a:cs typeface="Georgia" pitchFamily="34" charset="-120"/>
-              </a:rPr>
-              <a:t>P5</a:t>
-            </a:r>
-            <a:endParaRPr lang="en-US" sz="1800" dirty="0"/>
-          </a:p>
-        </p:txBody>
-      </p:sp>
-      <p:sp>
-        <p:nvSpPr>
-          <p:cNvPr id="19" name="Text 17"/>
-          <p:cNvSpPr/>
-          <p:nvPr/>
-        </p:nvSpPr>
-        <p:spPr>
-          <a:xfrm>
-            <a:off x="7004304" y="2926080"/>
-            <a:ext cx="1371600" cy="365760"/>
-          </a:xfrm>
-          <a:prstGeom prst="rect">
-            <a:avLst/>
-          </a:prstGeom>
-          <a:noFill/>
-          <a:ln/>
-        </p:spPr>
-        <p:txBody>
-          <a:bodyPr wrap="square" lIns="0" tIns="0" rIns="0" bIns="0" rtlCol="0" anchor="ctr"/>
-          <a:lstStyle/>
-          <a:p>
-            <a:pPr algn="ctr" indent="0" marL="0">
-              <a:buNone/>
-            </a:pPr>
-            <a:r>
-              <a:rPr lang="en-US" sz="1050" dirty="0">
-                <a:solidFill>
-                  <a:srgbClr val="FFFFFF"/>
-                </a:solidFill>
-                <a:latin typeface="Calibri" pitchFamily="34" charset="0"/>
-                <a:ea typeface="Calibri" pitchFamily="34" charset="-122"/>
-                <a:cs typeface="Calibri" pitchFamily="34" charset="-120"/>
-              </a:rPr>
-              <a:t>Falsifier</a:t>
-            </a:r>
-            <a:endParaRPr lang="en-US" sz="1050" dirty="0"/>
-          </a:p>
-        </p:txBody>
-      </p:sp>
-      <p:sp>
-        <p:nvSpPr>
-          <p:cNvPr id="20" name="Shape 18"/>
-          <p:cNvSpPr/>
-          <p:nvPr/>
-        </p:nvSpPr>
-        <p:spPr>
-          <a:xfrm>
-            <a:off x="8567928" y="2468880"/>
-            <a:ext cx="1463040" cy="868680"/>
-          </a:xfrm>
-          <a:prstGeom prst="rect">
-            <a:avLst/>
-          </a:prstGeom>
-          <a:solidFill>
-            <a:srgbClr val="1E2761"/>
-          </a:solidFill>
-          <a:ln/>
-        </p:spPr>
-      </p:sp>
-      <p:sp>
-        <p:nvSpPr>
-          <p:cNvPr id="21" name="Text 19"/>
-          <p:cNvSpPr/>
-          <p:nvPr/>
-        </p:nvSpPr>
-        <p:spPr>
-          <a:xfrm>
-            <a:off x="8567928" y="2514600"/>
-            <a:ext cx="1463040" cy="365760"/>
-          </a:xfrm>
-          <a:prstGeom prst="rect">
-            <a:avLst/>
-          </a:prstGeom>
-          <a:noFill/>
-          <a:ln/>
-        </p:spPr>
-        <p:txBody>
-          <a:bodyPr wrap="square" lIns="0" tIns="0" rIns="0" bIns="0" rtlCol="0" anchor="ctr"/>
-          <a:lstStyle/>
-          <a:p>
-            <a:pPr algn="ctr" indent="0" marL="0">
-              <a:buNone/>
-            </a:pPr>
-            <a:r>
-              <a:rPr lang="en-US" sz="1800" b="1" dirty="0">
-                <a:solidFill>
-                  <a:srgbClr val="E6B22E"/>
-                </a:solidFill>
-                <a:latin typeface="Georgia" pitchFamily="34" charset="0"/>
-                <a:ea typeface="Georgia" pitchFamily="34" charset="-122"/>
-                <a:cs typeface="Georgia" pitchFamily="34" charset="-120"/>
-              </a:rPr>
-              <a:t>P6</a:t>
-            </a:r>
-            <a:endParaRPr lang="en-US" sz="1800" dirty="0"/>
-          </a:p>
-        </p:txBody>
-      </p:sp>
-      <p:sp>
-        <p:nvSpPr>
-          <p:cNvPr id="22" name="Text 20"/>
-          <p:cNvSpPr/>
-          <p:nvPr/>
-        </p:nvSpPr>
-        <p:spPr>
-          <a:xfrm>
-            <a:off x="8613648" y="2926080"/>
-            <a:ext cx="1371600" cy="365760"/>
-          </a:xfrm>
-          <a:prstGeom prst="rect">
-            <a:avLst/>
-          </a:prstGeom>
-          <a:noFill/>
-          <a:ln/>
-        </p:spPr>
-        <p:txBody>
-          <a:bodyPr wrap="square" lIns="0" tIns="0" rIns="0" bIns="0" rtlCol="0" anchor="ctr"/>
-          <a:lstStyle/>
-          <a:p>
-            <a:pPr algn="ctr" indent="0" marL="0">
-              <a:buNone/>
-            </a:pPr>
-            <a:r>
-              <a:rPr lang="en-US" sz="1050" dirty="0">
-                <a:solidFill>
-                  <a:srgbClr val="FFFFFF"/>
-                </a:solidFill>
-                <a:latin typeface="Calibri" pitchFamily="34" charset="0"/>
-                <a:ea typeface="Calibri" pitchFamily="34" charset="-122"/>
-                <a:cs typeface="Calibri" pitchFamily="34" charset="-120"/>
-              </a:rPr>
-              <a:t>Domain Recon</a:t>
-            </a:r>
-            <a:endParaRPr lang="en-US" sz="1050" dirty="0"/>
-          </a:p>
-        </p:txBody>
-      </p:sp>
-      <p:sp>
-        <p:nvSpPr>
-          <p:cNvPr id="23" name="Shape 21"/>
-          <p:cNvSpPr/>
-          <p:nvPr/>
-        </p:nvSpPr>
-        <p:spPr>
-          <a:xfrm>
-            <a:off x="10177272" y="2468880"/>
-            <a:ext cx="1463040" cy="868680"/>
-          </a:xfrm>
-          <a:prstGeom prst="rect">
-            <a:avLst/>
-          </a:prstGeom>
-          <a:solidFill>
-            <a:srgbClr val="1E2761"/>
-          </a:solidFill>
-          <a:ln/>
-        </p:spPr>
-      </p:sp>
-      <p:sp>
-        <p:nvSpPr>
-          <p:cNvPr id="24" name="Text 22"/>
-          <p:cNvSpPr/>
-          <p:nvPr/>
-        </p:nvSpPr>
-        <p:spPr>
-          <a:xfrm>
-            <a:off x="10177272" y="2514600"/>
-            <a:ext cx="1463040" cy="365760"/>
-          </a:xfrm>
-          <a:prstGeom prst="rect">
-            <a:avLst/>
-          </a:prstGeom>
-          <a:noFill/>
-          <a:ln/>
-        </p:spPr>
-        <p:txBody>
-          <a:bodyPr wrap="square" lIns="0" tIns="0" rIns="0" bIns="0" rtlCol="0" anchor="ctr"/>
-          <a:lstStyle/>
-          <a:p>
-            <a:pPr algn="ctr" indent="0" marL="0">
-              <a:buNone/>
-            </a:pPr>
-            <a:r>
-              <a:rPr lang="en-US" sz="1800" b="1" dirty="0">
-                <a:solidFill>
-                  <a:srgbClr val="E6B22E"/>
-                </a:solidFill>
-                <a:latin typeface="Georgia" pitchFamily="34" charset="0"/>
-                <a:ea typeface="Georgia" pitchFamily="34" charset="-122"/>
-                <a:cs typeface="Georgia" pitchFamily="34" charset="-120"/>
-              </a:rPr>
-              <a:t>P7</a:t>
-            </a:r>
-            <a:endParaRPr lang="en-US" sz="1800" dirty="0"/>
-          </a:p>
-        </p:txBody>
-      </p:sp>
-      <p:sp>
-        <p:nvSpPr>
-          <p:cNvPr id="25" name="Text 23"/>
-          <p:cNvSpPr/>
-          <p:nvPr/>
-        </p:nvSpPr>
-        <p:spPr>
-          <a:xfrm>
-            <a:off x="10222992" y="2926080"/>
-            <a:ext cx="1371600" cy="365760"/>
-          </a:xfrm>
-          <a:prstGeom prst="rect">
-            <a:avLst/>
-          </a:prstGeom>
-          <a:noFill/>
-          <a:ln/>
-        </p:spPr>
-        <p:txBody>
-          <a:bodyPr wrap="square" lIns="0" tIns="0" rIns="0" bIns="0" rtlCol="0" anchor="ctr"/>
-          <a:lstStyle/>
-          <a:p>
-            <a:pPr algn="ctr" indent="0" marL="0">
-              <a:buNone/>
-            </a:pPr>
-            <a:r>
-              <a:rPr lang="en-US" sz="1050" dirty="0">
-                <a:solidFill>
-                  <a:srgbClr val="FFFFFF"/>
-                </a:solidFill>
-                <a:latin typeface="Calibri" pitchFamily="34" charset="0"/>
-                <a:ea typeface="Calibri" pitchFamily="34" charset="-122"/>
-                <a:cs typeface="Calibri" pitchFamily="34" charset="-120"/>
-              </a:rPr>
-              <a:t>User Voice</a:t>
-            </a:r>
-            <a:endParaRPr lang="en-US" sz="1050" dirty="0"/>
-          </a:p>
-        </p:txBody>
-      </p:sp>
-      <p:sp>
-        <p:nvSpPr>
-          <p:cNvPr id="26" name="Text 24"/>
-          <p:cNvSpPr/>
-          <p:nvPr/>
-        </p:nvSpPr>
-        <p:spPr>
-          <a:xfrm>
-            <a:off x="731520" y="3794760"/>
-            <a:ext cx="10698480" cy="365760"/>
-          </a:xfrm>
-          <a:prstGeom prst="rect">
-            <a:avLst/>
-          </a:prstGeom>
-          <a:noFill/>
-          <a:ln/>
-        </p:spPr>
-        <p:txBody>
-          <a:bodyPr wrap="square" lIns="0" tIns="0" rIns="0" bIns="0" rtlCol="0" anchor="ctr"/>
-          <a:lstStyle/>
-          <a:p>
-            <a:pPr indent="0" marL="0">
-              <a:buNone/>
-            </a:pPr>
-            <a:r>
-              <a:rPr lang="en-US" sz="1200" b="1" spc="400" kern="0" dirty="0">
-                <a:solidFill>
-                  <a:srgbClr val="1E2761"/>
-                </a:solidFill>
-                <a:latin typeface="Calibri" pitchFamily="34" charset="0"/>
-                <a:ea typeface="Calibri" pitchFamily="34" charset="-122"/>
-                <a:cs typeface="Calibri" pitchFamily="34" charset="-120"/>
-              </a:rPr>
-              <a:t>THREE-LAYER READINESS  —  P0 → P1 BOUNDARY</a:t>
-            </a:r>
-            <a:endParaRPr lang="en-US" sz="1200" dirty="0"/>
-          </a:p>
-        </p:txBody>
-      </p:sp>
-      <p:sp>
-        <p:nvSpPr>
-          <p:cNvPr id="27" name="Shape 25"/>
-          <p:cNvSpPr/>
-          <p:nvPr/>
-        </p:nvSpPr>
-        <p:spPr>
-          <a:xfrm>
-            <a:off x="365760" y="4251960"/>
-            <a:ext cx="3657600" cy="1691640"/>
-          </a:xfrm>
-          <a:prstGeom prst="rect">
-            <a:avLst/>
-          </a:prstGeom>
-          <a:solidFill>
-            <a:srgbClr val="FFFFFF"/>
-          </a:solidFill>
-          <a:ln w="12700">
-            <a:solidFill>
-              <a:srgbClr val="E2E8F0"/>
-            </a:solidFill>
-            <a:prstDash val="solid"/>
-          </a:ln>
-          <a:effectLst>
-            <a:outerShdw sx="100000" sy="100000" kx="0" ky="0" algn="bl" rotWithShape="0" blurRad="101600" dist="25400" dir="5400000">
-              <a:srgbClr val="000000">
-                <a:alpha val="6000"/>
-              </a:srgbClr>
-            </a:outerShdw>
-          </a:effectLst>
-        </p:spPr>
-      </p:sp>
-      <p:sp>
-        <p:nvSpPr>
-          <p:cNvPr id="28" name="Shape 26"/>
-          <p:cNvSpPr/>
-          <p:nvPr/>
-        </p:nvSpPr>
-        <p:spPr>
-          <a:xfrm>
-            <a:off x="685800" y="4572000"/>
-            <a:ext cx="640080" cy="640080"/>
-          </a:xfrm>
-          <a:prstGeom prst="ellipse">
-            <a:avLst/>
-          </a:prstGeom>
-          <a:solidFill>
-            <a:srgbClr val="E6B22E"/>
-          </a:solidFill>
-          <a:ln/>
-        </p:spPr>
-      </p:sp>
-      <p:sp>
-        <p:nvSpPr>
-          <p:cNvPr id="29" name="Text 27"/>
-          <p:cNvSpPr/>
-          <p:nvPr/>
-        </p:nvSpPr>
-        <p:spPr>
-          <a:xfrm>
-            <a:off x="685800" y="4572000"/>
-            <a:ext cx="640080" cy="640080"/>
-          </a:xfrm>
-          <a:prstGeom prst="rect">
-            <a:avLst/>
-          </a:prstGeom>
-          <a:noFill/>
-          <a:ln/>
-        </p:spPr>
-        <p:txBody>
-          <a:bodyPr wrap="square" lIns="0" tIns="0" rIns="0" bIns="0" rtlCol="0" anchor="ctr"/>
-          <a:lstStyle/>
-          <a:p>
-            <a:pPr algn="ctr" indent="0" marL="0">
-              <a:buNone/>
-            </a:pPr>
-            <a:r>
-              <a:rPr lang="en-US" sz="2400" b="1" dirty="0">
-                <a:solidFill>
-                  <a:srgbClr val="1E2761"/>
-                </a:solidFill>
-                <a:latin typeface="Georgia" pitchFamily="34" charset="0"/>
-                <a:ea typeface="Georgia" pitchFamily="34" charset="-122"/>
-                <a:cs typeface="Georgia" pitchFamily="34" charset="-120"/>
-              </a:rPr>
-              <a:t>1</a:t>
-            </a:r>
-            <a:endParaRPr lang="en-US" sz="2400" dirty="0"/>
-          </a:p>
-        </p:txBody>
-      </p:sp>
-      <p:sp>
-        <p:nvSpPr>
-          <p:cNvPr id="30" name="Text 28"/>
-          <p:cNvSpPr/>
-          <p:nvPr/>
-        </p:nvSpPr>
-        <p:spPr>
-          <a:xfrm>
-            <a:off x="1463040" y="4572000"/>
-            <a:ext cx="2423160" cy="411480"/>
-          </a:xfrm>
-          <a:prstGeom prst="rect">
-            <a:avLst/>
-          </a:prstGeom>
-          <a:noFill/>
-          <a:ln/>
-        </p:spPr>
-        <p:txBody>
-          <a:bodyPr wrap="square" lIns="0" tIns="0" rIns="0" bIns="0" rtlCol="0" anchor="ctr"/>
-          <a:lstStyle/>
-          <a:p>
-            <a:pPr indent="0" marL="0">
-              <a:buNone/>
-            </a:pPr>
-            <a:r>
-              <a:rPr lang="en-US" sz="1400" b="1" dirty="0">
-                <a:solidFill>
-                  <a:srgbClr val="1E293B"/>
-                </a:solidFill>
-                <a:latin typeface="Calibri" pitchFamily="34" charset="0"/>
-                <a:ea typeface="Calibri" pitchFamily="34" charset="-122"/>
-                <a:cs typeface="Calibri" pitchFamily="34" charset="-120"/>
-              </a:rPr>
-              <a:t>Structural completeness</a:t>
-            </a:r>
-            <a:endParaRPr lang="en-US" sz="1400" dirty="0"/>
-          </a:p>
-        </p:txBody>
-      </p:sp>
-      <p:sp>
-        <p:nvSpPr>
-          <p:cNvPr id="31" name="Text 29"/>
-          <p:cNvSpPr/>
-          <p:nvPr/>
-        </p:nvSpPr>
-        <p:spPr>
-          <a:xfrm>
-            <a:off x="685800" y="5257800"/>
-            <a:ext cx="3154680" cy="640080"/>
-          </a:xfrm>
-          <a:prstGeom prst="rect">
-            <a:avLst/>
-          </a:prstGeom>
-          <a:noFill/>
-          <a:ln/>
-        </p:spPr>
-        <p:txBody>
-          <a:bodyPr wrap="square" lIns="0" tIns="0" rIns="0" bIns="0" rtlCol="0" anchor="ctr"/>
-          <a:lstStyle/>
-          <a:p>
-            <a:pPr indent="0" marL="0">
-              <a:buNone/>
-            </a:pPr>
-            <a:r>
-              <a:rPr lang="en-US" sz="1200" dirty="0">
-                <a:solidFill>
-                  <a:srgbClr val="64748B"/>
-                </a:solidFill>
-                <a:latin typeface="Calibri" pitchFamily="34" charset="0"/>
-                <a:ea typeface="Calibri" pitchFamily="34" charset="-122"/>
-                <a:cs typeface="Calibri" pitchFamily="34" charset="-120"/>
-              </a:rPr>
-              <a:t>Every planned prompt has all six required fields.</a:t>
-            </a:r>
-            <a:endParaRPr lang="en-US" sz="1200" dirty="0"/>
-          </a:p>
-        </p:txBody>
-      </p:sp>
-      <p:sp>
-        <p:nvSpPr>
-          <p:cNvPr id="32" name="Shape 30"/>
-          <p:cNvSpPr/>
-          <p:nvPr/>
-        </p:nvSpPr>
-        <p:spPr>
-          <a:xfrm>
-            <a:off x="4251960" y="4251960"/>
-            <a:ext cx="3657600" cy="1691640"/>
-          </a:xfrm>
-          <a:prstGeom prst="rect">
-            <a:avLst/>
-          </a:prstGeom>
-          <a:solidFill>
-            <a:srgbClr val="FFFFFF"/>
-          </a:solidFill>
-          <a:ln w="12700">
-            <a:solidFill>
-              <a:srgbClr val="E2E8F0"/>
-            </a:solidFill>
-            <a:prstDash val="solid"/>
-          </a:ln>
-          <a:effectLst>
-            <a:outerShdw sx="100000" sy="100000" kx="0" ky="0" algn="bl" rotWithShape="0" blurRad="101600" dist="25400" dir="5400000">
-              <a:srgbClr val="000000">
-                <a:alpha val="6000"/>
-              </a:srgbClr>
-            </a:outerShdw>
-          </a:effectLst>
-        </p:spPr>
-      </p:sp>
-      <p:sp>
-        <p:nvSpPr>
-          <p:cNvPr id="33" name="Shape 31"/>
-          <p:cNvSpPr/>
-          <p:nvPr/>
-        </p:nvSpPr>
-        <p:spPr>
-          <a:xfrm>
-            <a:off x="4572000" y="4572000"/>
-            <a:ext cx="640080" cy="640080"/>
-          </a:xfrm>
-          <a:prstGeom prst="ellipse">
-            <a:avLst/>
-          </a:prstGeom>
-          <a:solidFill>
-            <a:srgbClr val="E6B22E"/>
-          </a:solidFill>
-          <a:ln/>
-        </p:spPr>
-      </p:sp>
-      <p:sp>
-        <p:nvSpPr>
-          <p:cNvPr id="34" name="Text 32"/>
-          <p:cNvSpPr/>
-          <p:nvPr/>
-        </p:nvSpPr>
-        <p:spPr>
-          <a:xfrm>
-            <a:off x="4572000" y="4572000"/>
-            <a:ext cx="640080" cy="640080"/>
-          </a:xfrm>
-          <a:prstGeom prst="rect">
-            <a:avLst/>
-          </a:prstGeom>
-          <a:noFill/>
-          <a:ln/>
-        </p:spPr>
-        <p:txBody>
-          <a:bodyPr wrap="square" lIns="0" tIns="0" rIns="0" bIns="0" rtlCol="0" anchor="ctr"/>
-          <a:lstStyle/>
-          <a:p>
-            <a:pPr algn="ctr" indent="0" marL="0">
-              <a:buNone/>
-            </a:pPr>
-            <a:r>
-              <a:rPr lang="en-US" sz="2400" b="1" dirty="0">
-                <a:solidFill>
-                  <a:srgbClr val="1E2761"/>
-                </a:solidFill>
-                <a:latin typeface="Georgia" pitchFamily="34" charset="0"/>
-                <a:ea typeface="Georgia" pitchFamily="34" charset="-122"/>
-                <a:cs typeface="Georgia" pitchFamily="34" charset="-120"/>
-              </a:rPr>
-              <a:t>2</a:t>
-            </a:r>
-            <a:endParaRPr lang="en-US" sz="2400" dirty="0"/>
-          </a:p>
-        </p:txBody>
-      </p:sp>
-      <p:sp>
-        <p:nvSpPr>
-          <p:cNvPr id="35" name="Text 33"/>
-          <p:cNvSpPr/>
-          <p:nvPr/>
-        </p:nvSpPr>
-        <p:spPr>
-          <a:xfrm>
-            <a:off x="5349240" y="4572000"/>
-            <a:ext cx="2423160" cy="411480"/>
-          </a:xfrm>
-          <a:prstGeom prst="rect">
-            <a:avLst/>
-          </a:prstGeom>
-          <a:noFill/>
-          <a:ln/>
-        </p:spPr>
-        <p:txBody>
-          <a:bodyPr wrap="square" lIns="0" tIns="0" rIns="0" bIns="0" rtlCol="0" anchor="ctr"/>
-          <a:lstStyle/>
-          <a:p>
-            <a:pPr indent="0" marL="0">
-              <a:buNone/>
-            </a:pPr>
-            <a:r>
-              <a:rPr lang="en-US" sz="1400" b="1" dirty="0">
-                <a:solidFill>
-                  <a:srgbClr val="1E293B"/>
-                </a:solidFill>
-                <a:latin typeface="Calibri" pitchFamily="34" charset="0"/>
-                <a:ea typeface="Calibri" pitchFamily="34" charset="-122"/>
-                <a:cs typeface="Calibri" pitchFamily="34" charset="-120"/>
-              </a:rPr>
-              <a:t>Library coverage saturation</a:t>
-            </a:r>
-            <a:endParaRPr lang="en-US" sz="1400" dirty="0"/>
-          </a:p>
-        </p:txBody>
-      </p:sp>
-      <p:sp>
-        <p:nvSpPr>
-          <p:cNvPr id="36" name="Text 34"/>
-          <p:cNvSpPr/>
-          <p:nvPr/>
-        </p:nvSpPr>
-        <p:spPr>
-          <a:xfrm>
-            <a:off x="4572000" y="5257800"/>
-            <a:ext cx="3154680" cy="640080"/>
-          </a:xfrm>
-          <a:prstGeom prst="rect">
-            <a:avLst/>
-          </a:prstGeom>
-          <a:noFill/>
-          <a:ln/>
-        </p:spPr>
-        <p:txBody>
-          <a:bodyPr wrap="square" lIns="0" tIns="0" rIns="0" bIns="0" rtlCol="0" anchor="ctr"/>
-          <a:lstStyle/>
-          <a:p>
-            <a:pPr indent="0" marL="0">
-              <a:buNone/>
-            </a:pPr>
-            <a:r>
-              <a:rPr lang="en-US" sz="1200" dirty="0">
-                <a:solidFill>
-                  <a:srgbClr val="64748B"/>
-                </a:solidFill>
-                <a:latin typeface="Calibri" pitchFamily="34" charset="0"/>
-                <a:ea typeface="Calibri" pitchFamily="34" charset="-122"/>
-                <a:cs typeface="Calibri" pitchFamily="34" charset="-120"/>
-              </a:rPr>
-              <a:t>Every applicable Lens covered or explicitly out of scope.</a:t>
-            </a:r>
-            <a:endParaRPr lang="en-US" sz="1200" dirty="0"/>
-          </a:p>
-        </p:txBody>
-      </p:sp>
-      <p:sp>
-        <p:nvSpPr>
-          <p:cNvPr id="37" name="Shape 35"/>
-          <p:cNvSpPr/>
-          <p:nvPr/>
-        </p:nvSpPr>
-        <p:spPr>
-          <a:xfrm>
-            <a:off x="8138160" y="4251960"/>
-            <a:ext cx="3657600" cy="1691640"/>
-          </a:xfrm>
-          <a:prstGeom prst="rect">
-            <a:avLst/>
-          </a:prstGeom>
-          <a:solidFill>
-            <a:srgbClr val="FFFFFF"/>
-          </a:solidFill>
-          <a:ln w="12700">
-            <a:solidFill>
-              <a:srgbClr val="E2E8F0"/>
-            </a:solidFill>
-            <a:prstDash val="solid"/>
-          </a:ln>
-          <a:effectLst>
-            <a:outerShdw sx="100000" sy="100000" kx="0" ky="0" algn="bl" rotWithShape="0" blurRad="101600" dist="25400" dir="5400000">
-              <a:srgbClr val="000000">
-                <a:alpha val="6000"/>
-              </a:srgbClr>
-            </a:outerShdw>
-          </a:effectLst>
-        </p:spPr>
-      </p:sp>
-      <p:sp>
-        <p:nvSpPr>
-          <p:cNvPr id="38" name="Shape 36"/>
-          <p:cNvSpPr/>
-          <p:nvPr/>
-        </p:nvSpPr>
-        <p:spPr>
-          <a:xfrm>
-            <a:off x="8458200" y="4572000"/>
-            <a:ext cx="640080" cy="640080"/>
-          </a:xfrm>
-          <a:prstGeom prst="ellipse">
-            <a:avLst/>
-          </a:prstGeom>
-          <a:solidFill>
-            <a:srgbClr val="E6B22E"/>
-          </a:solidFill>
-          <a:ln/>
-        </p:spPr>
-      </p:sp>
-      <p:sp>
-        <p:nvSpPr>
-          <p:cNvPr id="39" name="Text 37"/>
-          <p:cNvSpPr/>
-          <p:nvPr/>
-        </p:nvSpPr>
-        <p:spPr>
-          <a:xfrm>
-            <a:off x="8458200" y="4572000"/>
-            <a:ext cx="640080" cy="640080"/>
-          </a:xfrm>
-          <a:prstGeom prst="rect">
-            <a:avLst/>
-          </a:prstGeom>
-          <a:noFill/>
-          <a:ln/>
-        </p:spPr>
-        <p:txBody>
-          <a:bodyPr wrap="square" lIns="0" tIns="0" rIns="0" bIns="0" rtlCol="0" anchor="ctr"/>
-          <a:lstStyle/>
-          <a:p>
-            <a:pPr algn="ctr" indent="0" marL="0">
-              <a:buNone/>
-            </a:pPr>
-            <a:r>
-              <a:rPr lang="en-US" sz="2400" b="1" dirty="0">
-                <a:solidFill>
-                  <a:srgbClr val="1E2761"/>
-                </a:solidFill>
-                <a:latin typeface="Georgia" pitchFamily="34" charset="0"/>
-                <a:ea typeface="Georgia" pitchFamily="34" charset="-122"/>
-                <a:cs typeface="Georgia" pitchFamily="34" charset="-120"/>
-              </a:rPr>
-              <a:t>3</a:t>
-            </a:r>
-            <a:endParaRPr lang="en-US" sz="2400" dirty="0"/>
-          </a:p>
-        </p:txBody>
-      </p:sp>
-      <p:sp>
-        <p:nvSpPr>
-          <p:cNvPr id="40" name="Text 38"/>
-          <p:cNvSpPr/>
-          <p:nvPr/>
-        </p:nvSpPr>
-        <p:spPr>
-          <a:xfrm>
-            <a:off x="9235440" y="4572000"/>
-            <a:ext cx="2423160" cy="411480"/>
-          </a:xfrm>
-          <a:prstGeom prst="rect">
-            <a:avLst/>
-          </a:prstGeom>
-          <a:noFill/>
-          <a:ln/>
-        </p:spPr>
-        <p:txBody>
-          <a:bodyPr wrap="square" lIns="0" tIns="0" rIns="0" bIns="0" rtlCol="0" anchor="ctr"/>
-          <a:lstStyle/>
-          <a:p>
-            <a:pPr indent="0" marL="0">
-              <a:buNone/>
-            </a:pPr>
-            <a:r>
-              <a:rPr lang="en-US" sz="1400" b="1" dirty="0">
-                <a:solidFill>
-                  <a:srgbClr val="1E293B"/>
-                </a:solidFill>
-                <a:latin typeface="Calibri" pitchFamily="34" charset="0"/>
-                <a:ea typeface="Calibri" pitchFamily="34" charset="-122"/>
-                <a:cs typeface="Calibri" pitchFamily="34" charset="-120"/>
-              </a:rPr>
-              <a:t>Operator ratification</a:t>
-            </a:r>
-            <a:endParaRPr lang="en-US" sz="1400" dirty="0"/>
-          </a:p>
-        </p:txBody>
-      </p:sp>
-      <p:sp>
-        <p:nvSpPr>
-          <p:cNvPr id="41" name="Text 39"/>
-          <p:cNvSpPr/>
-          <p:nvPr/>
-        </p:nvSpPr>
-        <p:spPr>
-          <a:xfrm>
-            <a:off x="8458200" y="5257800"/>
-            <a:ext cx="3154680" cy="640080"/>
-          </a:xfrm>
-          <a:prstGeom prst="rect">
-            <a:avLst/>
-          </a:prstGeom>
-          <a:noFill/>
-          <a:ln/>
-        </p:spPr>
-        <p:txBody>
-          <a:bodyPr wrap="square" lIns="0" tIns="0" rIns="0" bIns="0" rtlCol="0" anchor="ctr"/>
-          <a:lstStyle/>
-          <a:p>
-            <a:pPr indent="0" marL="0">
-              <a:buNone/>
-            </a:pPr>
-            <a:r>
-              <a:rPr lang="en-US" sz="1200" dirty="0">
-                <a:solidFill>
-                  <a:srgbClr val="64748B"/>
-                </a:solidFill>
-                <a:latin typeface="Calibri" pitchFamily="34" charset="0"/>
-                <a:ea typeface="Calibri" pitchFamily="34" charset="-122"/>
-                <a:cs typeface="Calibri" pitchFamily="34" charset="-120"/>
-              </a:rPr>
-              <a:t>Free-form approval. Silence is never consent (SP-9).</a:t>
-            </a:r>
-            <a:endParaRPr lang="en-US" sz="1200" dirty="0"/>
-          </a:p>
-        </p:txBody>
-      </p:sp>
-      <p:sp>
-        <p:nvSpPr>
-          <p:cNvPr id="42" name="Text 40"/>
-          <p:cNvSpPr/>
-          <p:nvPr/>
-        </p:nvSpPr>
-        <p:spPr>
-          <a:xfrm>
-            <a:off x="731520" y="6492240"/>
-            <a:ext cx="7315200" cy="274320"/>
-          </a:xfrm>
-          <a:prstGeom prst="rect">
-            <a:avLst/>
-          </a:prstGeom>
-          <a:noFill/>
-          <a:ln/>
-        </p:spPr>
-        <p:txBody>
-          <a:bodyPr wrap="square" lIns="0" tIns="0" rIns="0" bIns="0" rtlCol="0" anchor="ctr"/>
-          <a:lstStyle/>
-          <a:p>
-            <a:pPr indent="0" marL="0">
-              <a:buNone/>
-            </a:pPr>
-            <a:r>
-              <a:rPr lang="en-US" sz="1000" dirty="0">
-                <a:solidFill>
-                  <a:srgbClr val="64748B"/>
-                </a:solidFill>
-                <a:latin typeface="Calibri" pitchFamily="34" charset="0"/>
-                <a:ea typeface="Calibri" pitchFamily="34" charset="-122"/>
-                <a:cs typeface="Calibri" pitchFamily="34" charset="-120"/>
-              </a:rPr>
-              <a:t>PRISM v2.0  ·  Ron Kuper + Claude  ·  2026</a:t>
-            </a:r>
-            <a:endParaRPr lang="en-US" sz="1000" dirty="0"/>
-          </a:p>
-        </p:txBody>
-      </p:sp>
-      <p:sp>
-        <p:nvSpPr>
-          <p:cNvPr id="43" name="Text 41"/>
-          <p:cNvSpPr/>
-          <p:nvPr/>
-        </p:nvSpPr>
-        <p:spPr>
-          <a:xfrm>
-            <a:off x="10972800" y="6492240"/>
-            <a:ext cx="914400" cy="274320"/>
-          </a:xfrm>
-          <a:prstGeom prst="rect">
-            <a:avLst/>
-          </a:prstGeom>
-          <a:noFill/>
-          <a:ln/>
-        </p:spPr>
-        <p:txBody>
-          <a:bodyPr wrap="square" lIns="0" tIns="0" rIns="0" bIns="0" rtlCol="0" anchor="ctr"/>
-          <a:lstStyle/>
-          <a:p>
-            <a:pPr algn="r" indent="0" marL="0">
-              <a:buNone/>
-            </a:pPr>
-            <a:r>
-              <a:rPr lang="en-US" sz="1000" dirty="0">
-                <a:solidFill>
-                  <a:srgbClr val="64748B"/>
-                </a:solidFill>
-                <a:latin typeface="Calibri" pitchFamily="34" charset="0"/>
-                <a:ea typeface="Calibri" pitchFamily="34" charset="-122"/>
-                <a:cs typeface="Calibri" pitchFamily="34" charset="-120"/>
-              </a:rPr>
-              <a:t>8 / 12</a:t>
+              <a:t>8 / 13</a:t>
             </a:r>
             <a:endParaRPr lang="en-US" sz="1000" dirty="0"/>
           </a:p>
@@ -10309,7 +10004,7 @@
                 <a:ea typeface="Calibri" pitchFamily="34" charset="-122"/>
                 <a:cs typeface="Calibri" pitchFamily="34" charset="-120"/>
               </a:rPr>
-              <a:t>MASTER  +  WHAT’S NEXT</a:t>
+              <a:t>SETUP AS ITERATIVE REFINEMENT</a:t>
             </a:r>
             <a:endParaRPr lang="en-US" sz="1200" dirty="0"/>
           </a:p>
@@ -10348,7 +10043,7 @@
                 <a:ea typeface="Georgia" pitchFamily="34" charset="-122"/>
                 <a:cs typeface="Georgia" pitchFamily="34" charset="-120"/>
               </a:rPr>
-              <a:t>Continuous state. One question to resume.</a:t>
+              <a:t>P0.1 → P0.2 → … until coverage saturates.</a:t>
             </a:r>
             <a:endParaRPr lang="en-US" sz="2600" dirty="0"/>
           </a:p>
@@ -10362,8 +10057,8 @@
         </p:nvSpPr>
         <p:spPr>
           <a:xfrm>
-            <a:off x="731520" y="1600200"/>
-            <a:ext cx="10698480" cy="777240"/>
+            <a:off x="731520" y="1554480"/>
+            <a:ext cx="10698480" cy="640080"/>
           </a:xfrm>
           <a:prstGeom prst="rect">
             <a:avLst/>
@@ -10387,7 +10082,7 @@
                 <a:ea typeface="Calibri" pitchFamily="34" charset="-122"/>
                 <a:cs typeface="Calibri" pitchFamily="34" charset="-120"/>
               </a:rPr>
-              <a:t>Master: a single living markdown file holding every artifact — Decision brief, Stakeholder register, Claim inventory, Jurisdiction map, Prompt Strategy, Findings, Rerun Register, Learnings, Changelog.</a:t>
+              <a:t>Probe 1 grades the draft strategy against the Library each iteration. Probes 6 &amp; 7 iterate early. Probes 2 &amp; 4 iterate per turn. Probes 3 &amp; 5 run once.</a:t>
             </a:r>
             <a:endParaRPr lang="en-US" sz="1350" dirty="0"/>
           </a:p>
@@ -10401,8 +10096,8 @@
         </p:nvSpPr>
         <p:spPr>
           <a:xfrm>
-            <a:off x="1463040" y="2834640"/>
-            <a:ext cx="9235440" cy="2194560"/>
+            <a:off x="521208" y="2468880"/>
+            <a:ext cx="1463040" cy="868680"/>
           </a:xfrm>
           <a:prstGeom prst="rect">
             <a:avLst/>
@@ -10411,6 +10106,736 @@
             <a:srgbClr val="1E2761"/>
           </a:solidFill>
           <a:ln/>
+        </p:spPr>
+      </p:sp>
+      <p:sp>
+        <p:nvSpPr>
+          <p:cNvPr id="6" name="Text 4"/>
+          <p:cNvSpPr/>
+          <p:nvPr/>
+        </p:nvSpPr>
+        <p:spPr>
+          <a:xfrm>
+            <a:off x="521208" y="2514600"/>
+            <a:ext cx="1463040" cy="365760"/>
+          </a:xfrm>
+          <a:prstGeom prst="rect">
+            <a:avLst/>
+          </a:prstGeom>
+          <a:noFill/>
+          <a:ln/>
+        </p:spPr>
+        <p:txBody>
+          <a:bodyPr wrap="square" lIns="0" tIns="0" rIns="0" bIns="0" rtlCol="0" anchor="ctr"/>
+          <a:lstStyle/>
+          <a:p>
+            <a:pPr algn="ctr" indent="0" marL="0">
+              <a:buNone/>
+            </a:pPr>
+            <a:r>
+              <a:rPr lang="en-US" sz="1800" b="1" dirty="0">
+                <a:solidFill>
+                  <a:srgbClr val="E6B22E"/>
+                </a:solidFill>
+                <a:latin typeface="Georgia" pitchFamily="34" charset="0"/>
+                <a:ea typeface="Georgia" pitchFamily="34" charset="-122"/>
+                <a:cs typeface="Georgia" pitchFamily="34" charset="-120"/>
+              </a:rPr>
+              <a:t>P1</a:t>
+            </a:r>
+            <a:endParaRPr lang="en-US" sz="1800" dirty="0"/>
+          </a:p>
+        </p:txBody>
+      </p:sp>
+      <p:sp>
+        <p:nvSpPr>
+          <p:cNvPr id="7" name="Text 5"/>
+          <p:cNvSpPr/>
+          <p:nvPr/>
+        </p:nvSpPr>
+        <p:spPr>
+          <a:xfrm>
+            <a:off x="566928" y="2926080"/>
+            <a:ext cx="1371600" cy="365760"/>
+          </a:xfrm>
+          <a:prstGeom prst="rect">
+            <a:avLst/>
+          </a:prstGeom>
+          <a:noFill/>
+          <a:ln/>
+        </p:spPr>
+        <p:txBody>
+          <a:bodyPr wrap="square" lIns="0" tIns="0" rIns="0" bIns="0" rtlCol="0" anchor="ctr"/>
+          <a:lstStyle/>
+          <a:p>
+            <a:pPr algn="ctr" indent="0" marL="0">
+              <a:buNone/>
+            </a:pPr>
+            <a:r>
+              <a:rPr lang="en-US" sz="1050" dirty="0">
+                <a:solidFill>
+                  <a:srgbClr val="FFFFFF"/>
+                </a:solidFill>
+                <a:latin typeface="Calibri" pitchFamily="34" charset="0"/>
+                <a:ea typeface="Calibri" pitchFamily="34" charset="-122"/>
+                <a:cs typeface="Calibri" pitchFamily="34" charset="-120"/>
+              </a:rPr>
+              <a:t>Coverage grading</a:t>
+            </a:r>
+            <a:endParaRPr lang="en-US" sz="1050" dirty="0"/>
+          </a:p>
+        </p:txBody>
+      </p:sp>
+      <p:sp>
+        <p:nvSpPr>
+          <p:cNvPr id="8" name="Shape 6"/>
+          <p:cNvSpPr/>
+          <p:nvPr/>
+        </p:nvSpPr>
+        <p:spPr>
+          <a:xfrm>
+            <a:off x="2130552" y="2468880"/>
+            <a:ext cx="1463040" cy="868680"/>
+          </a:xfrm>
+          <a:prstGeom prst="rect">
+            <a:avLst/>
+          </a:prstGeom>
+          <a:solidFill>
+            <a:srgbClr val="1E2761"/>
+          </a:solidFill>
+          <a:ln/>
+        </p:spPr>
+      </p:sp>
+      <p:sp>
+        <p:nvSpPr>
+          <p:cNvPr id="9" name="Text 7"/>
+          <p:cNvSpPr/>
+          <p:nvPr/>
+        </p:nvSpPr>
+        <p:spPr>
+          <a:xfrm>
+            <a:off x="2130552" y="2514600"/>
+            <a:ext cx="1463040" cy="365760"/>
+          </a:xfrm>
+          <a:prstGeom prst="rect">
+            <a:avLst/>
+          </a:prstGeom>
+          <a:noFill/>
+          <a:ln/>
+        </p:spPr>
+        <p:txBody>
+          <a:bodyPr wrap="square" lIns="0" tIns="0" rIns="0" bIns="0" rtlCol="0" anchor="ctr"/>
+          <a:lstStyle/>
+          <a:p>
+            <a:pPr algn="ctr" indent="0" marL="0">
+              <a:buNone/>
+            </a:pPr>
+            <a:r>
+              <a:rPr lang="en-US" sz="1800" b="1" dirty="0">
+                <a:solidFill>
+                  <a:srgbClr val="E6B22E"/>
+                </a:solidFill>
+                <a:latin typeface="Georgia" pitchFamily="34" charset="0"/>
+                <a:ea typeface="Georgia" pitchFamily="34" charset="-122"/>
+                <a:cs typeface="Georgia" pitchFamily="34" charset="-120"/>
+              </a:rPr>
+              <a:t>P2</a:t>
+            </a:r>
+            <a:endParaRPr lang="en-US" sz="1800" dirty="0"/>
+          </a:p>
+        </p:txBody>
+      </p:sp>
+      <p:sp>
+        <p:nvSpPr>
+          <p:cNvPr id="10" name="Text 8"/>
+          <p:cNvSpPr/>
+          <p:nvPr/>
+        </p:nvSpPr>
+        <p:spPr>
+          <a:xfrm>
+            <a:off x="2176272" y="2926080"/>
+            <a:ext cx="1371600" cy="365760"/>
+          </a:xfrm>
+          <a:prstGeom prst="rect">
+            <a:avLst/>
+          </a:prstGeom>
+          <a:noFill/>
+          <a:ln/>
+        </p:spPr>
+        <p:txBody>
+          <a:bodyPr wrap="square" lIns="0" tIns="0" rIns="0" bIns="0" rtlCol="0" anchor="ctr"/>
+          <a:lstStyle/>
+          <a:p>
+            <a:pPr algn="ctr" indent="0" marL="0">
+              <a:buNone/>
+            </a:pPr>
+            <a:r>
+              <a:rPr lang="en-US" sz="1050" dirty="0">
+                <a:solidFill>
+                  <a:srgbClr val="FFFFFF"/>
+                </a:solidFill>
+                <a:latin typeface="Calibri" pitchFamily="34" charset="0"/>
+                <a:ea typeface="Calibri" pitchFamily="34" charset="-122"/>
+                <a:cs typeface="Calibri" pitchFamily="34" charset="-120"/>
+              </a:rPr>
+              <a:t>Adversarial Scope</a:t>
+            </a:r>
+            <a:endParaRPr lang="en-US" sz="1050" dirty="0"/>
+          </a:p>
+        </p:txBody>
+      </p:sp>
+      <p:sp>
+        <p:nvSpPr>
+          <p:cNvPr id="11" name="Shape 9"/>
+          <p:cNvSpPr/>
+          <p:nvPr/>
+        </p:nvSpPr>
+        <p:spPr>
+          <a:xfrm>
+            <a:off x="3739896" y="2468880"/>
+            <a:ext cx="1463040" cy="868680"/>
+          </a:xfrm>
+          <a:prstGeom prst="rect">
+            <a:avLst/>
+          </a:prstGeom>
+          <a:solidFill>
+            <a:srgbClr val="1E2761"/>
+          </a:solidFill>
+          <a:ln/>
+        </p:spPr>
+      </p:sp>
+      <p:sp>
+        <p:nvSpPr>
+          <p:cNvPr id="12" name="Text 10"/>
+          <p:cNvSpPr/>
+          <p:nvPr/>
+        </p:nvSpPr>
+        <p:spPr>
+          <a:xfrm>
+            <a:off x="3739896" y="2514600"/>
+            <a:ext cx="1463040" cy="365760"/>
+          </a:xfrm>
+          <a:prstGeom prst="rect">
+            <a:avLst/>
+          </a:prstGeom>
+          <a:noFill/>
+          <a:ln/>
+        </p:spPr>
+        <p:txBody>
+          <a:bodyPr wrap="square" lIns="0" tIns="0" rIns="0" bIns="0" rtlCol="0" anchor="ctr"/>
+          <a:lstStyle/>
+          <a:p>
+            <a:pPr algn="ctr" indent="0" marL="0">
+              <a:buNone/>
+            </a:pPr>
+            <a:r>
+              <a:rPr lang="en-US" sz="1800" b="1" dirty="0">
+                <a:solidFill>
+                  <a:srgbClr val="E6B22E"/>
+                </a:solidFill>
+                <a:latin typeface="Georgia" pitchFamily="34" charset="0"/>
+                <a:ea typeface="Georgia" pitchFamily="34" charset="-122"/>
+                <a:cs typeface="Georgia" pitchFamily="34" charset="-120"/>
+              </a:rPr>
+              <a:t>P3</a:t>
+            </a:r>
+            <a:endParaRPr lang="en-US" sz="1800" dirty="0"/>
+          </a:p>
+        </p:txBody>
+      </p:sp>
+      <p:sp>
+        <p:nvSpPr>
+          <p:cNvPr id="13" name="Text 11"/>
+          <p:cNvSpPr/>
+          <p:nvPr/>
+        </p:nvSpPr>
+        <p:spPr>
+          <a:xfrm>
+            <a:off x="3785616" y="2926080"/>
+            <a:ext cx="1371600" cy="365760"/>
+          </a:xfrm>
+          <a:prstGeom prst="rect">
+            <a:avLst/>
+          </a:prstGeom>
+          <a:noFill/>
+          <a:ln/>
+        </p:spPr>
+        <p:txBody>
+          <a:bodyPr wrap="square" lIns="0" tIns="0" rIns="0" bIns="0" rtlCol="0" anchor="ctr"/>
+          <a:lstStyle/>
+          <a:p>
+            <a:pPr algn="ctr" indent="0" marL="0">
+              <a:buNone/>
+            </a:pPr>
+            <a:r>
+              <a:rPr lang="en-US" sz="1050" dirty="0">
+                <a:solidFill>
+                  <a:srgbClr val="FFFFFF"/>
+                </a:solidFill>
+                <a:latin typeface="Calibri" pitchFamily="34" charset="0"/>
+                <a:ea typeface="Calibri" pitchFamily="34" charset="-122"/>
+                <a:cs typeface="Calibri" pitchFamily="34" charset="-120"/>
+              </a:rPr>
+              <a:t>Decision Framing</a:t>
+            </a:r>
+            <a:endParaRPr lang="en-US" sz="1050" dirty="0"/>
+          </a:p>
+        </p:txBody>
+      </p:sp>
+      <p:sp>
+        <p:nvSpPr>
+          <p:cNvPr id="14" name="Shape 12"/>
+          <p:cNvSpPr/>
+          <p:nvPr/>
+        </p:nvSpPr>
+        <p:spPr>
+          <a:xfrm>
+            <a:off x="5349240" y="2468880"/>
+            <a:ext cx="1463040" cy="868680"/>
+          </a:xfrm>
+          <a:prstGeom prst="rect">
+            <a:avLst/>
+          </a:prstGeom>
+          <a:solidFill>
+            <a:srgbClr val="1E2761"/>
+          </a:solidFill>
+          <a:ln/>
+        </p:spPr>
+      </p:sp>
+      <p:sp>
+        <p:nvSpPr>
+          <p:cNvPr id="15" name="Text 13"/>
+          <p:cNvSpPr/>
+          <p:nvPr/>
+        </p:nvSpPr>
+        <p:spPr>
+          <a:xfrm>
+            <a:off x="5349240" y="2514600"/>
+            <a:ext cx="1463040" cy="365760"/>
+          </a:xfrm>
+          <a:prstGeom prst="rect">
+            <a:avLst/>
+          </a:prstGeom>
+          <a:noFill/>
+          <a:ln/>
+        </p:spPr>
+        <p:txBody>
+          <a:bodyPr wrap="square" lIns="0" tIns="0" rIns="0" bIns="0" rtlCol="0" anchor="ctr"/>
+          <a:lstStyle/>
+          <a:p>
+            <a:pPr algn="ctr" indent="0" marL="0">
+              <a:buNone/>
+            </a:pPr>
+            <a:r>
+              <a:rPr lang="en-US" sz="1800" b="1" dirty="0">
+                <a:solidFill>
+                  <a:srgbClr val="E6B22E"/>
+                </a:solidFill>
+                <a:latin typeface="Georgia" pitchFamily="34" charset="0"/>
+                <a:ea typeface="Georgia" pitchFamily="34" charset="-122"/>
+                <a:cs typeface="Georgia" pitchFamily="34" charset="-120"/>
+              </a:rPr>
+              <a:t>P4</a:t>
+            </a:r>
+            <a:endParaRPr lang="en-US" sz="1800" dirty="0"/>
+          </a:p>
+        </p:txBody>
+      </p:sp>
+      <p:sp>
+        <p:nvSpPr>
+          <p:cNvPr id="16" name="Text 14"/>
+          <p:cNvSpPr/>
+          <p:nvPr/>
+        </p:nvSpPr>
+        <p:spPr>
+          <a:xfrm>
+            <a:off x="5394960" y="2926080"/>
+            <a:ext cx="1371600" cy="365760"/>
+          </a:xfrm>
+          <a:prstGeom prst="rect">
+            <a:avLst/>
+          </a:prstGeom>
+          <a:noFill/>
+          <a:ln/>
+        </p:spPr>
+        <p:txBody>
+          <a:bodyPr wrap="square" lIns="0" tIns="0" rIns="0" bIns="0" rtlCol="0" anchor="ctr"/>
+          <a:lstStyle/>
+          <a:p>
+            <a:pPr algn="ctr" indent="0" marL="0">
+              <a:buNone/>
+            </a:pPr>
+            <a:r>
+              <a:rPr lang="en-US" sz="1050" dirty="0">
+                <a:solidFill>
+                  <a:srgbClr val="FFFFFF"/>
+                </a:solidFill>
+                <a:latin typeface="Calibri" pitchFamily="34" charset="0"/>
+                <a:ea typeface="Calibri" pitchFamily="34" charset="-122"/>
+                <a:cs typeface="Calibri" pitchFamily="34" charset="-120"/>
+              </a:rPr>
+              <a:t>Pre-mortem</a:t>
+            </a:r>
+            <a:endParaRPr lang="en-US" sz="1050" dirty="0"/>
+          </a:p>
+        </p:txBody>
+      </p:sp>
+      <p:sp>
+        <p:nvSpPr>
+          <p:cNvPr id="17" name="Shape 15"/>
+          <p:cNvSpPr/>
+          <p:nvPr/>
+        </p:nvSpPr>
+        <p:spPr>
+          <a:xfrm>
+            <a:off x="6958584" y="2468880"/>
+            <a:ext cx="1463040" cy="868680"/>
+          </a:xfrm>
+          <a:prstGeom prst="rect">
+            <a:avLst/>
+          </a:prstGeom>
+          <a:solidFill>
+            <a:srgbClr val="1E2761"/>
+          </a:solidFill>
+          <a:ln/>
+        </p:spPr>
+      </p:sp>
+      <p:sp>
+        <p:nvSpPr>
+          <p:cNvPr id="18" name="Text 16"/>
+          <p:cNvSpPr/>
+          <p:nvPr/>
+        </p:nvSpPr>
+        <p:spPr>
+          <a:xfrm>
+            <a:off x="6958584" y="2514600"/>
+            <a:ext cx="1463040" cy="365760"/>
+          </a:xfrm>
+          <a:prstGeom prst="rect">
+            <a:avLst/>
+          </a:prstGeom>
+          <a:noFill/>
+          <a:ln/>
+        </p:spPr>
+        <p:txBody>
+          <a:bodyPr wrap="square" lIns="0" tIns="0" rIns="0" bIns="0" rtlCol="0" anchor="ctr"/>
+          <a:lstStyle/>
+          <a:p>
+            <a:pPr algn="ctr" indent="0" marL="0">
+              <a:buNone/>
+            </a:pPr>
+            <a:r>
+              <a:rPr lang="en-US" sz="1800" b="1" dirty="0">
+                <a:solidFill>
+                  <a:srgbClr val="E6B22E"/>
+                </a:solidFill>
+                <a:latin typeface="Georgia" pitchFamily="34" charset="0"/>
+                <a:ea typeface="Georgia" pitchFamily="34" charset="-122"/>
+                <a:cs typeface="Georgia" pitchFamily="34" charset="-120"/>
+              </a:rPr>
+              <a:t>P5</a:t>
+            </a:r>
+            <a:endParaRPr lang="en-US" sz="1800" dirty="0"/>
+          </a:p>
+        </p:txBody>
+      </p:sp>
+      <p:sp>
+        <p:nvSpPr>
+          <p:cNvPr id="19" name="Text 17"/>
+          <p:cNvSpPr/>
+          <p:nvPr/>
+        </p:nvSpPr>
+        <p:spPr>
+          <a:xfrm>
+            <a:off x="7004304" y="2926080"/>
+            <a:ext cx="1371600" cy="365760"/>
+          </a:xfrm>
+          <a:prstGeom prst="rect">
+            <a:avLst/>
+          </a:prstGeom>
+          <a:noFill/>
+          <a:ln/>
+        </p:spPr>
+        <p:txBody>
+          <a:bodyPr wrap="square" lIns="0" tIns="0" rIns="0" bIns="0" rtlCol="0" anchor="ctr"/>
+          <a:lstStyle/>
+          <a:p>
+            <a:pPr algn="ctr" indent="0" marL="0">
+              <a:buNone/>
+            </a:pPr>
+            <a:r>
+              <a:rPr lang="en-US" sz="1050" dirty="0">
+                <a:solidFill>
+                  <a:srgbClr val="FFFFFF"/>
+                </a:solidFill>
+                <a:latin typeface="Calibri" pitchFamily="34" charset="0"/>
+                <a:ea typeface="Calibri" pitchFamily="34" charset="-122"/>
+                <a:cs typeface="Calibri" pitchFamily="34" charset="-120"/>
+              </a:rPr>
+              <a:t>Falsifier</a:t>
+            </a:r>
+            <a:endParaRPr lang="en-US" sz="1050" dirty="0"/>
+          </a:p>
+        </p:txBody>
+      </p:sp>
+      <p:sp>
+        <p:nvSpPr>
+          <p:cNvPr id="20" name="Shape 18"/>
+          <p:cNvSpPr/>
+          <p:nvPr/>
+        </p:nvSpPr>
+        <p:spPr>
+          <a:xfrm>
+            <a:off x="8567928" y="2468880"/>
+            <a:ext cx="1463040" cy="868680"/>
+          </a:xfrm>
+          <a:prstGeom prst="rect">
+            <a:avLst/>
+          </a:prstGeom>
+          <a:solidFill>
+            <a:srgbClr val="1E2761"/>
+          </a:solidFill>
+          <a:ln/>
+        </p:spPr>
+      </p:sp>
+      <p:sp>
+        <p:nvSpPr>
+          <p:cNvPr id="21" name="Text 19"/>
+          <p:cNvSpPr/>
+          <p:nvPr/>
+        </p:nvSpPr>
+        <p:spPr>
+          <a:xfrm>
+            <a:off x="8567928" y="2514600"/>
+            <a:ext cx="1463040" cy="365760"/>
+          </a:xfrm>
+          <a:prstGeom prst="rect">
+            <a:avLst/>
+          </a:prstGeom>
+          <a:noFill/>
+          <a:ln/>
+        </p:spPr>
+        <p:txBody>
+          <a:bodyPr wrap="square" lIns="0" tIns="0" rIns="0" bIns="0" rtlCol="0" anchor="ctr"/>
+          <a:lstStyle/>
+          <a:p>
+            <a:pPr algn="ctr" indent="0" marL="0">
+              <a:buNone/>
+            </a:pPr>
+            <a:r>
+              <a:rPr lang="en-US" sz="1800" b="1" dirty="0">
+                <a:solidFill>
+                  <a:srgbClr val="E6B22E"/>
+                </a:solidFill>
+                <a:latin typeface="Georgia" pitchFamily="34" charset="0"/>
+                <a:ea typeface="Georgia" pitchFamily="34" charset="-122"/>
+                <a:cs typeface="Georgia" pitchFamily="34" charset="-120"/>
+              </a:rPr>
+              <a:t>P6</a:t>
+            </a:r>
+            <a:endParaRPr lang="en-US" sz="1800" dirty="0"/>
+          </a:p>
+        </p:txBody>
+      </p:sp>
+      <p:sp>
+        <p:nvSpPr>
+          <p:cNvPr id="22" name="Text 20"/>
+          <p:cNvSpPr/>
+          <p:nvPr/>
+        </p:nvSpPr>
+        <p:spPr>
+          <a:xfrm>
+            <a:off x="8613648" y="2926080"/>
+            <a:ext cx="1371600" cy="365760"/>
+          </a:xfrm>
+          <a:prstGeom prst="rect">
+            <a:avLst/>
+          </a:prstGeom>
+          <a:noFill/>
+          <a:ln/>
+        </p:spPr>
+        <p:txBody>
+          <a:bodyPr wrap="square" lIns="0" tIns="0" rIns="0" bIns="0" rtlCol="0" anchor="ctr"/>
+          <a:lstStyle/>
+          <a:p>
+            <a:pPr algn="ctr" indent="0" marL="0">
+              <a:buNone/>
+            </a:pPr>
+            <a:r>
+              <a:rPr lang="en-US" sz="1050" dirty="0">
+                <a:solidFill>
+                  <a:srgbClr val="FFFFFF"/>
+                </a:solidFill>
+                <a:latin typeface="Calibri" pitchFamily="34" charset="0"/>
+                <a:ea typeface="Calibri" pitchFamily="34" charset="-122"/>
+                <a:cs typeface="Calibri" pitchFamily="34" charset="-120"/>
+              </a:rPr>
+              <a:t>Domain Recon</a:t>
+            </a:r>
+            <a:endParaRPr lang="en-US" sz="1050" dirty="0"/>
+          </a:p>
+        </p:txBody>
+      </p:sp>
+      <p:sp>
+        <p:nvSpPr>
+          <p:cNvPr id="23" name="Shape 21"/>
+          <p:cNvSpPr/>
+          <p:nvPr/>
+        </p:nvSpPr>
+        <p:spPr>
+          <a:xfrm>
+            <a:off x="10177272" y="2468880"/>
+            <a:ext cx="1463040" cy="868680"/>
+          </a:xfrm>
+          <a:prstGeom prst="rect">
+            <a:avLst/>
+          </a:prstGeom>
+          <a:solidFill>
+            <a:srgbClr val="1E2761"/>
+          </a:solidFill>
+          <a:ln/>
+        </p:spPr>
+      </p:sp>
+      <p:sp>
+        <p:nvSpPr>
+          <p:cNvPr id="24" name="Text 22"/>
+          <p:cNvSpPr/>
+          <p:nvPr/>
+        </p:nvSpPr>
+        <p:spPr>
+          <a:xfrm>
+            <a:off x="10177272" y="2514600"/>
+            <a:ext cx="1463040" cy="365760"/>
+          </a:xfrm>
+          <a:prstGeom prst="rect">
+            <a:avLst/>
+          </a:prstGeom>
+          <a:noFill/>
+          <a:ln/>
+        </p:spPr>
+        <p:txBody>
+          <a:bodyPr wrap="square" lIns="0" tIns="0" rIns="0" bIns="0" rtlCol="0" anchor="ctr"/>
+          <a:lstStyle/>
+          <a:p>
+            <a:pPr algn="ctr" indent="0" marL="0">
+              <a:buNone/>
+            </a:pPr>
+            <a:r>
+              <a:rPr lang="en-US" sz="1800" b="1" dirty="0">
+                <a:solidFill>
+                  <a:srgbClr val="E6B22E"/>
+                </a:solidFill>
+                <a:latin typeface="Georgia" pitchFamily="34" charset="0"/>
+                <a:ea typeface="Georgia" pitchFamily="34" charset="-122"/>
+                <a:cs typeface="Georgia" pitchFamily="34" charset="-120"/>
+              </a:rPr>
+              <a:t>P7</a:t>
+            </a:r>
+            <a:endParaRPr lang="en-US" sz="1800" dirty="0"/>
+          </a:p>
+        </p:txBody>
+      </p:sp>
+      <p:sp>
+        <p:nvSpPr>
+          <p:cNvPr id="25" name="Text 23"/>
+          <p:cNvSpPr/>
+          <p:nvPr/>
+        </p:nvSpPr>
+        <p:spPr>
+          <a:xfrm>
+            <a:off x="10222992" y="2926080"/>
+            <a:ext cx="1371600" cy="365760"/>
+          </a:xfrm>
+          <a:prstGeom prst="rect">
+            <a:avLst/>
+          </a:prstGeom>
+          <a:noFill/>
+          <a:ln/>
+        </p:spPr>
+        <p:txBody>
+          <a:bodyPr wrap="square" lIns="0" tIns="0" rIns="0" bIns="0" rtlCol="0" anchor="ctr"/>
+          <a:lstStyle/>
+          <a:p>
+            <a:pPr algn="ctr" indent="0" marL="0">
+              <a:buNone/>
+            </a:pPr>
+            <a:r>
+              <a:rPr lang="en-US" sz="1050" dirty="0">
+                <a:solidFill>
+                  <a:srgbClr val="FFFFFF"/>
+                </a:solidFill>
+                <a:latin typeface="Calibri" pitchFamily="34" charset="0"/>
+                <a:ea typeface="Calibri" pitchFamily="34" charset="-122"/>
+                <a:cs typeface="Calibri" pitchFamily="34" charset="-120"/>
+              </a:rPr>
+              <a:t>User Voice</a:t>
+            </a:r>
+            <a:endParaRPr lang="en-US" sz="1050" dirty="0"/>
+          </a:p>
+        </p:txBody>
+      </p:sp>
+      <p:sp>
+        <p:nvSpPr>
+          <p:cNvPr id="26" name="Text 24"/>
+          <p:cNvSpPr/>
+          <p:nvPr/>
+        </p:nvSpPr>
+        <p:spPr>
+          <a:xfrm>
+            <a:off x="731520" y="3794760"/>
+            <a:ext cx="10698480" cy="365760"/>
+          </a:xfrm>
+          <a:prstGeom prst="rect">
+            <a:avLst/>
+          </a:prstGeom>
+          <a:noFill/>
+          <a:ln/>
+        </p:spPr>
+        <p:txBody>
+          <a:bodyPr wrap="square" lIns="0" tIns="0" rIns="0" bIns="0" rtlCol="0" anchor="ctr"/>
+          <a:lstStyle/>
+          <a:p>
+            <a:pPr indent="0" marL="0">
+              <a:buNone/>
+            </a:pPr>
+            <a:r>
+              <a:rPr lang="en-US" sz="1200" b="1" spc="400" kern="0" dirty="0">
+                <a:solidFill>
+                  <a:srgbClr val="1E2761"/>
+                </a:solidFill>
+                <a:latin typeface="Calibri" pitchFamily="34" charset="0"/>
+                <a:ea typeface="Calibri" pitchFamily="34" charset="-122"/>
+                <a:cs typeface="Calibri" pitchFamily="34" charset="-120"/>
+              </a:rPr>
+              <a:t>THREE-LAYER READINESS  —  P0 → P1 BOUNDARY</a:t>
+            </a:r>
+            <a:endParaRPr lang="en-US" sz="1200" dirty="0"/>
+          </a:p>
+        </p:txBody>
+      </p:sp>
+      <p:sp>
+        <p:nvSpPr>
+          <p:cNvPr id="27" name="Shape 25"/>
+          <p:cNvSpPr/>
+          <p:nvPr/>
+        </p:nvSpPr>
+        <p:spPr>
+          <a:xfrm>
+            <a:off x="365760" y="4251960"/>
+            <a:ext cx="3657600" cy="1691640"/>
+          </a:xfrm>
+          <a:prstGeom prst="rect">
+            <a:avLst/>
+          </a:prstGeom>
+          <a:solidFill>
+            <a:srgbClr val="FFFFFF"/>
+          </a:solidFill>
+          <a:ln w="12700">
+            <a:solidFill>
+              <a:srgbClr val="E2E8F0"/>
+            </a:solidFill>
+            <a:prstDash val="solid"/>
+          </a:ln>
           <a:effectLst>
             <a:outerShdw sx="100000" sy="100000" kx="0" ky="0" algn="bl" rotWithShape="0" blurRad="101600" dist="25400" dir="5400000">
               <a:srgbClr val="000000">
@@ -10422,16 +10847,16 @@
       </p:sp>
       <p:sp>
         <p:nvSpPr>
-          <p:cNvPr id="6" name="Shape 4"/>
-          <p:cNvSpPr/>
-          <p:nvPr/>
-        </p:nvSpPr>
-        <p:spPr>
-          <a:xfrm>
-            <a:off x="1463040" y="2834640"/>
-            <a:ext cx="109728" cy="2194560"/>
-          </a:xfrm>
-          <a:prstGeom prst="rect">
+          <p:cNvPr id="28" name="Shape 26"/>
+          <p:cNvSpPr/>
+          <p:nvPr/>
+        </p:nvSpPr>
+        <p:spPr>
+          <a:xfrm>
+            <a:off x="685800" y="4572000"/>
+            <a:ext cx="640080" cy="640080"/>
+          </a:xfrm>
+          <a:prstGeom prst="ellipse">
             <a:avLst/>
           </a:prstGeom>
           <a:solidFill>
@@ -10442,92 +10867,53 @@
       </p:sp>
       <p:sp>
         <p:nvSpPr>
-          <p:cNvPr id="7" name="Text 5"/>
-          <p:cNvSpPr/>
-          <p:nvPr/>
-        </p:nvSpPr>
-        <p:spPr>
-          <a:xfrm>
-            <a:off x="1828800" y="3063240"/>
-            <a:ext cx="8686800" cy="365760"/>
-          </a:xfrm>
-          <a:prstGeom prst="rect">
-            <a:avLst/>
-          </a:prstGeom>
-          <a:noFill/>
-          <a:ln/>
-        </p:spPr>
-        <p:txBody>
-          <a:bodyPr wrap="square" lIns="0" tIns="0" rIns="0" bIns="0" rtlCol="0" anchor="ctr"/>
-          <a:lstStyle/>
-          <a:p>
-            <a:pPr indent="0" marL="0">
-              <a:buNone/>
-            </a:pPr>
-            <a:r>
-              <a:rPr lang="en-US" sz="1200" b="1" spc="400" kern="0" dirty="0">
-                <a:solidFill>
-                  <a:srgbClr val="E6B22E"/>
-                </a:solidFill>
-                <a:latin typeface="Calibri" pitchFamily="34" charset="0"/>
-                <a:ea typeface="Calibri" pitchFamily="34" charset="-122"/>
-                <a:cs typeface="Calibri" pitchFamily="34" charset="-120"/>
-              </a:rPr>
-              <a:t>ATTACH THE FILE.  ASK ONE QUESTION.</a:t>
-            </a:r>
-            <a:endParaRPr lang="en-US" sz="1200" dirty="0"/>
-          </a:p>
-        </p:txBody>
-      </p:sp>
-      <p:sp>
-        <p:nvSpPr>
-          <p:cNvPr id="8" name="Text 6"/>
-          <p:cNvSpPr/>
-          <p:nvPr/>
-        </p:nvSpPr>
-        <p:spPr>
-          <a:xfrm>
-            <a:off x="1828800" y="3520440"/>
-            <a:ext cx="8686800" cy="1051560"/>
-          </a:xfrm>
-          <a:prstGeom prst="rect">
-            <a:avLst/>
-          </a:prstGeom>
-          <a:noFill/>
-          <a:ln/>
-        </p:spPr>
-        <p:txBody>
-          <a:bodyPr wrap="square" lIns="0" tIns="0" rIns="0" bIns="0" rtlCol="0" anchor="ctr"/>
-          <a:lstStyle/>
-          <a:p>
-            <a:pPr indent="0" marL="0">
-              <a:buNone/>
-            </a:pPr>
-            <a:r>
-              <a:rPr lang="en-US" sz="6400" b="1" i="1" dirty="0">
-                <a:solidFill>
-                  <a:srgbClr val="FFFFFF"/>
+          <p:cNvPr id="29" name="Text 27"/>
+          <p:cNvSpPr/>
+          <p:nvPr/>
+        </p:nvSpPr>
+        <p:spPr>
+          <a:xfrm>
+            <a:off x="685800" y="4572000"/>
+            <a:ext cx="640080" cy="640080"/>
+          </a:xfrm>
+          <a:prstGeom prst="rect">
+            <a:avLst/>
+          </a:prstGeom>
+          <a:noFill/>
+          <a:ln/>
+        </p:spPr>
+        <p:txBody>
+          <a:bodyPr wrap="square" lIns="0" tIns="0" rIns="0" bIns="0" rtlCol="0" anchor="ctr"/>
+          <a:lstStyle/>
+          <a:p>
+            <a:pPr algn="ctr" indent="0" marL="0">
+              <a:buNone/>
+            </a:pPr>
+            <a:r>
+              <a:rPr lang="en-US" sz="2400" b="1" dirty="0">
+                <a:solidFill>
+                  <a:srgbClr val="1E2761"/>
                 </a:solidFill>
                 <a:latin typeface="Georgia" pitchFamily="34" charset="0"/>
                 <a:ea typeface="Georgia" pitchFamily="34" charset="-122"/>
                 <a:cs typeface="Georgia" pitchFamily="34" charset="-120"/>
               </a:rPr>
-              <a:t>“What’s next?”</a:t>
-            </a:r>
-            <a:endParaRPr lang="en-US" sz="6400" dirty="0"/>
-          </a:p>
-        </p:txBody>
-      </p:sp>
-      <p:sp>
-        <p:nvSpPr>
-          <p:cNvPr id="9" name="Text 7"/>
-          <p:cNvSpPr/>
-          <p:nvPr/>
-        </p:nvSpPr>
-        <p:spPr>
-          <a:xfrm>
-            <a:off x="1828800" y="4572000"/>
-            <a:ext cx="8686800" cy="365760"/>
+              <a:t>1</a:t>
+            </a:r>
+            <a:endParaRPr lang="en-US" sz="2400" dirty="0"/>
+          </a:p>
+        </p:txBody>
+      </p:sp>
+      <p:sp>
+        <p:nvSpPr>
+          <p:cNvPr id="30" name="Text 28"/>
+          <p:cNvSpPr/>
+          <p:nvPr/>
+        </p:nvSpPr>
+        <p:spPr>
+          <a:xfrm>
+            <a:off x="1463040" y="4572000"/>
+            <a:ext cx="2423160" cy="411480"/>
           </a:xfrm>
           <a:prstGeom prst="rect">
             <a:avLst/>
@@ -10543,30 +10929,121 @@
               <a:buNone/>
             </a:pPr>
             <a:r>
-              <a:rPr lang="en-US" sz="1300" i="1" dirty="0">
-                <a:solidFill>
-                  <a:srgbClr val="CADCFC"/>
-                </a:solidFill>
-                <a:latin typeface="Calibri" pitchFamily="34" charset="0"/>
-                <a:ea typeface="Calibri" pitchFamily="34" charset="-122"/>
-                <a:cs typeface="Calibri" pitchFamily="34" charset="-120"/>
-              </a:rPr>
-              <a:t>Universal entry point. Works for start, resume, or “where was I?” after a long pause.</a:t>
-            </a:r>
-            <a:endParaRPr lang="en-US" sz="1300" dirty="0"/>
-          </a:p>
-        </p:txBody>
-      </p:sp>
-      <p:sp>
-        <p:nvSpPr>
-          <p:cNvPr id="10" name="Text 8"/>
-          <p:cNvSpPr/>
-          <p:nvPr/>
-        </p:nvSpPr>
-        <p:spPr>
-          <a:xfrm>
-            <a:off x="731520" y="5577840"/>
-            <a:ext cx="10698480" cy="365760"/>
+              <a:rPr lang="en-US" sz="1400" b="1" dirty="0">
+                <a:solidFill>
+                  <a:srgbClr val="1E293B"/>
+                </a:solidFill>
+                <a:latin typeface="Calibri" pitchFamily="34" charset="0"/>
+                <a:ea typeface="Calibri" pitchFamily="34" charset="-122"/>
+                <a:cs typeface="Calibri" pitchFamily="34" charset="-120"/>
+              </a:rPr>
+              <a:t>Structural completeness</a:t>
+            </a:r>
+            <a:endParaRPr lang="en-US" sz="1400" dirty="0"/>
+          </a:p>
+        </p:txBody>
+      </p:sp>
+      <p:sp>
+        <p:nvSpPr>
+          <p:cNvPr id="31" name="Text 29"/>
+          <p:cNvSpPr/>
+          <p:nvPr/>
+        </p:nvSpPr>
+        <p:spPr>
+          <a:xfrm>
+            <a:off x="685800" y="5257800"/>
+            <a:ext cx="3154680" cy="640080"/>
+          </a:xfrm>
+          <a:prstGeom prst="rect">
+            <a:avLst/>
+          </a:prstGeom>
+          <a:noFill/>
+          <a:ln/>
+        </p:spPr>
+        <p:txBody>
+          <a:bodyPr wrap="square" lIns="0" tIns="0" rIns="0" bIns="0" rtlCol="0" anchor="ctr"/>
+          <a:lstStyle/>
+          <a:p>
+            <a:pPr indent="0" marL="0">
+              <a:buNone/>
+            </a:pPr>
+            <a:r>
+              <a:rPr lang="en-US" sz="1200" dirty="0">
+                <a:solidFill>
+                  <a:srgbClr val="64748B"/>
+                </a:solidFill>
+                <a:latin typeface="Calibri" pitchFamily="34" charset="0"/>
+                <a:ea typeface="Calibri" pitchFamily="34" charset="-122"/>
+                <a:cs typeface="Calibri" pitchFamily="34" charset="-120"/>
+              </a:rPr>
+              <a:t>Every planned prompt has all six required fields.</a:t>
+            </a:r>
+            <a:endParaRPr lang="en-US" sz="1200" dirty="0"/>
+          </a:p>
+        </p:txBody>
+      </p:sp>
+      <p:sp>
+        <p:nvSpPr>
+          <p:cNvPr id="32" name="Shape 30"/>
+          <p:cNvSpPr/>
+          <p:nvPr/>
+        </p:nvSpPr>
+        <p:spPr>
+          <a:xfrm>
+            <a:off x="4251960" y="4251960"/>
+            <a:ext cx="3657600" cy="1691640"/>
+          </a:xfrm>
+          <a:prstGeom prst="rect">
+            <a:avLst/>
+          </a:prstGeom>
+          <a:solidFill>
+            <a:srgbClr val="FFFFFF"/>
+          </a:solidFill>
+          <a:ln w="12700">
+            <a:solidFill>
+              <a:srgbClr val="E2E8F0"/>
+            </a:solidFill>
+            <a:prstDash val="solid"/>
+          </a:ln>
+          <a:effectLst>
+            <a:outerShdw sx="100000" sy="100000" kx="0" ky="0" algn="bl" rotWithShape="0" blurRad="101600" dist="25400" dir="5400000">
+              <a:srgbClr val="000000">
+                <a:alpha val="6000"/>
+              </a:srgbClr>
+            </a:outerShdw>
+          </a:effectLst>
+        </p:spPr>
+      </p:sp>
+      <p:sp>
+        <p:nvSpPr>
+          <p:cNvPr id="33" name="Shape 31"/>
+          <p:cNvSpPr/>
+          <p:nvPr/>
+        </p:nvSpPr>
+        <p:spPr>
+          <a:xfrm>
+            <a:off x="4572000" y="4572000"/>
+            <a:ext cx="640080" cy="640080"/>
+          </a:xfrm>
+          <a:prstGeom prst="ellipse">
+            <a:avLst/>
+          </a:prstGeom>
+          <a:solidFill>
+            <a:srgbClr val="E6B22E"/>
+          </a:solidFill>
+          <a:ln/>
+        </p:spPr>
+      </p:sp>
+      <p:sp>
+        <p:nvSpPr>
+          <p:cNvPr id="34" name="Text 32"/>
+          <p:cNvSpPr/>
+          <p:nvPr/>
+        </p:nvSpPr>
+        <p:spPr>
+          <a:xfrm>
+            <a:off x="4572000" y="4572000"/>
+            <a:ext cx="640080" cy="640080"/>
           </a:xfrm>
           <a:prstGeom prst="rect">
             <a:avLst/>
@@ -10582,7 +11059,7 @@
               <a:buNone/>
             </a:pPr>
             <a:r>
-              <a:rPr lang="en-US" sz="1300" i="1" dirty="0">
+              <a:rPr lang="en-US" sz="2400" b="1" dirty="0">
                 <a:solidFill>
                   <a:srgbClr val="1E2761"/>
                 </a:solidFill>
@@ -10590,15 +11067,262 @@
                 <a:ea typeface="Georgia" pitchFamily="34" charset="-122"/>
                 <a:cs typeface="Georgia" pitchFamily="34" charset="-120"/>
               </a:rPr>
-              <a:t>You never reconstruct from memory. The Master is the source of truth.  (SP-1)</a:t>
-            </a:r>
-            <a:endParaRPr lang="en-US" sz="1300" dirty="0"/>
-          </a:p>
-        </p:txBody>
-      </p:sp>
-      <p:sp>
-        <p:nvSpPr>
-          <p:cNvPr id="11" name="Text 9"/>
+              <a:t>2</a:t>
+            </a:r>
+            <a:endParaRPr lang="en-US" sz="2400" dirty="0"/>
+          </a:p>
+        </p:txBody>
+      </p:sp>
+      <p:sp>
+        <p:nvSpPr>
+          <p:cNvPr id="35" name="Text 33"/>
+          <p:cNvSpPr/>
+          <p:nvPr/>
+        </p:nvSpPr>
+        <p:spPr>
+          <a:xfrm>
+            <a:off x="5349240" y="4572000"/>
+            <a:ext cx="2423160" cy="411480"/>
+          </a:xfrm>
+          <a:prstGeom prst="rect">
+            <a:avLst/>
+          </a:prstGeom>
+          <a:noFill/>
+          <a:ln/>
+        </p:spPr>
+        <p:txBody>
+          <a:bodyPr wrap="square" lIns="0" tIns="0" rIns="0" bIns="0" rtlCol="0" anchor="ctr"/>
+          <a:lstStyle/>
+          <a:p>
+            <a:pPr indent="0" marL="0">
+              <a:buNone/>
+            </a:pPr>
+            <a:r>
+              <a:rPr lang="en-US" sz="1400" b="1" dirty="0">
+                <a:solidFill>
+                  <a:srgbClr val="1E293B"/>
+                </a:solidFill>
+                <a:latin typeface="Calibri" pitchFamily="34" charset="0"/>
+                <a:ea typeface="Calibri" pitchFamily="34" charset="-122"/>
+                <a:cs typeface="Calibri" pitchFamily="34" charset="-120"/>
+              </a:rPr>
+              <a:t>Library coverage saturation</a:t>
+            </a:r>
+            <a:endParaRPr lang="en-US" sz="1400" dirty="0"/>
+          </a:p>
+        </p:txBody>
+      </p:sp>
+      <p:sp>
+        <p:nvSpPr>
+          <p:cNvPr id="36" name="Text 34"/>
+          <p:cNvSpPr/>
+          <p:nvPr/>
+        </p:nvSpPr>
+        <p:spPr>
+          <a:xfrm>
+            <a:off x="4572000" y="5257800"/>
+            <a:ext cx="3154680" cy="640080"/>
+          </a:xfrm>
+          <a:prstGeom prst="rect">
+            <a:avLst/>
+          </a:prstGeom>
+          <a:noFill/>
+          <a:ln/>
+        </p:spPr>
+        <p:txBody>
+          <a:bodyPr wrap="square" lIns="0" tIns="0" rIns="0" bIns="0" rtlCol="0" anchor="ctr"/>
+          <a:lstStyle/>
+          <a:p>
+            <a:pPr indent="0" marL="0">
+              <a:buNone/>
+            </a:pPr>
+            <a:r>
+              <a:rPr lang="en-US" sz="1200" dirty="0">
+                <a:solidFill>
+                  <a:srgbClr val="64748B"/>
+                </a:solidFill>
+                <a:latin typeface="Calibri" pitchFamily="34" charset="0"/>
+                <a:ea typeface="Calibri" pitchFamily="34" charset="-122"/>
+                <a:cs typeface="Calibri" pitchFamily="34" charset="-120"/>
+              </a:rPr>
+              <a:t>Every applicable Lens covered or explicitly out of scope.</a:t>
+            </a:r>
+            <a:endParaRPr lang="en-US" sz="1200" dirty="0"/>
+          </a:p>
+        </p:txBody>
+      </p:sp>
+      <p:sp>
+        <p:nvSpPr>
+          <p:cNvPr id="37" name="Shape 35"/>
+          <p:cNvSpPr/>
+          <p:nvPr/>
+        </p:nvSpPr>
+        <p:spPr>
+          <a:xfrm>
+            <a:off x="8138160" y="4251960"/>
+            <a:ext cx="3657600" cy="1691640"/>
+          </a:xfrm>
+          <a:prstGeom prst="rect">
+            <a:avLst/>
+          </a:prstGeom>
+          <a:solidFill>
+            <a:srgbClr val="FFFFFF"/>
+          </a:solidFill>
+          <a:ln w="12700">
+            <a:solidFill>
+              <a:srgbClr val="E2E8F0"/>
+            </a:solidFill>
+            <a:prstDash val="solid"/>
+          </a:ln>
+          <a:effectLst>
+            <a:outerShdw sx="100000" sy="100000" kx="0" ky="0" algn="bl" rotWithShape="0" blurRad="101600" dist="25400" dir="5400000">
+              <a:srgbClr val="000000">
+                <a:alpha val="6000"/>
+              </a:srgbClr>
+            </a:outerShdw>
+          </a:effectLst>
+        </p:spPr>
+      </p:sp>
+      <p:sp>
+        <p:nvSpPr>
+          <p:cNvPr id="38" name="Shape 36"/>
+          <p:cNvSpPr/>
+          <p:nvPr/>
+        </p:nvSpPr>
+        <p:spPr>
+          <a:xfrm>
+            <a:off x="8458200" y="4572000"/>
+            <a:ext cx="640080" cy="640080"/>
+          </a:xfrm>
+          <a:prstGeom prst="ellipse">
+            <a:avLst/>
+          </a:prstGeom>
+          <a:solidFill>
+            <a:srgbClr val="E6B22E"/>
+          </a:solidFill>
+          <a:ln/>
+        </p:spPr>
+      </p:sp>
+      <p:sp>
+        <p:nvSpPr>
+          <p:cNvPr id="39" name="Text 37"/>
+          <p:cNvSpPr/>
+          <p:nvPr/>
+        </p:nvSpPr>
+        <p:spPr>
+          <a:xfrm>
+            <a:off x="8458200" y="4572000"/>
+            <a:ext cx="640080" cy="640080"/>
+          </a:xfrm>
+          <a:prstGeom prst="rect">
+            <a:avLst/>
+          </a:prstGeom>
+          <a:noFill/>
+          <a:ln/>
+        </p:spPr>
+        <p:txBody>
+          <a:bodyPr wrap="square" lIns="0" tIns="0" rIns="0" bIns="0" rtlCol="0" anchor="ctr"/>
+          <a:lstStyle/>
+          <a:p>
+            <a:pPr algn="ctr" indent="0" marL="0">
+              <a:buNone/>
+            </a:pPr>
+            <a:r>
+              <a:rPr lang="en-US" sz="2400" b="1" dirty="0">
+                <a:solidFill>
+                  <a:srgbClr val="1E2761"/>
+                </a:solidFill>
+                <a:latin typeface="Georgia" pitchFamily="34" charset="0"/>
+                <a:ea typeface="Georgia" pitchFamily="34" charset="-122"/>
+                <a:cs typeface="Georgia" pitchFamily="34" charset="-120"/>
+              </a:rPr>
+              <a:t>3</a:t>
+            </a:r>
+            <a:endParaRPr lang="en-US" sz="2400" dirty="0"/>
+          </a:p>
+        </p:txBody>
+      </p:sp>
+      <p:sp>
+        <p:nvSpPr>
+          <p:cNvPr id="40" name="Text 38"/>
+          <p:cNvSpPr/>
+          <p:nvPr/>
+        </p:nvSpPr>
+        <p:spPr>
+          <a:xfrm>
+            <a:off x="9235440" y="4572000"/>
+            <a:ext cx="2423160" cy="411480"/>
+          </a:xfrm>
+          <a:prstGeom prst="rect">
+            <a:avLst/>
+          </a:prstGeom>
+          <a:noFill/>
+          <a:ln/>
+        </p:spPr>
+        <p:txBody>
+          <a:bodyPr wrap="square" lIns="0" tIns="0" rIns="0" bIns="0" rtlCol="0" anchor="ctr"/>
+          <a:lstStyle/>
+          <a:p>
+            <a:pPr indent="0" marL="0">
+              <a:buNone/>
+            </a:pPr>
+            <a:r>
+              <a:rPr lang="en-US" sz="1400" b="1" dirty="0">
+                <a:solidFill>
+                  <a:srgbClr val="1E293B"/>
+                </a:solidFill>
+                <a:latin typeface="Calibri" pitchFamily="34" charset="0"/>
+                <a:ea typeface="Calibri" pitchFamily="34" charset="-122"/>
+                <a:cs typeface="Calibri" pitchFamily="34" charset="-120"/>
+              </a:rPr>
+              <a:t>Operator ratification</a:t>
+            </a:r>
+            <a:endParaRPr lang="en-US" sz="1400" dirty="0"/>
+          </a:p>
+        </p:txBody>
+      </p:sp>
+      <p:sp>
+        <p:nvSpPr>
+          <p:cNvPr id="41" name="Text 39"/>
+          <p:cNvSpPr/>
+          <p:nvPr/>
+        </p:nvSpPr>
+        <p:spPr>
+          <a:xfrm>
+            <a:off x="8458200" y="5257800"/>
+            <a:ext cx="3154680" cy="640080"/>
+          </a:xfrm>
+          <a:prstGeom prst="rect">
+            <a:avLst/>
+          </a:prstGeom>
+          <a:noFill/>
+          <a:ln/>
+        </p:spPr>
+        <p:txBody>
+          <a:bodyPr wrap="square" lIns="0" tIns="0" rIns="0" bIns="0" rtlCol="0" anchor="ctr"/>
+          <a:lstStyle/>
+          <a:p>
+            <a:pPr indent="0" marL="0">
+              <a:buNone/>
+            </a:pPr>
+            <a:r>
+              <a:rPr lang="en-US" sz="1200" dirty="0">
+                <a:solidFill>
+                  <a:srgbClr val="64748B"/>
+                </a:solidFill>
+                <a:latin typeface="Calibri" pitchFamily="34" charset="0"/>
+                <a:ea typeface="Calibri" pitchFamily="34" charset="-122"/>
+                <a:cs typeface="Calibri" pitchFamily="34" charset="-120"/>
+              </a:rPr>
+              <a:t>Free-form approval. Silence is never consent (SP-9).</a:t>
+            </a:r>
+            <a:endParaRPr lang="en-US" sz="1200" dirty="0"/>
+          </a:p>
+        </p:txBody>
+      </p:sp>
+      <p:sp>
+        <p:nvSpPr>
+          <p:cNvPr id="42" name="Text 40"/>
           <p:cNvSpPr/>
           <p:nvPr/>
         </p:nvSpPr>
@@ -10637,7 +11361,7 @@
       </p:sp>
       <p:sp>
         <p:nvSpPr>
-          <p:cNvPr id="12" name="Text 10"/>
+          <p:cNvPr id="43" name="Text 41"/>
           <p:cNvSpPr/>
           <p:nvPr/>
         </p:nvSpPr>
@@ -10668,7 +11392,7 @@
                 <a:ea typeface="Calibri" pitchFamily="34" charset="-122"/>
                 <a:cs typeface="Calibri" pitchFamily="34" charset="-120"/>
               </a:rPr>
-              <a:t>9 / 12</a:t>
+              <a:t>9 / 13</a:t>
             </a:r>
             <a:endParaRPr lang="en-US" sz="1000" dirty="0"/>
           </a:p>

--- a/assets/PRISM_teaser.pptx
+++ b/assets/PRISM_teaser.pptx
@@ -7060,7 +7060,7 @@
                 <a:ea typeface="Calibri" pitchFamily="34" charset="-122"/>
                 <a:cs typeface="Calibri" pitchFamily="34" charset="-120"/>
               </a:rPr>
-              <a:t>MOBILE-FIRST BY CONSTRAINT</a:t>
+              <a:t>MOBILE-FIRST BY DESIGN</a:t>
             </a:r>
             <a:endParaRPr lang="en-US" sz="1200" dirty="0"/>
           </a:p>
@@ -7099,7 +7099,7 @@
                 <a:ea typeface="Georgia" pitchFamily="34" charset="-122"/>
                 <a:cs typeface="Georgia" pitchFamily="34" charset="-120"/>
               </a:rPr>
-              <a:t>The substrate dictates the architecture.</a:t>
+              <a:t>Designed around how you actually work.</a:t>
             </a:r>
             <a:endParaRPr lang="en-US" sz="3200" dirty="0"/>
           </a:p>
@@ -7138,7 +7138,7 @@
                 <a:ea typeface="Georgia" pitchFamily="34" charset="-122"/>
                 <a:cs typeface="Georgia" pitchFamily="34" charset="-120"/>
               </a:rPr>
-              <a:t>PRISM is shaped around how the operator actually works: a phone, a chat box, a markdown file. No plugins, no automation, no special tooling required.</a:t>
+              <a:t>The real substrate is a human moving artifacts between vendor chats, often on a phone. PRISM is built for that — file-based outputs, filename discipline, operator hints, and “What’s next” all serve it directly.</a:t>
             </a:r>
             <a:endParaRPr lang="en-US" sz="1400" dirty="0"/>
           </a:p>
@@ -7546,7 +7546,7 @@
                 <a:ea typeface="Georgia" pitchFamily="34" charset="-122"/>
                 <a:cs typeface="Georgia" pitchFamily="34" charset="-120"/>
               </a:rPr>
-              <a:t>Three-leg constraint (§1.3): Operator  ·  Substrate  ·  Methodology  —  mechanics that violate any leg don’t earn their place.</a:t>
+              <a:t>Three-leg design (§1.3): Operator  ·  Substrate  ·  Methodology  —  every mechanic earns its place by serving all three.</a:t>
             </a:r>
             <a:endParaRPr lang="en-US" sz="1300" dirty="0"/>
           </a:p>
